--- a/reports/presentations/bike_weekly_meeting_10_20_reviewed.pptx
+++ b/reports/presentations/bike_weekly_meeting_10_20_reviewed.pptx
@@ -1,29 +1,28 @@
 
 <file path=ppt/presentation.xml><?xml version="1.0" encoding="utf-8"?>
-<p:presentation xmlns:p="http://schemas.openxmlformats.org/presentationml/2006/main">
+<p:presentation xmlns:a="http://schemas.openxmlformats.org/drawingml/2006/main" xmlns:r="http://schemas.openxmlformats.org/officeDocument/2006/relationships" xmlns:p="http://schemas.openxmlformats.org/presentationml/2006/main">
   <p:sldMasterIdLst>
-    <p:sldMasterId xmlns:r="http://schemas.openxmlformats.org/officeDocument/2006/relationships" id="2147483648" r:id="R03f5bdefe72b4391"/>
+    <p:sldMasterId id="2147483648" r:id="rId1"/>
   </p:sldMasterIdLst>
   <p:notesMasterIdLst>
-    <p:notesMasterId xmlns:r="http://schemas.openxmlformats.org/officeDocument/2006/relationships" r:id="R97550b09463246e0"/>
+    <p:notesMasterId r:id="rId9"/>
   </p:notesMasterIdLst>
   <p:sldIdLst>
-    <p:sldId xmlns:r="http://schemas.openxmlformats.org/officeDocument/2006/relationships" id="256" r:id="R0dd08dfc7f884acb"/>
-    <p:sldId xmlns:r="http://schemas.openxmlformats.org/officeDocument/2006/relationships" id="257" r:id="Rf207a60155434c58"/>
-    <p:sldId xmlns:r="http://schemas.openxmlformats.org/officeDocument/2006/relationships" id="258" r:id="Rc73a4ba318c8471f"/>
-    <p:sldId xmlns:r="http://schemas.openxmlformats.org/officeDocument/2006/relationships" id="259" r:id="R8e5d1849c08443e4"/>
-    <p:sldId xmlns:r="http://schemas.openxmlformats.org/officeDocument/2006/relationships" id="260" r:id="Rc1f3821727ab4b16"/>
-    <p:sldId xmlns:r="http://schemas.openxmlformats.org/officeDocument/2006/relationships" id="261" r:id="R67438ae5cb7e4eaf"/>
-    <p:sldId xmlns:r="http://schemas.openxmlformats.org/officeDocument/2006/relationships" id="262" r:id="R02126f365f2642dd"/>
-    <p:sldId xmlns:r="http://schemas.openxmlformats.org/officeDocument/2006/relationships" id="263" r:id="R1bb9a2a83828428f"/>
+    <p:sldId id="256" r:id="rId2"/>
+    <p:sldId id="258" r:id="rId3"/>
+    <p:sldId id="259" r:id="rId4"/>
+    <p:sldId id="260" r:id="rId5"/>
+    <p:sldId id="261" r:id="rId6"/>
+    <p:sldId id="262" r:id="rId7"/>
+    <p:sldId id="263" r:id="rId8"/>
   </p:sldIdLst>
   <p:sldSz cx="12192000" cy="6858000"/>
   <p:notesSz cx="6858000" cy="9144000"/>
   <p:defaultTextStyle>
-    <a:defPPr xmlns:a="http://schemas.openxmlformats.org/drawingml/2006/main">
+    <a:defPPr>
       <a:defRPr lang="en-US"/>
     </a:defPPr>
-    <a:lvl1pPr xmlns:a="http://schemas.openxmlformats.org/drawingml/2006/main" marL="0" indent="0" algn="l" defTabSz="914400">
+    <a:lvl1pPr marL="0" indent="0" algn="l" defTabSz="914400">
       <a:defRPr sz="1800" kern="1200">
         <a:solidFill>
           <a:schemeClr val="tx1"/>
@@ -33,7 +32,7 @@
         <a:cs typeface="+mn-cs"/>
       </a:defRPr>
     </a:lvl1pPr>
-    <a:lvl2pPr xmlns:a="http://schemas.openxmlformats.org/drawingml/2006/main" marL="457200" indent="0" algn="l" defTabSz="914400">
+    <a:lvl2pPr marL="457200" indent="0" algn="l" defTabSz="914400">
       <a:defRPr sz="1800" kern="1200">
         <a:solidFill>
           <a:schemeClr val="tx1"/>
@@ -43,7 +42,7 @@
         <a:cs typeface="+mn-cs"/>
       </a:defRPr>
     </a:lvl2pPr>
-    <a:lvl3pPr xmlns:a="http://schemas.openxmlformats.org/drawingml/2006/main" marL="914400" indent="0" algn="l" defTabSz="914400">
+    <a:lvl3pPr marL="914400" indent="0" algn="l" defTabSz="914400">
       <a:defRPr sz="1800" kern="1200">
         <a:solidFill>
           <a:schemeClr val="tx1"/>
@@ -53,7 +52,7 @@
         <a:cs typeface="+mn-cs"/>
       </a:defRPr>
     </a:lvl3pPr>
-    <a:lvl4pPr xmlns:a="http://schemas.openxmlformats.org/drawingml/2006/main" marL="1371600" indent="0" algn="l" defTabSz="914400">
+    <a:lvl4pPr marL="1371600" indent="0" algn="l" defTabSz="914400">
       <a:defRPr sz="1800" kern="1200">
         <a:solidFill>
           <a:schemeClr val="tx1"/>
@@ -63,7 +62,7 @@
         <a:cs typeface="+mn-cs"/>
       </a:defRPr>
     </a:lvl4pPr>
-    <a:lvl5pPr xmlns:a="http://schemas.openxmlformats.org/drawingml/2006/main" marL="1828800" indent="0" algn="l" defTabSz="914400">
+    <a:lvl5pPr marL="1828800" indent="0" algn="l" defTabSz="914400">
       <a:defRPr sz="1800" kern="1200">
         <a:solidFill>
           <a:schemeClr val="tx1"/>
@@ -73,7 +72,7 @@
         <a:cs typeface="+mn-cs"/>
       </a:defRPr>
     </a:lvl5pPr>
-    <a:lvl6pPr xmlns:a="http://schemas.openxmlformats.org/drawingml/2006/main" marL="2286000" indent="0" algn="l" defTabSz="914400">
+    <a:lvl6pPr marL="2286000" indent="0" algn="l" defTabSz="914400">
       <a:defRPr sz="1800" kern="1200">
         <a:solidFill>
           <a:schemeClr val="tx1"/>
@@ -83,7 +82,7 @@
         <a:cs typeface="+mn-cs"/>
       </a:defRPr>
     </a:lvl6pPr>
-    <a:lvl7pPr xmlns:a="http://schemas.openxmlformats.org/drawingml/2006/main" marL="2743200" indent="0" algn="l" defTabSz="914400">
+    <a:lvl7pPr marL="2743200" indent="0" algn="l" defTabSz="914400">
       <a:defRPr sz="1800" kern="1200">
         <a:solidFill>
           <a:schemeClr val="tx1"/>
@@ -93,7 +92,7 @@
         <a:cs typeface="+mn-cs"/>
       </a:defRPr>
     </a:lvl7pPr>
-    <a:lvl8pPr xmlns:a="http://schemas.openxmlformats.org/drawingml/2006/main" marL="3200400" indent="0" algn="l" defTabSz="914400">
+    <a:lvl8pPr marL="3200400" indent="0" algn="l" defTabSz="914400">
       <a:defRPr sz="1800" kern="1200">
         <a:solidFill>
           <a:schemeClr val="tx1"/>
@@ -103,7 +102,7 @@
         <a:cs typeface="+mn-cs"/>
       </a:defRPr>
     </a:lvl8pPr>
-    <a:lvl9pPr xmlns:a="http://schemas.openxmlformats.org/drawingml/2006/main" marL="3657600" indent="0" algn="l" defTabSz="914400">
+    <a:lvl9pPr marL="3657600" indent="0" algn="l" defTabSz="914400">
       <a:defRPr sz="1800" kern="1200">
         <a:solidFill>
           <a:schemeClr val="tx1"/>
@@ -118,11 +117,11 @@
 </file>
 
 <file path=ppt/notesMasters/notesMaster1.xml><?xml version="1.0" encoding="utf-8"?>
-<p:notesMaster xmlns:p="http://schemas.openxmlformats.org/presentationml/2006/main">
+<p:notesMaster xmlns:a="http://schemas.openxmlformats.org/drawingml/2006/main" xmlns:r="http://schemas.openxmlformats.org/officeDocument/2006/relationships" xmlns:p="http://schemas.openxmlformats.org/presentationml/2006/main">
   <p:cSld>
     <p:bg>
       <p:bgRef idx="1001">
-        <a:schemeClr xmlns:a="http://schemas.openxmlformats.org/drawingml/2006/main" val="bg1"/>
+        <a:schemeClr val="bg1"/>
       </p:bgRef>
     </p:bg>
     <p:spTree>
@@ -132,420 +131,164 @@
         <p:nvPr/>
       </p:nvGrpSpPr>
       <p:grpSpPr>
-        <a:xfrm xmlns:a="http://schemas.openxmlformats.org/drawingml/2006/main"/>
+        <a:xfrm>
+          <a:off x="0" y="0"/>
+          <a:ext cx="0" cy="0"/>
+          <a:chOff x="0" y="0"/>
+          <a:chExt cx="0" cy="0"/>
+        </a:xfrm>
       </p:grpSpPr>
       <p:sp>
         <p:nvSpPr>
           <p:cNvPr id="2" name="Header Placeholder"/>
-          <p:cNvSpPr/>
+          <p:cNvSpPr>
+            <a:spLocks noGrp="1"/>
+          </p:cNvSpPr>
           <p:nvPr>
             <p:ph type="hdr" sz="quarter"/>
           </p:nvPr>
         </p:nvSpPr>
         <p:spPr>
-          <a:prstGeom xmlns:a="http://schemas.openxmlformats.org/drawingml/2006/main" prst="rect">
+          <a:prstGeom prst="rect">
             <a:avLst/>
           </a:prstGeom>
         </p:spPr>
         <p:txBody>
-          <a:bodyPr xmlns:a="http://schemas.openxmlformats.org/drawingml/2006/main"/>
-          <a:lstStyle xmlns:a="http://schemas.openxmlformats.org/drawingml/2006/main"/>
-          <a:p xmlns:a="http://schemas.openxmlformats.org/drawingml/2006/main"/>
+          <a:bodyPr/>
+          <a:lstStyle/>
+          <a:p>
+            <a:endParaRPr/>
+          </a:p>
         </p:txBody>
       </p:sp>
       <p:sp>
         <p:nvSpPr>
           <p:cNvPr id="3" name="Date Placeholder"/>
-          <p:cNvSpPr/>
+          <p:cNvSpPr>
+            <a:spLocks noGrp="1"/>
+          </p:cNvSpPr>
           <p:nvPr>
             <p:ph type="dt" sz="quarter" idx="1"/>
           </p:nvPr>
         </p:nvSpPr>
         <p:spPr>
-          <a:prstGeom xmlns:a="http://schemas.openxmlformats.org/drawingml/2006/main" prst="rect">
+          <a:prstGeom prst="rect">
             <a:avLst/>
           </a:prstGeom>
         </p:spPr>
         <p:txBody>
-          <a:bodyPr xmlns:a="http://schemas.openxmlformats.org/drawingml/2006/main"/>
-          <a:lstStyle xmlns:a="http://schemas.openxmlformats.org/drawingml/2006/main"/>
-          <a:p xmlns:a="http://schemas.openxmlformats.org/drawingml/2006/main"/>
+          <a:bodyPr/>
+          <a:lstStyle/>
+          <a:p>
+            <a:endParaRPr/>
+          </a:p>
         </p:txBody>
       </p:sp>
       <p:sp>
         <p:nvSpPr>
           <p:cNvPr id="4" name="Slide Image Placeholder"/>
-          <p:cNvSpPr/>
+          <p:cNvSpPr>
+            <a:spLocks noGrp="1" noRot="1" noChangeAspect="1"/>
+          </p:cNvSpPr>
           <p:nvPr>
             <p:ph type="sldImg" idx="2"/>
           </p:nvPr>
         </p:nvSpPr>
         <p:spPr>
-          <a:prstGeom xmlns:a="http://schemas.openxmlformats.org/drawingml/2006/main" prst="rect">
+          <a:prstGeom prst="rect">
             <a:avLst/>
           </a:prstGeom>
         </p:spPr>
         <p:txBody>
-          <a:bodyPr xmlns:a="http://schemas.openxmlformats.org/drawingml/2006/main"/>
-          <a:lstStyle xmlns:a="http://schemas.openxmlformats.org/drawingml/2006/main"/>
-          <a:p xmlns:a="http://schemas.openxmlformats.org/drawingml/2006/main"/>
+          <a:bodyPr/>
+          <a:lstStyle/>
+          <a:p>
+            <a:endParaRPr/>
+          </a:p>
         </p:txBody>
       </p:sp>
       <p:sp>
         <p:nvSpPr>
           <p:cNvPr id="5" name="Notes Placeholder"/>
-          <p:cNvSpPr/>
+          <p:cNvSpPr>
+            <a:spLocks noGrp="1"/>
+          </p:cNvSpPr>
           <p:nvPr>
             <p:ph type="body" sz="quarter" idx="3"/>
           </p:nvPr>
         </p:nvSpPr>
         <p:spPr>
-          <a:prstGeom xmlns:a="http://schemas.openxmlformats.org/drawingml/2006/main" prst="rect">
+          <a:prstGeom prst="rect">
             <a:avLst/>
           </a:prstGeom>
         </p:spPr>
         <p:txBody>
-          <a:bodyPr xmlns:a="http://schemas.openxmlformats.org/drawingml/2006/main"/>
-          <a:lstStyle xmlns:a="http://schemas.openxmlformats.org/drawingml/2006/main"/>
-          <a:p xmlns:a="http://schemas.openxmlformats.org/drawingml/2006/main"/>
+          <a:bodyPr/>
+          <a:lstStyle/>
+          <a:p>
+            <a:endParaRPr/>
+          </a:p>
         </p:txBody>
       </p:sp>
       <p:sp>
         <p:nvSpPr>
           <p:cNvPr id="6" name="Footer Placeholder"/>
-          <p:cNvSpPr/>
+          <p:cNvSpPr>
+            <a:spLocks noGrp="1"/>
+          </p:cNvSpPr>
           <p:nvPr>
             <p:ph type="ftr" sz="quarter" idx="4"/>
           </p:nvPr>
         </p:nvSpPr>
         <p:spPr>
-          <a:prstGeom xmlns:a="http://schemas.openxmlformats.org/drawingml/2006/main" prst="rect">
+          <a:prstGeom prst="rect">
             <a:avLst/>
           </a:prstGeom>
         </p:spPr>
         <p:txBody>
-          <a:bodyPr xmlns:a="http://schemas.openxmlformats.org/drawingml/2006/main"/>
-          <a:lstStyle xmlns:a="http://schemas.openxmlformats.org/drawingml/2006/main"/>
-          <a:p xmlns:a="http://schemas.openxmlformats.org/drawingml/2006/main"/>
+          <a:bodyPr/>
+          <a:lstStyle/>
+          <a:p>
+            <a:endParaRPr/>
+          </a:p>
         </p:txBody>
       </p:sp>
       <p:sp>
         <p:nvSpPr>
           <p:cNvPr id="7" name="Slide Number Placeholder"/>
-          <p:cNvSpPr/>
+          <p:cNvSpPr>
+            <a:spLocks noGrp="1"/>
+          </p:cNvSpPr>
           <p:nvPr>
             <p:ph type="sldNum" sz="quarter" idx="5"/>
           </p:nvPr>
         </p:nvSpPr>
         <p:spPr>
-          <a:prstGeom xmlns:a="http://schemas.openxmlformats.org/drawingml/2006/main" prst="rect">
+          <a:prstGeom prst="rect">
             <a:avLst/>
           </a:prstGeom>
         </p:spPr>
         <p:txBody>
-          <a:bodyPr xmlns:a="http://schemas.openxmlformats.org/drawingml/2006/main"/>
-          <a:lstStyle xmlns:a="http://schemas.openxmlformats.org/drawingml/2006/main"/>
-          <a:p xmlns:a="http://schemas.openxmlformats.org/drawingml/2006/main"/>
+          <a:bodyPr/>
+          <a:lstStyle/>
+          <a:p>
+            <a:endParaRPr/>
+          </a:p>
         </p:txBody>
       </p:sp>
     </p:spTree>
   </p:cSld>
   <p:clrMap bg1="lt1" tx1="dk1" bg2="lt2" tx2="dk2" accent1="accent1" accent2="accent2" accent3="accent3" accent4="accent4" accent5="accent5" accent6="accent6" hlink="hlink" folHlink="folHlink"/>
   <p:notesStyle>
-    <a:lvl1pPr xmlns:a="http://schemas.openxmlformats.org/drawingml/2006/main" marL="0" algn="l" defTabSz="914400" rtl="0" eaLnBrk="1" latinLnBrk="0" hangingPunct="1">
+    <a:lvl1pPr marL="0" algn="l" defTabSz="914400" rtl="0" eaLnBrk="1" latinLnBrk="0" hangingPunct="1">
       <a:defRPr sz="1200" kern="1200"/>
     </a:lvl1pPr>
   </p:notesStyle>
 </p:notesMaster>
 </file>
 
-<file path=ppt/notesMasters/theme/theme3.xml><?xml version="1.0" encoding="utf-8"?>
-<a:theme xmlns:a="http://schemas.openxmlformats.org/drawingml/2006/main" name="Weekly Update">
-  <a:themeElements>
-    <a:clrScheme name="Weekly Update">
-      <a:dk1>
-        <a:srgbClr val="000000"/>
-      </a:dk1>
-      <a:lt1>
-        <a:srgbClr val="FFFFFF"/>
-      </a:lt1>
-      <a:dk2>
-        <a:srgbClr val="333333"/>
-      </a:dk2>
-      <a:lt2>
-        <a:srgbClr val="EDEDED"/>
-      </a:lt2>
-      <a:accent1>
-        <a:srgbClr val="FFFF00"/>
-      </a:accent1>
-      <a:accent2>
-        <a:srgbClr val="2E7D32"/>
-      </a:accent2>
-      <a:accent3>
-        <a:srgbClr val="E65100"/>
-      </a:accent3>
-      <a:accent4>
-        <a:srgbClr val="C62828"/>
-      </a:accent4>
-      <a:accent5>
-        <a:srgbClr val="1565C0"/>
-      </a:accent5>
-      <a:accent6>
-        <a:srgbClr val="666666"/>
-      </a:accent6>
-      <a:hlink>
-        <a:srgbClr val="1565C0"/>
-      </a:hlink>
-      <a:folHlink>
-        <a:srgbClr val="666666"/>
-      </a:folHlink>
-    </a:clrScheme>
-    <a:fontScheme name="Weekly Update">
-      <a:majorFont>
-        <a:latin typeface="Arial"/>
-        <a:ea typeface=""/>
-        <a:cs typeface=""/>
-        <a:font script="Jpan" typeface="游ゴシック Light"/>
-        <a:font script="Hang" typeface="맑은 고딕"/>
-        <a:font script="Hans" typeface="等线 Light"/>
-        <a:font script="Hant" typeface="新細明體"/>
-        <a:font script="Arab" typeface="Times New Roman"/>
-        <a:font script="Hebr" typeface="Times New Roman"/>
-        <a:font script="Thai" typeface="Angsana New"/>
-        <a:font script="Ethi" typeface="Nyala"/>
-        <a:font script="Beng" typeface="Vrinda"/>
-        <a:font script="Gujr" typeface="Shruti"/>
-        <a:font script="Khmr" typeface="MoolBoran"/>
-        <a:font script="Knda" typeface="Tunga"/>
-        <a:font script="Guru" typeface="Raavi"/>
-        <a:font script="Cans" typeface="Euphemia"/>
-        <a:font script="Cher" typeface="Plantagenet Cherokee"/>
-        <a:font script="Yiii" typeface="Microsoft Yi Baiti"/>
-        <a:font script="Tibt" typeface="Microsoft Himalaya"/>
-        <a:font script="Thaa" typeface="MV Boli"/>
-        <a:font script="Deva" typeface="Mangal"/>
-        <a:font script="Telu" typeface="Gautami"/>
-        <a:font script="Taml" typeface="Latha"/>
-        <a:font script="Syrc" typeface="Estrangelo Edessa"/>
-        <a:font script="Orya" typeface="Kalinga"/>
-        <a:font script="Mlym" typeface="Kartika"/>
-        <a:font script="Laoo" typeface="DokChampa"/>
-        <a:font script="Sinh" typeface="Iskoola Pota"/>
-        <a:font script="Mong" typeface="Mongolian Baiti"/>
-        <a:font script="Viet" typeface="Times New Roman"/>
-        <a:font script="Uigh" typeface="Microsoft Uighur"/>
-        <a:font script="Geor" typeface="Sylfaen"/>
-        <a:font script="Armn" typeface="Arial"/>
-        <a:font script="Bugi" typeface="Leelawadee UI"/>
-        <a:font script="Bopo" typeface="Microsoft JhengHei"/>
-        <a:font script="Java" typeface="Javanese Text"/>
-        <a:font script="Lisu" typeface="Segoe UI"/>
-        <a:font script="Mymr" typeface="Myanmar Text"/>
-        <a:font script="Nkoo" typeface="Ebrima"/>
-        <a:font script="Olck" typeface="Nirmala UI"/>
-        <a:font script="Osma" typeface="Ebrima"/>
-        <a:font script="Phag" typeface="Phagspa"/>
-        <a:font script="Syrn" typeface="Estrangelo Edessa"/>
-        <a:font script="Syrj" typeface="Estrangelo Edessa"/>
-        <a:font script="Syre" typeface="Estrangelo Edessa"/>
-        <a:font script="Sora" typeface="Nirmala UI"/>
-        <a:font script="Tale" typeface="Microsoft Tai Le"/>
-        <a:font script="Talu" typeface="Microsoft New Tai Lue"/>
-        <a:font script="Tfng" typeface="Ebrima"/>
-      </a:majorFont>
-      <a:minorFont>
-        <a:latin typeface="Arial"/>
-        <a:ea typeface=""/>
-        <a:cs typeface=""/>
-        <a:font script="Jpan" typeface="游ゴシック"/>
-        <a:font script="Hang" typeface="맑은 고딕"/>
-        <a:font script="Hans" typeface="等线"/>
-        <a:font script="Hant" typeface="新細明體"/>
-        <a:font script="Arab" typeface="Arial"/>
-        <a:font script="Hebr" typeface="Arial"/>
-        <a:font script="Thai" typeface="Cordia New"/>
-        <a:font script="Ethi" typeface="Nyala"/>
-        <a:font script="Beng" typeface="Vrinda"/>
-        <a:font script="Gujr" typeface="Shruti"/>
-        <a:font script="Khmr" typeface="DaunPenh"/>
-        <a:font script="Knda" typeface="Tunga"/>
-        <a:font script="Guru" typeface="Raavi"/>
-        <a:font script="Cans" typeface="Euphemia"/>
-        <a:font script="Cher" typeface="Plantagenet Cherokee"/>
-        <a:font script="Yiii" typeface="Microsoft Yi Baiti"/>
-        <a:font script="Tibt" typeface="Microsoft Himalaya"/>
-        <a:font script="Thaa" typeface="MV Boli"/>
-        <a:font script="Deva" typeface="Mangal"/>
-        <a:font script="Telu" typeface="Gautami"/>
-        <a:font script="Taml" typeface="Latha"/>
-        <a:font script="Syrc" typeface="Estrangelo Edessa"/>
-        <a:font script="Orya" typeface="Kalinga"/>
-        <a:font script="Mlym" typeface="Kartika"/>
-        <a:font script="Laoo" typeface="DokChampa"/>
-        <a:font script="Sinh" typeface="Iskoola Pota"/>
-        <a:font script="Mong" typeface="Mongolian Baiti"/>
-        <a:font script="Viet" typeface="Arial"/>
-        <a:font script="Uigh" typeface="Microsoft Uighur"/>
-        <a:font script="Geor" typeface="Sylfaen"/>
-        <a:font script="Armn" typeface="Arial"/>
-        <a:font script="Bugi" typeface="Leelawadee UI"/>
-        <a:font script="Bopo" typeface="Microsoft JhengHei"/>
-        <a:font script="Java" typeface="Javanese Text"/>
-        <a:font script="Lisu" typeface="Segoe UI"/>
-        <a:font script="Mymr" typeface="Myanmar Text"/>
-        <a:font script="Nkoo" typeface="Ebrima"/>
-        <a:font script="Olck" typeface="Nirmala UI"/>
-        <a:font script="Osma" typeface="Ebrima"/>
-        <a:font script="Phag" typeface="Phagspa"/>
-        <a:font script="Syrn" typeface="Estrangelo Edessa"/>
-        <a:font script="Syrj" typeface="Estrangelo Edessa"/>
-        <a:font script="Syre" typeface="Estrangelo Edessa"/>
-        <a:font script="Sora" typeface="Nirmala UI"/>
-        <a:font script="Tale" typeface="Microsoft Tai Le"/>
-        <a:font script="Talu" typeface="Microsoft New Tai Lue"/>
-        <a:font script="Tfng" typeface="Ebrima"/>
-      </a:minorFont>
-    </a:fontScheme>
-    <a:fmtScheme name="Weekly Update">
-      <a:fillStyleLst>
-        <a:solidFill>
-          <a:schemeClr val="phClr"/>
-        </a:solidFill>
-        <a:gradFill rotWithShape="1">
-          <a:gsLst>
-            <a:gs pos="0">
-              <a:schemeClr val="phClr">
-                <a:tint val="67000"/>
-                <a:lumMod val="110000"/>
-                <a:satMod val="105000"/>
-              </a:schemeClr>
-            </a:gs>
-            <a:gs pos="50000">
-              <a:schemeClr val="phClr">
-                <a:tint val="73000"/>
-                <a:lumMod val="105000"/>
-                <a:satMod val="103000"/>
-              </a:schemeClr>
-            </a:gs>
-            <a:gs pos="100000">
-              <a:schemeClr val="phClr">
-                <a:tint val="81000"/>
-                <a:lumMod val="105000"/>
-                <a:satMod val="109000"/>
-              </a:schemeClr>
-            </a:gs>
-          </a:gsLst>
-          <a:lin ang="5400000" scaled="0"/>
-        </a:gradFill>
-        <a:gradFill rotWithShape="1">
-          <a:gsLst>
-            <a:gs pos="0">
-              <a:schemeClr val="phClr">
-                <a:tint val="94000"/>
-                <a:lumMod val="102000"/>
-                <a:satMod val="103000"/>
-              </a:schemeClr>
-            </a:gs>
-            <a:gs pos="50000">
-              <a:schemeClr val="phClr">
-                <a:shade val="100000"/>
-                <a:lumMod val="100000"/>
-                <a:satMod val="110000"/>
-              </a:schemeClr>
-            </a:gs>
-            <a:gs pos="100000">
-              <a:schemeClr val="phClr">
-                <a:shade val="78000"/>
-                <a:lumMod val="99000"/>
-                <a:satMod val="120000"/>
-              </a:schemeClr>
-            </a:gs>
-          </a:gsLst>
-          <a:lin ang="5400000" scaled="0"/>
-        </a:gradFill>
-      </a:fillStyleLst>
-      <a:lnStyleLst>
-        <a:ln w="6350">
-          <a:solidFill>
-            <a:schemeClr val="phClr"/>
-          </a:solidFill>
-          <a:prstDash val="solid"/>
-        </a:ln>
-        <a:ln w="12700">
-          <a:solidFill>
-            <a:schemeClr val="phClr"/>
-          </a:solidFill>
-          <a:prstDash val="solid"/>
-        </a:ln>
-        <a:ln w="19050">
-          <a:solidFill>
-            <a:schemeClr val="phClr"/>
-          </a:solidFill>
-          <a:prstDash val="solid"/>
-        </a:ln>
-      </a:lnStyleLst>
-      <a:effectStyleLst>
-        <a:effectStyle>
-          <a:effectLst/>
-        </a:effectStyle>
-        <a:effectStyle>
-          <a:effectLst/>
-        </a:effectStyle>
-        <a:effectStyle>
-          <a:effectLst>
-            <a:outerShdw blurRad="57150" dist="19050" dir="5400000" algn="ctr" rotWithShape="0">
-              <a:srgbClr val="000000">
-                <a:alpha val="63000"/>
-              </a:srgbClr>
-            </a:outerShdw>
-          </a:effectLst>
-        </a:effectStyle>
-      </a:effectStyleLst>
-      <a:bgFillStyleLst>
-        <a:solidFill>
-          <a:schemeClr val="phClr"/>
-        </a:solidFill>
-        <a:solidFill>
-          <a:schemeClr val="phClr">
-            <a:tint val="95000"/>
-            <a:satMod val="170000"/>
-          </a:schemeClr>
-        </a:solidFill>
-        <a:gradFill rotWithShape="1">
-          <a:gsLst>
-            <a:gs pos="0">
-              <a:schemeClr val="phClr">
-                <a:tint val="93000"/>
-                <a:shade val="98000"/>
-                <a:lumMod val="102000"/>
-                <a:satMod val="150000"/>
-              </a:schemeClr>
-            </a:gs>
-            <a:gs pos="50000">
-              <a:schemeClr val="phClr">
-                <a:tint val="98000"/>
-                <a:shade val="90000"/>
-                <a:lumMod val="103000"/>
-                <a:satMod val="130000"/>
-              </a:schemeClr>
-            </a:gs>
-            <a:gs pos="100000">
-              <a:schemeClr val="phClr">
-                <a:shade val="63000"/>
-                <a:satMod val="120000"/>
-              </a:schemeClr>
-            </a:gs>
-          </a:gsLst>
-          <a:lin ang="5400000" scaled="0"/>
-        </a:gradFill>
-      </a:bgFillStyleLst>
-    </a:fmtScheme>
-  </a:themeElements>
-</a:theme>
-</file>
-
 <file path=ppt/notesSlides/notesSlide1.xml><?xml version="1.0" encoding="utf-8"?>
-<p:notes xmlns:p="http://schemas.openxmlformats.org/presentationml/2006/main">
+<p:notes xmlns:a="http://schemas.openxmlformats.org/drawingml/2006/main" xmlns:r="http://schemas.openxmlformats.org/officeDocument/2006/relationships" xmlns:p="http://schemas.openxmlformats.org/presentationml/2006/main">
   <p:cSld>
     <p:spTree>
       <p:nvGrpSpPr>
@@ -554,16 +297,21 @@
         <p:nvPr/>
       </p:nvGrpSpPr>
       <p:grpSpPr>
-        <a:xfrm xmlns:a="http://schemas.openxmlformats.org/drawingml/2006/main"/>
+        <a:xfrm>
+          <a:off x="0" y="0"/>
+          <a:ext cx="0" cy="0"/>
+          <a:chOff x="0" y="0"/>
+          <a:chExt cx="0" cy="0"/>
+        </a:xfrm>
       </p:grpSpPr>
       <p:sp>
         <p:nvSpPr>
           <p:cNvPr id="2" name="Slide Image Placeholder 1"/>
           <p:cNvSpPr>
-            <a:spLocks xmlns:a="http://schemas.openxmlformats.org/drawingml/2006/main" noGrp="1"/>
+            <a:spLocks noGrp="1" noRot="1" noChangeAspect="1"/>
           </p:cNvSpPr>
           <p:nvPr>
-            <p:ph type="sldImg" idx="0"/>
+            <p:ph type="sldImg"/>
           </p:nvPr>
         </p:nvSpPr>
         <p:spPr/>
@@ -572,7 +320,7 @@
         <p:nvSpPr>
           <p:cNvPr id="3" name="Notes Placeholder 2"/>
           <p:cNvSpPr>
-            <a:spLocks xmlns:a="http://schemas.openxmlformats.org/drawingml/2006/main" noGrp="1"/>
+            <a:spLocks noGrp="1"/>
           </p:cNvSpPr>
           <p:nvPr>
             <p:ph type="body" idx="1"/>
@@ -580,9 +328,9 @@
         </p:nvSpPr>
         <p:spPr/>
         <p:txBody>
-          <a:bodyPr xmlns:a="http://schemas.openxmlformats.org/drawingml/2006/main"/>
-          <a:lstStyle xmlns:a="http://schemas.openxmlformats.org/drawingml/2006/main"/>
-          <a:p xmlns:a="http://schemas.openxmlformats.org/drawingml/2006/main">
+          <a:bodyPr/>
+          <a:lstStyle/>
+          <a:p>
             <a:r>
               <a:t>Source: current code, owner truth files and measured research results. Identity and zone/speed validation are separate from time-only scores.</a:t>
             </a:r>
@@ -593,7 +341,7 @@
         <p:nvSpPr>
           <p:cNvPr id="4" name="Slide Number Placeholder 3"/>
           <p:cNvSpPr>
-            <a:spLocks xmlns:a="http://schemas.openxmlformats.org/drawingml/2006/main" noGrp="1"/>
+            <a:spLocks noGrp="1"/>
           </p:cNvSpPr>
           <p:nvPr>
             <p:ph type="sldNum" idx="5"/>
@@ -601,21 +349,23 @@
         </p:nvSpPr>
         <p:spPr/>
         <p:txBody>
-          <a:bodyPr xmlns:a="http://schemas.openxmlformats.org/drawingml/2006/main"/>
-          <a:lstStyle xmlns:a="http://schemas.openxmlformats.org/drawingml/2006/main"/>
-          <a:p xmlns:a="http://schemas.openxmlformats.org/drawingml/2006/main"/>
+          <a:bodyPr/>
+          <a:lstStyle/>
+          <a:p>
+            <a:endParaRPr/>
+          </a:p>
         </p:txBody>
       </p:sp>
     </p:spTree>
   </p:cSld>
   <p:clrMapOvr>
-    <a:masterClrMapping xmlns:a="http://schemas.openxmlformats.org/drawingml/2006/main"/>
+    <a:masterClrMapping/>
   </p:clrMapOvr>
 </p:notes>
 </file>
 
 <file path=ppt/notesSlides/notesSlide2.xml><?xml version="1.0" encoding="utf-8"?>
-<p:notes xmlns:p="http://schemas.openxmlformats.org/presentationml/2006/main">
+<p:notes xmlns:a="http://schemas.openxmlformats.org/drawingml/2006/main" xmlns:r="http://schemas.openxmlformats.org/officeDocument/2006/relationships" xmlns:p="http://schemas.openxmlformats.org/presentationml/2006/main">
   <p:cSld>
     <p:spTree>
       <p:nvGrpSpPr>
@@ -624,16 +374,21 @@
         <p:nvPr/>
       </p:nvGrpSpPr>
       <p:grpSpPr>
-        <a:xfrm xmlns:a="http://schemas.openxmlformats.org/drawingml/2006/main"/>
+        <a:xfrm>
+          <a:off x="0" y="0"/>
+          <a:ext cx="0" cy="0"/>
+          <a:chOff x="0" y="0"/>
+          <a:chExt cx="0" cy="0"/>
+        </a:xfrm>
       </p:grpSpPr>
       <p:sp>
         <p:nvSpPr>
           <p:cNvPr id="2" name="Slide Image Placeholder 1"/>
           <p:cNvSpPr>
-            <a:spLocks xmlns:a="http://schemas.openxmlformats.org/drawingml/2006/main" noGrp="1"/>
+            <a:spLocks noGrp="1" noRot="1" noChangeAspect="1"/>
           </p:cNvSpPr>
           <p:nvPr>
-            <p:ph type="sldImg" idx="0"/>
+            <p:ph type="sldImg"/>
           </p:nvPr>
         </p:nvSpPr>
         <p:spPr/>
@@ -642,7 +397,7 @@
         <p:nvSpPr>
           <p:cNvPr id="3" name="Notes Placeholder 2"/>
           <p:cNvSpPr>
-            <a:spLocks xmlns:a="http://schemas.openxmlformats.org/drawingml/2006/main" noGrp="1"/>
+            <a:spLocks noGrp="1"/>
           </p:cNvSpPr>
           <p:nvPr>
             <p:ph type="body" idx="1"/>
@@ -650,9 +405,163 @@
         </p:nvSpPr>
         <p:spPr/>
         <p:txBody>
-          <a:bodyPr xmlns:a="http://schemas.openxmlformats.org/drawingml/2006/main"/>
-          <a:lstStyle xmlns:a="http://schemas.openxmlformats.org/drawingml/2006/main"/>
-          <a:p xmlns:a="http://schemas.openxmlformats.org/drawingml/2006/main">
+          <a:bodyPr/>
+          <a:lstStyle/>
+          <a:p>
+            <a:r>
+              <a:t>Exact current v19 fusion: w=max(current_box_height,1); P_class=sum(w*p_class)/sum(w). Initial label argmax(P). Detector veto requires &gt;=20 detector frames: if labelcyclist and cyclist fraction&lt;15%, pedestrian. Promote OFF. Speed after veto, for span&gt;=1.5s and moving_left/right: cyclist→ped if speed&lt;0.8 and cyclistfraction&lt;50%; ped→cyclist if speed&gt;2.0 and fraction&gt;=50%. Night21:00–06:00 short exception: observed duration&gt;=0.3s, finalcyclist, fraction&gt;=90%, weightedP(cyclist)&gt;=0.90. Static reject when span&gt;=3s AND net&lt;5px AND path-speed&lt;0.05heights/s. Sensitivity experiment0.4s minimum BOTHday/night and staticfilterOFF was a separate failed ablation; referenceunchanged.</a:t>
+            </a:r>
+          </a:p>
+        </p:txBody>
+      </p:sp>
+      <p:sp>
+        <p:nvSpPr>
+          <p:cNvPr id="4" name="Slide Number Placeholder 3"/>
+          <p:cNvSpPr>
+            <a:spLocks noGrp="1"/>
+          </p:cNvSpPr>
+          <p:nvPr>
+            <p:ph type="sldNum" idx="5"/>
+          </p:nvPr>
+        </p:nvSpPr>
+        <p:spPr/>
+        <p:txBody>
+          <a:bodyPr/>
+          <a:lstStyle/>
+          <a:p>
+            <a:endParaRPr/>
+          </a:p>
+        </p:txBody>
+      </p:sp>
+    </p:spTree>
+  </p:cSld>
+  <p:clrMapOvr>
+    <a:masterClrMapping/>
+  </p:clrMapOvr>
+</p:notes>
+</file>
+
+<file path=ppt/notesSlides/notesSlide3.xml><?xml version="1.0" encoding="utf-8"?>
+<p:notes xmlns:a="http://schemas.openxmlformats.org/drawingml/2006/main" xmlns:r="http://schemas.openxmlformats.org/officeDocument/2006/relationships" xmlns:p="http://schemas.openxmlformats.org/presentationml/2006/main">
+  <p:cSld>
+    <p:spTree>
+      <p:nvGrpSpPr>
+        <p:cNvPr id="1" name=""/>
+        <p:cNvGrpSpPr/>
+        <p:nvPr/>
+      </p:nvGrpSpPr>
+      <p:grpSpPr>
+        <a:xfrm>
+          <a:off x="0" y="0"/>
+          <a:ext cx="0" cy="0"/>
+          <a:chOff x="0" y="0"/>
+          <a:chExt cx="0" cy="0"/>
+        </a:xfrm>
+      </p:grpSpPr>
+      <p:sp>
+        <p:nvSpPr>
+          <p:cNvPr id="2" name="Slide Image Placeholder 1"/>
+          <p:cNvSpPr>
+            <a:spLocks noGrp="1" noRot="1" noChangeAspect="1"/>
+          </p:cNvSpPr>
+          <p:nvPr>
+            <p:ph type="sldImg"/>
+          </p:nvPr>
+        </p:nvSpPr>
+        <p:spPr/>
+      </p:sp>
+      <p:sp>
+        <p:nvSpPr>
+          <p:cNvPr id="3" name="Notes Placeholder 2"/>
+          <p:cNvSpPr>
+            <a:spLocks noGrp="1"/>
+          </p:cNvSpPr>
+          <p:nvPr>
+            <p:ph type="body" idx="1"/>
+          </p:nvPr>
+        </p:nvSpPr>
+        <p:spPr/>
+        <p:txBody>
+          <a:bodyPr/>
+          <a:lstStyle/>
+          <a:p>
+            <a:r>
+              <a:t>Formula follows motion_summary and speed_of in v19: centered moving-average smoothing about0.5s, detected foot-point observations only, 2D path sum dividedby observed span, thenmeanboxheight. It is NOT strictlyx-displacement; lateral restriction is a direction gate. Ablation gains are marginal with other rules active, not independent. New labelled_lane_speed outputs20 image-speed values for21truth rows; one candidate has insufficient samples. Full source speed workbook contains23unique Colonial rows:12bikelane including1e-bike and11sidewalk, deduplicated across raw/analysis sheets. Lengths35ftbike/30ftsidewalk; no image gate endpoints or per-persontimestamps in workbook. User believes recordnumbers correspond, but IDs differ from truth IDs; explicit mapping needed. Physical speed code accepts measured gate crossings or independently measured homography; no height-to-mph guess.</a:t>
+            </a:r>
+          </a:p>
+        </p:txBody>
+      </p:sp>
+      <p:sp>
+        <p:nvSpPr>
+          <p:cNvPr id="4" name="Slide Number Placeholder 3"/>
+          <p:cNvSpPr>
+            <a:spLocks noGrp="1"/>
+          </p:cNvSpPr>
+          <p:nvPr>
+            <p:ph type="sldNum" idx="5"/>
+          </p:nvPr>
+        </p:nvSpPr>
+        <p:spPr/>
+        <p:txBody>
+          <a:bodyPr/>
+          <a:lstStyle/>
+          <a:p>
+            <a:endParaRPr/>
+          </a:p>
+        </p:txBody>
+      </p:sp>
+    </p:spTree>
+  </p:cSld>
+  <p:clrMapOvr>
+    <a:masterClrMapping/>
+  </p:clrMapOvr>
+</p:notes>
+</file>
+
+<file path=ppt/notesSlides/notesSlide4.xml><?xml version="1.0" encoding="utf-8"?>
+<p:notes xmlns:a="http://schemas.openxmlformats.org/drawingml/2006/main" xmlns:r="http://schemas.openxmlformats.org/officeDocument/2006/relationships" xmlns:p="http://schemas.openxmlformats.org/presentationml/2006/main">
+  <p:cSld>
+    <p:spTree>
+      <p:nvGrpSpPr>
+        <p:cNvPr id="1" name=""/>
+        <p:cNvGrpSpPr/>
+        <p:nvPr/>
+      </p:nvGrpSpPr>
+      <p:grpSpPr>
+        <a:xfrm>
+          <a:off x="0" y="0"/>
+          <a:ext cx="0" cy="0"/>
+          <a:chOff x="0" y="0"/>
+          <a:chExt cx="0" cy="0"/>
+        </a:xfrm>
+      </p:grpSpPr>
+      <p:sp>
+        <p:nvSpPr>
+          <p:cNvPr id="2" name="Slide Image Placeholder 1"/>
+          <p:cNvSpPr>
+            <a:spLocks noGrp="1" noRot="1" noChangeAspect="1"/>
+          </p:cNvSpPr>
+          <p:nvPr>
+            <p:ph type="sldImg"/>
+          </p:nvPr>
+        </p:nvSpPr>
+        <p:spPr/>
+      </p:sp>
+      <p:sp>
+        <p:nvSpPr>
+          <p:cNvPr id="3" name="Notes Placeholder 2"/>
+          <p:cNvSpPr>
+            <a:spLocks noGrp="1"/>
+          </p:cNvSpPr>
+          <p:nvPr>
+            <p:ph type="body" idx="1"/>
+          </p:nvPr>
+        </p:nvSpPr>
+        <p:spPr/>
+        <p:txBody>
+          <a:bodyPr/>
+          <a:lstStyle/>
+          <a:p>
             <a:r>
               <a:t>Source: current code, owner truth files and measured research results. Identity and zone/speed validation are separate from time-only scores.</a:t>
             </a:r>
@@ -663,7 +572,7 @@
         <p:nvSpPr>
           <p:cNvPr id="4" name="Slide Number Placeholder 3"/>
           <p:cNvSpPr>
-            <a:spLocks xmlns:a="http://schemas.openxmlformats.org/drawingml/2006/main" noGrp="1"/>
+            <a:spLocks noGrp="1"/>
           </p:cNvSpPr>
           <p:nvPr>
             <p:ph type="sldNum" idx="5"/>
@@ -671,21 +580,23 @@
         </p:nvSpPr>
         <p:spPr/>
         <p:txBody>
-          <a:bodyPr xmlns:a="http://schemas.openxmlformats.org/drawingml/2006/main"/>
-          <a:lstStyle xmlns:a="http://schemas.openxmlformats.org/drawingml/2006/main"/>
-          <a:p xmlns:a="http://schemas.openxmlformats.org/drawingml/2006/main"/>
+          <a:bodyPr/>
+          <a:lstStyle/>
+          <a:p>
+            <a:endParaRPr/>
+          </a:p>
         </p:txBody>
       </p:sp>
     </p:spTree>
   </p:cSld>
   <p:clrMapOvr>
-    <a:masterClrMapping xmlns:a="http://schemas.openxmlformats.org/drawingml/2006/main"/>
+    <a:masterClrMapping/>
   </p:clrMapOvr>
 </p:notes>
 </file>
 
-<file path=ppt/notesSlides/notesSlide3.xml><?xml version="1.0" encoding="utf-8"?>
-<p:notes xmlns:p="http://schemas.openxmlformats.org/presentationml/2006/main">
+<file path=ppt/notesSlides/notesSlide5.xml><?xml version="1.0" encoding="utf-8"?>
+<p:notes xmlns:a="http://schemas.openxmlformats.org/drawingml/2006/main" xmlns:r="http://schemas.openxmlformats.org/officeDocument/2006/relationships" xmlns:p="http://schemas.openxmlformats.org/presentationml/2006/main">
   <p:cSld>
     <p:spTree>
       <p:nvGrpSpPr>
@@ -694,16 +605,21 @@
         <p:nvPr/>
       </p:nvGrpSpPr>
       <p:grpSpPr>
-        <a:xfrm xmlns:a="http://schemas.openxmlformats.org/drawingml/2006/main"/>
+        <a:xfrm>
+          <a:off x="0" y="0"/>
+          <a:ext cx="0" cy="0"/>
+          <a:chOff x="0" y="0"/>
+          <a:chExt cx="0" cy="0"/>
+        </a:xfrm>
       </p:grpSpPr>
       <p:sp>
         <p:nvSpPr>
           <p:cNvPr id="2" name="Slide Image Placeholder 1"/>
           <p:cNvSpPr>
-            <a:spLocks xmlns:a="http://schemas.openxmlformats.org/drawingml/2006/main" noGrp="1"/>
+            <a:spLocks noGrp="1" noRot="1" noChangeAspect="1"/>
           </p:cNvSpPr>
           <p:nvPr>
-            <p:ph type="sldImg" idx="0"/>
+            <p:ph type="sldImg"/>
           </p:nvPr>
         </p:nvSpPr>
         <p:spPr/>
@@ -712,7 +628,7 @@
         <p:nvSpPr>
           <p:cNvPr id="3" name="Notes Placeholder 2"/>
           <p:cNvSpPr>
-            <a:spLocks xmlns:a="http://schemas.openxmlformats.org/drawingml/2006/main" noGrp="1"/>
+            <a:spLocks noGrp="1"/>
           </p:cNvSpPr>
           <p:nvPr>
             <p:ph type="body" idx="1"/>
@@ -720,149 +636,9 @@
         </p:nvSpPr>
         <p:spPr/>
         <p:txBody>
-          <a:bodyPr xmlns:a="http://schemas.openxmlformats.org/drawingml/2006/main"/>
-          <a:lstStyle xmlns:a="http://schemas.openxmlformats.org/drawingml/2006/main"/>
-          <a:p xmlns:a="http://schemas.openxmlformats.org/drawingml/2006/main">
-            <a:r>
-              <a:t>Exact current v19 fusion: w=max(current_box_height,1); P_class=sum(w*p_class)/sum(w). Initial label argmax(P). Detector veto requires &gt;=20 detector frames: if labelcyclist and cyclist fraction&lt;15%, pedestrian. Promote OFF. Speed after veto, for span&gt;=1.5s and moving_left/right: cyclist→ped if speed&lt;0.8 and cyclistfraction&lt;50%; ped→cyclist if speed&gt;2.0 and fraction&gt;=50%. Night21:00–06:00 short exception: observed duration&gt;=0.3s, finalcyclist, fraction&gt;=90%, weightedP(cyclist)&gt;=0.90. Static reject when span&gt;=3s AND net&lt;5px AND path-speed&lt;0.05heights/s. Sensitivity experiment0.4s minimum BOTHday/night and staticfilterOFF was a separate failed ablation; referenceunchanged.</a:t>
-            </a:r>
-          </a:p>
-        </p:txBody>
-      </p:sp>
-      <p:sp>
-        <p:nvSpPr>
-          <p:cNvPr id="4" name="Slide Number Placeholder 3"/>
-          <p:cNvSpPr>
-            <a:spLocks xmlns:a="http://schemas.openxmlformats.org/drawingml/2006/main" noGrp="1"/>
-          </p:cNvSpPr>
-          <p:nvPr>
-            <p:ph type="sldNum" idx="5"/>
-          </p:nvPr>
-        </p:nvSpPr>
-        <p:spPr/>
-        <p:txBody>
-          <a:bodyPr xmlns:a="http://schemas.openxmlformats.org/drawingml/2006/main"/>
-          <a:lstStyle xmlns:a="http://schemas.openxmlformats.org/drawingml/2006/main"/>
-          <a:p xmlns:a="http://schemas.openxmlformats.org/drawingml/2006/main"/>
-        </p:txBody>
-      </p:sp>
-    </p:spTree>
-  </p:cSld>
-  <p:clrMapOvr>
-    <a:masterClrMapping xmlns:a="http://schemas.openxmlformats.org/drawingml/2006/main"/>
-  </p:clrMapOvr>
-</p:notes>
-</file>
-
-<file path=ppt/notesSlides/notesSlide4.xml><?xml version="1.0" encoding="utf-8"?>
-<p:notes xmlns:p="http://schemas.openxmlformats.org/presentationml/2006/main">
-  <p:cSld>
-    <p:spTree>
-      <p:nvGrpSpPr>
-        <p:cNvPr id="1" name=""/>
-        <p:cNvGrpSpPr/>
-        <p:nvPr/>
-      </p:nvGrpSpPr>
-      <p:grpSpPr>
-        <a:xfrm xmlns:a="http://schemas.openxmlformats.org/drawingml/2006/main"/>
-      </p:grpSpPr>
-      <p:sp>
-        <p:nvSpPr>
-          <p:cNvPr id="2" name="Slide Image Placeholder 1"/>
-          <p:cNvSpPr>
-            <a:spLocks xmlns:a="http://schemas.openxmlformats.org/drawingml/2006/main" noGrp="1"/>
-          </p:cNvSpPr>
-          <p:nvPr>
-            <p:ph type="sldImg" idx="0"/>
-          </p:nvPr>
-        </p:nvSpPr>
-        <p:spPr/>
-      </p:sp>
-      <p:sp>
-        <p:nvSpPr>
-          <p:cNvPr id="3" name="Notes Placeholder 2"/>
-          <p:cNvSpPr>
-            <a:spLocks xmlns:a="http://schemas.openxmlformats.org/drawingml/2006/main" noGrp="1"/>
-          </p:cNvSpPr>
-          <p:nvPr>
-            <p:ph type="body" idx="1"/>
-          </p:nvPr>
-        </p:nvSpPr>
-        <p:spPr/>
-        <p:txBody>
-          <a:bodyPr xmlns:a="http://schemas.openxmlformats.org/drawingml/2006/main"/>
-          <a:lstStyle xmlns:a="http://schemas.openxmlformats.org/drawingml/2006/main"/>
-          <a:p xmlns:a="http://schemas.openxmlformats.org/drawingml/2006/main">
-            <a:r>
-              <a:t>Formula follows motion_summary and speed_of in v19: centered moving-average smoothing about0.5s, detected foot-point observations only, 2D path sum dividedby observed span, thenmeanboxheight. It is NOT strictlyx-displacement; lateral restriction is a direction gate. Ablation gains are marginal with other rules active, not independent. New labelled_lane_speed outputs20 image-speed values for21truth rows; one candidate has insufficient samples. Full source speed workbook contains23unique Colonial rows:12bikelane including1e-bike and11sidewalk, deduplicated across raw/analysis sheets. Lengths35ftbike/30ftsidewalk; no image gate endpoints or per-persontimestamps in workbook. User believes recordnumbers correspond, but IDs differ from truth IDs; explicit mapping needed. Physical speed code accepts measured gate crossings or independently measured homography; no height-to-mph guess.</a:t>
-            </a:r>
-          </a:p>
-        </p:txBody>
-      </p:sp>
-      <p:sp>
-        <p:nvSpPr>
-          <p:cNvPr id="4" name="Slide Number Placeholder 3"/>
-          <p:cNvSpPr>
-            <a:spLocks xmlns:a="http://schemas.openxmlformats.org/drawingml/2006/main" noGrp="1"/>
-          </p:cNvSpPr>
-          <p:nvPr>
-            <p:ph type="sldNum" idx="5"/>
-          </p:nvPr>
-        </p:nvSpPr>
-        <p:spPr/>
-        <p:txBody>
-          <a:bodyPr xmlns:a="http://schemas.openxmlformats.org/drawingml/2006/main"/>
-          <a:lstStyle xmlns:a="http://schemas.openxmlformats.org/drawingml/2006/main"/>
-          <a:p xmlns:a="http://schemas.openxmlformats.org/drawingml/2006/main"/>
-        </p:txBody>
-      </p:sp>
-    </p:spTree>
-  </p:cSld>
-  <p:clrMapOvr>
-    <a:masterClrMapping xmlns:a="http://schemas.openxmlformats.org/drawingml/2006/main"/>
-  </p:clrMapOvr>
-</p:notes>
-</file>
-
-<file path=ppt/notesSlides/notesSlide5.xml><?xml version="1.0" encoding="utf-8"?>
-<p:notes xmlns:p="http://schemas.openxmlformats.org/presentationml/2006/main">
-  <p:cSld>
-    <p:spTree>
-      <p:nvGrpSpPr>
-        <p:cNvPr id="1" name=""/>
-        <p:cNvGrpSpPr/>
-        <p:nvPr/>
-      </p:nvGrpSpPr>
-      <p:grpSpPr>
-        <a:xfrm xmlns:a="http://schemas.openxmlformats.org/drawingml/2006/main"/>
-      </p:grpSpPr>
-      <p:sp>
-        <p:nvSpPr>
-          <p:cNvPr id="2" name="Slide Image Placeholder 1"/>
-          <p:cNvSpPr>
-            <a:spLocks xmlns:a="http://schemas.openxmlformats.org/drawingml/2006/main" noGrp="1"/>
-          </p:cNvSpPr>
-          <p:nvPr>
-            <p:ph type="sldImg" idx="0"/>
-          </p:nvPr>
-        </p:nvSpPr>
-        <p:spPr/>
-      </p:sp>
-      <p:sp>
-        <p:nvSpPr>
-          <p:cNvPr id="3" name="Notes Placeholder 2"/>
-          <p:cNvSpPr>
-            <a:spLocks xmlns:a="http://schemas.openxmlformats.org/drawingml/2006/main" noGrp="1"/>
-          </p:cNvSpPr>
-          <p:nvPr>
-            <p:ph type="body" idx="1"/>
-          </p:nvPr>
-        </p:nvSpPr>
-        <p:spPr/>
-        <p:txBody>
-          <a:bodyPr xmlns:a="http://schemas.openxmlformats.org/drawingml/2006/main"/>
-          <a:lstStyle xmlns:a="http://schemas.openxmlformats.org/drawingml/2006/main"/>
-          <a:p xmlns:a="http://schemas.openxmlformats.org/drawingml/2006/main">
+          <a:bodyPr/>
+          <a:lstStyle/>
+          <a:p>
             <a:r>
               <a:t>Source: current code, owner truth files and measured research results. Identity and zone/speed validation are separate from time-only scores.</a:t>
             </a:r>
@@ -873,7 +649,7 @@
         <p:nvSpPr>
           <p:cNvPr id="4" name="Slide Number Placeholder 3"/>
           <p:cNvSpPr>
-            <a:spLocks xmlns:a="http://schemas.openxmlformats.org/drawingml/2006/main" noGrp="1"/>
+            <a:spLocks noGrp="1"/>
           </p:cNvSpPr>
           <p:nvPr>
             <p:ph type="sldNum" idx="5"/>
@@ -881,21 +657,23 @@
         </p:nvSpPr>
         <p:spPr/>
         <p:txBody>
-          <a:bodyPr xmlns:a="http://schemas.openxmlformats.org/drawingml/2006/main"/>
-          <a:lstStyle xmlns:a="http://schemas.openxmlformats.org/drawingml/2006/main"/>
-          <a:p xmlns:a="http://schemas.openxmlformats.org/drawingml/2006/main"/>
+          <a:bodyPr/>
+          <a:lstStyle/>
+          <a:p>
+            <a:endParaRPr/>
+          </a:p>
         </p:txBody>
       </p:sp>
     </p:spTree>
   </p:cSld>
   <p:clrMapOvr>
-    <a:masterClrMapping xmlns:a="http://schemas.openxmlformats.org/drawingml/2006/main"/>
+    <a:masterClrMapping/>
   </p:clrMapOvr>
 </p:notes>
 </file>
 
 <file path=ppt/notesSlides/notesSlide6.xml><?xml version="1.0" encoding="utf-8"?>
-<p:notes xmlns:p="http://schemas.openxmlformats.org/presentationml/2006/main">
+<p:notes xmlns:a="http://schemas.openxmlformats.org/drawingml/2006/main" xmlns:r="http://schemas.openxmlformats.org/officeDocument/2006/relationships" xmlns:p="http://schemas.openxmlformats.org/presentationml/2006/main">
   <p:cSld>
     <p:spTree>
       <p:nvGrpSpPr>
@@ -904,16 +682,21 @@
         <p:nvPr/>
       </p:nvGrpSpPr>
       <p:grpSpPr>
-        <a:xfrm xmlns:a="http://schemas.openxmlformats.org/drawingml/2006/main"/>
+        <a:xfrm>
+          <a:off x="0" y="0"/>
+          <a:ext cx="0" cy="0"/>
+          <a:chOff x="0" y="0"/>
+          <a:chExt cx="0" cy="0"/>
+        </a:xfrm>
       </p:grpSpPr>
       <p:sp>
         <p:nvSpPr>
           <p:cNvPr id="2" name="Slide Image Placeholder 1"/>
           <p:cNvSpPr>
-            <a:spLocks xmlns:a="http://schemas.openxmlformats.org/drawingml/2006/main" noGrp="1"/>
+            <a:spLocks noGrp="1" noRot="1" noChangeAspect="1"/>
           </p:cNvSpPr>
           <p:nvPr>
-            <p:ph type="sldImg" idx="0"/>
+            <p:ph type="sldImg"/>
           </p:nvPr>
         </p:nvSpPr>
         <p:spPr/>
@@ -922,7 +705,7 @@
         <p:nvSpPr>
           <p:cNvPr id="3" name="Notes Placeholder 2"/>
           <p:cNvSpPr>
-            <a:spLocks xmlns:a="http://schemas.openxmlformats.org/drawingml/2006/main" noGrp="1"/>
+            <a:spLocks noGrp="1"/>
           </p:cNvSpPr>
           <p:nvPr>
             <p:ph type="body" idx="1"/>
@@ -930,79 +713,9 @@
         </p:nvSpPr>
         <p:spPr/>
         <p:txBody>
-          <a:bodyPr xmlns:a="http://schemas.openxmlformats.org/drawingml/2006/main"/>
-          <a:lstStyle xmlns:a="http://schemas.openxmlformats.org/drawingml/2006/main"/>
-          <a:p xmlns:a="http://schemas.openxmlformats.org/drawingml/2006/main">
-            <a:r>
-              <a:t>Source: current code, owner truth files and measured research results. Identity and zone/speed validation are separate from time-only scores.</a:t>
-            </a:r>
-          </a:p>
-        </p:txBody>
-      </p:sp>
-      <p:sp>
-        <p:nvSpPr>
-          <p:cNvPr id="4" name="Slide Number Placeholder 3"/>
-          <p:cNvSpPr>
-            <a:spLocks xmlns:a="http://schemas.openxmlformats.org/drawingml/2006/main" noGrp="1"/>
-          </p:cNvSpPr>
-          <p:nvPr>
-            <p:ph type="sldNum" idx="5"/>
-          </p:nvPr>
-        </p:nvSpPr>
-        <p:spPr/>
-        <p:txBody>
-          <a:bodyPr xmlns:a="http://schemas.openxmlformats.org/drawingml/2006/main"/>
-          <a:lstStyle xmlns:a="http://schemas.openxmlformats.org/drawingml/2006/main"/>
-          <a:p xmlns:a="http://schemas.openxmlformats.org/drawingml/2006/main"/>
-        </p:txBody>
-      </p:sp>
-    </p:spTree>
-  </p:cSld>
-  <p:clrMapOvr>
-    <a:masterClrMapping xmlns:a="http://schemas.openxmlformats.org/drawingml/2006/main"/>
-  </p:clrMapOvr>
-</p:notes>
-</file>
-
-<file path=ppt/notesSlides/notesSlide7.xml><?xml version="1.0" encoding="utf-8"?>
-<p:notes xmlns:p="http://schemas.openxmlformats.org/presentationml/2006/main">
-  <p:cSld>
-    <p:spTree>
-      <p:nvGrpSpPr>
-        <p:cNvPr id="1" name=""/>
-        <p:cNvGrpSpPr/>
-        <p:nvPr/>
-      </p:nvGrpSpPr>
-      <p:grpSpPr>
-        <a:xfrm xmlns:a="http://schemas.openxmlformats.org/drawingml/2006/main"/>
-      </p:grpSpPr>
-      <p:sp>
-        <p:nvSpPr>
-          <p:cNvPr id="2" name="Slide Image Placeholder 1"/>
-          <p:cNvSpPr>
-            <a:spLocks xmlns:a="http://schemas.openxmlformats.org/drawingml/2006/main" noGrp="1"/>
-          </p:cNvSpPr>
-          <p:nvPr>
-            <p:ph type="sldImg" idx="0"/>
-          </p:nvPr>
-        </p:nvSpPr>
-        <p:spPr/>
-      </p:sp>
-      <p:sp>
-        <p:nvSpPr>
-          <p:cNvPr id="3" name="Notes Placeholder 2"/>
-          <p:cNvSpPr>
-            <a:spLocks xmlns:a="http://schemas.openxmlformats.org/drawingml/2006/main" noGrp="1"/>
-          </p:cNvSpPr>
-          <p:nvPr>
-            <p:ph type="body" idx="1"/>
-          </p:nvPr>
-        </p:nvSpPr>
-        <p:spPr/>
-        <p:txBody>
-          <a:bodyPr xmlns:a="http://schemas.openxmlformats.org/drawingml/2006/main"/>
-          <a:lstStyle xmlns:a="http://schemas.openxmlformats.org/drawingml/2006/main"/>
-          <a:p xmlns:a="http://schemas.openxmlformats.org/drawingml/2006/main">
+          <a:bodyPr/>
+          <a:lstStyle/>
+          <a:p>
             <a:r>
               <a:t>RF-DETRMedium full-frame threshold0.30 saved165frames48proposals9lowoverlap; GroundingDINO165/386/308. These proposal totals cannot rank accuracy. New rf_person_review.py builds a blinded raw-frame person-box task on encountermidpoints plus fixedbackgroundframes; simultaneousencountersdeduplicated, up to37frames (likely33). Match frozen personproposals only, one-to-one IoU&gt;=0.5; reportprecision andrecall on explicitlyreviewedframes. Uncheckedframesexcluded, reviewedemptyframesexplicit. This validatespersonboxes on biased developmentframes, notcyclistmodes, uniquepeopleor continuouscounting. No new inference. Build onclusterwithsbatch code/final_review.slurm; download whole exp_results/final_review_20261020 folder andopenrf_boxes/review.html. Draw everyhuman includingriders/scooterusers; exportperson_box_review.json; scorewithcode/rf_person_review.py score.</a:t>
             </a:r>
@@ -1013,7 +726,7 @@
         <p:nvSpPr>
           <p:cNvPr id="4" name="Slide Number Placeholder 3"/>
           <p:cNvSpPr>
-            <a:spLocks xmlns:a="http://schemas.openxmlformats.org/drawingml/2006/main" noGrp="1"/>
+            <a:spLocks noGrp="1"/>
           </p:cNvSpPr>
           <p:nvPr>
             <p:ph type="sldNum" idx="5"/>
@@ -1021,21 +734,23 @@
         </p:nvSpPr>
         <p:spPr/>
         <p:txBody>
-          <a:bodyPr xmlns:a="http://schemas.openxmlformats.org/drawingml/2006/main"/>
-          <a:lstStyle xmlns:a="http://schemas.openxmlformats.org/drawingml/2006/main"/>
-          <a:p xmlns:a="http://schemas.openxmlformats.org/drawingml/2006/main"/>
+          <a:bodyPr/>
+          <a:lstStyle/>
+          <a:p>
+            <a:endParaRPr/>
+          </a:p>
         </p:txBody>
       </p:sp>
     </p:spTree>
   </p:cSld>
   <p:clrMapOvr>
-    <a:masterClrMapping xmlns:a="http://schemas.openxmlformats.org/drawingml/2006/main"/>
+    <a:masterClrMapping/>
   </p:clrMapOvr>
 </p:notes>
 </file>
 
-<file path=ppt/notesSlides/notesSlide8.xml><?xml version="1.0" encoding="utf-8"?>
-<p:notes xmlns:p="http://schemas.openxmlformats.org/presentationml/2006/main">
+<file path=ppt/notesSlides/notesSlide7.xml><?xml version="1.0" encoding="utf-8"?>
+<p:notes xmlns:a="http://schemas.openxmlformats.org/drawingml/2006/main" xmlns:r="http://schemas.openxmlformats.org/officeDocument/2006/relationships" xmlns:p="http://schemas.openxmlformats.org/presentationml/2006/main">
   <p:cSld>
     <p:spTree>
       <p:nvGrpSpPr>
@@ -1044,16 +759,21 @@
         <p:nvPr/>
       </p:nvGrpSpPr>
       <p:grpSpPr>
-        <a:xfrm xmlns:a="http://schemas.openxmlformats.org/drawingml/2006/main"/>
+        <a:xfrm>
+          <a:off x="0" y="0"/>
+          <a:ext cx="0" cy="0"/>
+          <a:chOff x="0" y="0"/>
+          <a:chExt cx="0" cy="0"/>
+        </a:xfrm>
       </p:grpSpPr>
       <p:sp>
         <p:nvSpPr>
           <p:cNvPr id="2" name="Slide Image Placeholder 1"/>
           <p:cNvSpPr>
-            <a:spLocks xmlns:a="http://schemas.openxmlformats.org/drawingml/2006/main" noGrp="1"/>
+            <a:spLocks noGrp="1" noRot="1" noChangeAspect="1"/>
           </p:cNvSpPr>
           <p:nvPr>
-            <p:ph type="sldImg" idx="0"/>
+            <p:ph type="sldImg"/>
           </p:nvPr>
         </p:nvSpPr>
         <p:spPr/>
@@ -1062,7 +782,7 @@
         <p:nvSpPr>
           <p:cNvPr id="3" name="Notes Placeholder 2"/>
           <p:cNvSpPr>
-            <a:spLocks xmlns:a="http://schemas.openxmlformats.org/drawingml/2006/main" noGrp="1"/>
+            <a:spLocks noGrp="1"/>
           </p:cNvSpPr>
           <p:nvPr>
             <p:ph type="body" idx="1"/>
@@ -1070,29 +790,29 @@
         </p:nvSpPr>
         <p:spPr/>
         <p:txBody>
-          <a:bodyPr xmlns:a="http://schemas.openxmlformats.org/drawingml/2006/main"/>
-          <a:lstStyle xmlns:a="http://schemas.openxmlformats.org/drawingml/2006/main"/>
-          <a:p xmlns:a="http://schemas.openxmlformats.org/drawingml/2006/main">
+          <a:bodyPr/>
+          <a:lstStyle/>
+          <a:p>
             <a:r>
               <a:t>All active todo audited against docs/tasks/todo.md and docs/TODO.md. Originalsuite completed; old pendingclaims corrected. Highsensitivity GPUexperimentdone negative; human12minreviewbenefitunmeasured, notclaimedcomplete. Walking-away partial, h5detectorrightXclipwrongfusionfixes; cannot infer cause of absentdetections fromtracksalone. Newsitejobs notclaimedrun; Corrinefisheye is partial/failureevidence notvalidated generalization. Lane/image-speedoutputs only21truthrows;12sidewalk,3bike(includesmotorcycle),1road,5uncertain provisional candidate lanes,20motionvalues; no identity/zoneaccuracy claim. Keep full-day scaling removed,40track/nightfinetuning deferred. Stop furtherdetectorarchitecture sweeps; finalexistingvalidationonly. Original8slideownerfileunchanged; newdatedcopy. ExactCorrinepaths retainedindocs/VIDEO_PATHS.md. User suppliedv2zoneJSON; it hasarea polygons, not physicalgateendpoints. Recordnumberbelief isnotanidentitymap.</a:t>
             </a:r>
           </a:p>
-          <a:p xmlns:a="http://schemas.openxmlformats.org/drawingml/2006/main">
+          <a:p>
             <a:r>
               <a:t>Exact expected Corrine review paths (verify version suffix on cluster):</a:t>
             </a:r>
           </a:p>
-          <a:p xmlns:a="http://schemas.openxmlformats.org/drawingml/2006/main">
+          <a:p>
             <a:r>
               <a:t>/orange/xiangyan/rithika/vision/vision3/best/test_colonial/annotated/research_oct19_hires_base/corrine_706_15min/research_oct19_hires_base__day_0805-0820__control__20250312.mp4</a:t>
             </a:r>
           </a:p>
-          <a:p xmlns:a="http://schemas.openxmlformats.org/drawingml/2006/main">
+          <a:p>
             <a:r>
               <a:t>/orange/xiangyan/rithika/vision/vision3/best/test_colonial/annotated/research_oct19_hires_combo/corrine_706_15min/research_oct19_hires_combo__day_0805-0820__sahi864+speedrule-lateral+shortrule-night+detfuse+staticfilter__20250312.mp4</a:t>
             </a:r>
           </a:p>
-          <a:p xmlns:a="http://schemas.openxmlformats.org/drawingml/2006/main">
+          <a:p>
             <a:r>
               <a:t>/orange/xiangyan/rithika/vision/vision3/best/test_colonial/annotated/research_oct19_hires_tta/corrine_706_15min/research_oct19_hires_tta__day_0805-0820__sahi864+tta-scale-flip+speedrule-lateral+shortrule-night+detfuse+staticfilter__20250312.mp4</a:t>
             </a:r>
@@ -1103,7 +823,7 @@
         <p:nvSpPr>
           <p:cNvPr id="4" name="Slide Number Placeholder 3"/>
           <p:cNvSpPr>
-            <a:spLocks xmlns:a="http://schemas.openxmlformats.org/drawingml/2006/main" noGrp="1"/>
+            <a:spLocks noGrp="1"/>
           </p:cNvSpPr>
           <p:nvPr>
             <p:ph type="sldNum" idx="5"/>
@@ -1111,25 +831,27 @@
         </p:nvSpPr>
         <p:spPr/>
         <p:txBody>
-          <a:bodyPr xmlns:a="http://schemas.openxmlformats.org/drawingml/2006/main"/>
-          <a:lstStyle xmlns:a="http://schemas.openxmlformats.org/drawingml/2006/main"/>
-          <a:p xmlns:a="http://schemas.openxmlformats.org/drawingml/2006/main"/>
+          <a:bodyPr/>
+          <a:lstStyle/>
+          <a:p>
+            <a:endParaRPr/>
+          </a:p>
         </p:txBody>
       </p:sp>
     </p:spTree>
   </p:cSld>
   <p:clrMapOvr>
-    <a:masterClrMapping xmlns:a="http://schemas.openxmlformats.org/drawingml/2006/main"/>
+    <a:masterClrMapping/>
   </p:clrMapOvr>
 </p:notes>
 </file>
 
 <file path=ppt/slideLayouts/slideLayout1.xml><?xml version="1.0" encoding="utf-8"?>
-<p:sldLayout xmlns:p="http://schemas.openxmlformats.org/presentationml/2006/main" preserve="1">
+<p:sldLayout xmlns:a="http://schemas.openxmlformats.org/drawingml/2006/main" xmlns:r="http://schemas.openxmlformats.org/officeDocument/2006/relationships" xmlns:p="http://schemas.openxmlformats.org/presentationml/2006/main" preserve="1">
   <p:cSld name="DEFAULT">
     <p:bg>
       <p:bgRef idx="1001">
-        <a:schemeClr xmlns:a="http://schemas.openxmlformats.org/drawingml/2006/main" val="bg1"/>
+        <a:schemeClr val="bg1"/>
       </p:bgRef>
     </p:bg>
     <p:spTree>
@@ -1139,21 +861,30 @@
         <p:nvPr/>
       </p:nvGrpSpPr>
       <p:grpSpPr>
-        <a:xfrm xmlns:a="http://schemas.openxmlformats.org/drawingml/2006/main"/>
+        <a:xfrm>
+          <a:off x="0" y="0"/>
+          <a:ext cx="0" cy="0"/>
+          <a:chOff x="0" y="0"/>
+          <a:chExt cx="0" cy="0"/>
+        </a:xfrm>
       </p:grpSpPr>
     </p:spTree>
   </p:cSld>
+  <p:clrMapOvr>
+    <a:masterClrMapping/>
+  </p:clrMapOvr>
 </p:sldLayout>
 </file>
 
 <file path=ppt/slideLayouts/slideLayout2.xml><?xml version="1.0" encoding="utf-8"?>
-<p:sldLayout xmlns:p="http://schemas.openxmlformats.org/presentationml/2006/main" preserve="1">
+<p:sldLayout xmlns:a="http://schemas.openxmlformats.org/drawingml/2006/main" xmlns:r="http://schemas.openxmlformats.org/officeDocument/2006/relationships" xmlns:p="http://schemas.openxmlformats.org/presentationml/2006/main" preserve="1">
   <p:cSld name="BIKE_PLAIN">
     <p:bg>
       <p:bgPr>
-        <a:solidFill xmlns:a="http://schemas.openxmlformats.org/drawingml/2006/main">
+        <a:solidFill>
           <a:srgbClr val="FFFFFF"/>
         </a:solidFill>
+        <a:effectLst/>
       </p:bgPr>
     </p:bg>
     <p:spTree>
@@ -1163,51 +894,61 @@
         <p:nvPr/>
       </p:nvGrpSpPr>
       <p:grpSpPr>
-        <a:xfrm xmlns:a="http://schemas.openxmlformats.org/drawingml/2006/main"/>
+        <a:xfrm>
+          <a:off x="0" y="0"/>
+          <a:ext cx="0" cy="0"/>
+          <a:chOff x="0" y="0"/>
+          <a:chExt cx="0" cy="0"/>
+        </a:xfrm>
       </p:grpSpPr>
       <p:sp>
         <p:nvSpPr>
           <p:cNvPr id="2" name="Shape 0">
-            <a:extLst xmlns:a="http://schemas.openxmlformats.org/drawingml/2006/main">
+            <a:extLst>
               <a:ext uri="{FF2B5EF4-FFF2-40B4-BE49-F238E27FC236}">
                 <a16:creationId xmlns:a16="http://schemas.microsoft.com/office/drawing/2014/main" id="{EBB1F7BF-34BD-4BF4-840C-CED4B9439A13}"/>
               </a:ext>
             </a:extLst>
           </p:cNvPr>
           <p:cNvSpPr>
-            <a:spLocks xmlns:a="http://schemas.openxmlformats.org/drawingml/2006/main" noGrp="1"/>
+            <a:spLocks noGrp="1"/>
           </p:cNvSpPr>
           <p:nvPr/>
         </p:nvSpPr>
         <p:spPr>
-          <a:xfrm xmlns:a="http://schemas.openxmlformats.org/drawingml/2006/main">
+          <a:xfrm>
             <a:off x="548640" y="457200"/>
             <a:ext cx="11064240" cy="155448"/>
           </a:xfrm>
-          <a:prstGeom xmlns:a="http://schemas.openxmlformats.org/drawingml/2006/main" prst="rect">
+          <a:prstGeom prst="rect">
             <a:avLst/>
           </a:prstGeom>
-          <a:solidFill xmlns:a="http://schemas.openxmlformats.org/drawingml/2006/main">
+          <a:solidFill>
             <a:schemeClr val="tx1"/>
           </a:solidFill>
         </p:spPr>
         <p:txBody>
-          <a:bodyPr xmlns:a="http://schemas.openxmlformats.org/drawingml/2006/main"/>
-          <a:lstStyle xmlns:a="http://schemas.openxmlformats.org/drawingml/2006/main"/>
-          <a:p xmlns:a="http://schemas.openxmlformats.org/drawingml/2006/main"/>
+          <a:bodyPr/>
+          <a:lstStyle/>
+          <a:p>
+            <a:endParaRPr/>
+          </a:p>
         </p:txBody>
       </p:sp>
     </p:spTree>
   </p:cSld>
+  <p:clrMapOvr>
+    <a:masterClrMapping/>
+  </p:clrMapOvr>
 </p:sldLayout>
 </file>
 
 <file path=ppt/slideMasters/slideMaster1.xml><?xml version="1.0" encoding="utf-8"?>
-<p:sldMaster xmlns:p="http://schemas.openxmlformats.org/presentationml/2006/main">
+<p:sldMaster xmlns:a="http://schemas.openxmlformats.org/drawingml/2006/main" xmlns:r="http://schemas.openxmlformats.org/officeDocument/2006/relationships" xmlns:p="http://schemas.openxmlformats.org/presentationml/2006/main">
   <p:cSld>
     <p:bg>
       <p:bgRef idx="1001">
-        <a:schemeClr xmlns:a="http://schemas.openxmlformats.org/drawingml/2006/main" val="bg1"/>
+        <a:schemeClr val="bg1"/>
       </p:bgRef>
     </p:bg>
     <p:spTree>
@@ -1217,19 +958,24 @@
         <p:nvPr/>
       </p:nvGrpSpPr>
       <p:grpSpPr>
-        <a:xfrm xmlns:a="http://schemas.openxmlformats.org/drawingml/2006/main"/>
+        <a:xfrm>
+          <a:off x="0" y="0"/>
+          <a:ext cx="0" cy="0"/>
+          <a:chOff x="0" y="0"/>
+          <a:chExt cx="0" cy="0"/>
+        </a:xfrm>
       </p:grpSpPr>
     </p:spTree>
   </p:cSld>
   <p:clrMap bg1="lt1" tx1="dk1" bg2="lt2" tx2="dk2" accent1="accent1" accent2="accent2" accent3="accent3" accent4="accent4" accent5="accent5" accent6="accent6" hlink="hlink" folHlink="folHlink"/>
   <p:sldLayoutIdLst>
-    <p:sldLayoutId xmlns:r="http://schemas.openxmlformats.org/officeDocument/2006/relationships" id="2147483649" r:id="R10dbd66aec6941be"/>
-    <p:sldLayoutId xmlns:r="http://schemas.openxmlformats.org/officeDocument/2006/relationships" id="2147483650" r:id="R023d94313b324148"/>
+    <p:sldLayoutId id="2147483649" r:id="rId1"/>
+    <p:sldLayoutId id="2147483650" r:id="rId2"/>
   </p:sldLayoutIdLst>
   <p:hf sldNum="0" hdr="0" ftr="0" dt="0"/>
   <p:txStyles>
     <p:titleStyle>
-      <a:lvl1pPr xmlns:a="http://schemas.openxmlformats.org/drawingml/2006/main" algn="ctr">
+      <a:lvl1pPr algn="ctr">
         <a:spcBef>
           <a:spcPts val="0"/>
         </a:spcBef>
@@ -1245,7 +991,7 @@
       </a:lvl1pPr>
     </p:titleStyle>
     <p:bodyStyle>
-      <a:lvl1pPr xmlns:a="http://schemas.openxmlformats.org/drawingml/2006/main" marL="342900" indent="-342900" algn="l">
+      <a:lvl1pPr marL="342900" indent="-342900" algn="l">
         <a:spcBef>
           <a:spcPts val="0"/>
         </a:spcBef>
@@ -1259,7 +1005,7 @@
           <a:cs typeface="+mn-lt"/>
         </a:defRPr>
       </a:lvl1pPr>
-      <a:lvl2pPr xmlns:a="http://schemas.openxmlformats.org/drawingml/2006/main" marL="742950" indent="-285750" algn="l">
+      <a:lvl2pPr marL="742950" indent="-285750" algn="l">
         <a:spcBef>
           <a:spcPts val="0"/>
         </a:spcBef>
@@ -1273,7 +1019,7 @@
           <a:cs typeface="+mn-lt"/>
         </a:defRPr>
       </a:lvl2pPr>
-      <a:lvl3pPr xmlns:a="http://schemas.openxmlformats.org/drawingml/2006/main" marL="1143000" indent="-228600" algn="l">
+      <a:lvl3pPr marL="1143000" indent="-228600" algn="l">
         <a:spcBef>
           <a:spcPts val="0"/>
         </a:spcBef>
@@ -1287,7 +1033,7 @@
           <a:cs typeface="+mn-lt"/>
         </a:defRPr>
       </a:lvl3pPr>
-      <a:lvl4pPr xmlns:a="http://schemas.openxmlformats.org/drawingml/2006/main" marL="1600200" indent="-228600" algn="l">
+      <a:lvl4pPr marL="1600200" indent="-228600" algn="l">
         <a:spcBef>
           <a:spcPts val="0"/>
         </a:spcBef>
@@ -1301,7 +1047,7 @@
           <a:cs typeface="+mn-lt"/>
         </a:defRPr>
       </a:lvl4pPr>
-      <a:lvl5pPr xmlns:a="http://schemas.openxmlformats.org/drawingml/2006/main" marL="2057400" indent="-228600" algn="l">
+      <a:lvl5pPr marL="2057400" indent="-228600" algn="l">
         <a:spcBef>
           <a:spcPts val="0"/>
         </a:spcBef>
@@ -1315,7 +1061,7 @@
           <a:cs typeface="+mn-lt"/>
         </a:defRPr>
       </a:lvl5pPr>
-      <a:lvl6pPr xmlns:a="http://schemas.openxmlformats.org/drawingml/2006/main" marL="2514600" indent="-228600" algn="l">
+      <a:lvl6pPr marL="2514600" indent="-228600" algn="l">
         <a:spcBef>
           <a:spcPts val="0"/>
         </a:spcBef>
@@ -1329,7 +1075,7 @@
           <a:cs typeface="+mn-lt"/>
         </a:defRPr>
       </a:lvl6pPr>
-      <a:lvl7pPr xmlns:a="http://schemas.openxmlformats.org/drawingml/2006/main" marL="2971800" indent="-228600" algn="l">
+      <a:lvl7pPr marL="2971800" indent="-228600" algn="l">
         <a:spcBef>
           <a:spcPts val="0"/>
         </a:spcBef>
@@ -1343,7 +1089,7 @@
           <a:cs typeface="+mn-lt"/>
         </a:defRPr>
       </a:lvl7pPr>
-      <a:lvl8pPr xmlns:a="http://schemas.openxmlformats.org/drawingml/2006/main" marL="3429000" indent="-228600" algn="l">
+      <a:lvl8pPr marL="3429000" indent="-228600" algn="l">
         <a:spcBef>
           <a:spcPts val="0"/>
         </a:spcBef>
@@ -1357,7 +1103,7 @@
           <a:cs typeface="+mn-lt"/>
         </a:defRPr>
       </a:lvl8pPr>
-      <a:lvl9pPr xmlns:a="http://schemas.openxmlformats.org/drawingml/2006/main" marL="3886200" indent="-228600" algn="l">
+      <a:lvl9pPr marL="3886200" indent="-228600" algn="l">
         <a:spcBef>
           <a:spcPts val="0"/>
         </a:spcBef>
@@ -1373,7 +1119,7 @@
       </a:lvl9pPr>
     </p:bodyStyle>
     <p:otherStyle>
-      <a:lvl1pPr xmlns:a="http://schemas.openxmlformats.org/drawingml/2006/main" marL="0" algn="l">
+      <a:lvl1pPr marL="0" algn="l">
         <a:buNone/>
         <a:defRPr sz="1800">
           <a:solidFill>
@@ -1384,7 +1130,7 @@
           <a:cs typeface="+mn-lt"/>
         </a:defRPr>
       </a:lvl1pPr>
-      <a:lvl2pPr xmlns:a="http://schemas.openxmlformats.org/drawingml/2006/main" marL="457200" algn="l">
+      <a:lvl2pPr marL="457200" algn="l">
         <a:buNone/>
         <a:defRPr sz="1800">
           <a:solidFill>
@@ -1395,7 +1141,7 @@
           <a:cs typeface="+mn-lt"/>
         </a:defRPr>
       </a:lvl2pPr>
-      <a:lvl3pPr xmlns:a="http://schemas.openxmlformats.org/drawingml/2006/main" marL="914400" algn="l">
+      <a:lvl3pPr marL="914400" algn="l">
         <a:buNone/>
         <a:defRPr sz="1800">
           <a:solidFill>
@@ -1406,7 +1152,7 @@
           <a:cs typeface="+mn-lt"/>
         </a:defRPr>
       </a:lvl3pPr>
-      <a:lvl4pPr xmlns:a="http://schemas.openxmlformats.org/drawingml/2006/main" marL="1371600" algn="l">
+      <a:lvl4pPr marL="1371600" algn="l">
         <a:buNone/>
         <a:defRPr sz="1800">
           <a:solidFill>
@@ -1417,7 +1163,7 @@
           <a:cs typeface="+mn-lt"/>
         </a:defRPr>
       </a:lvl4pPr>
-      <a:lvl5pPr xmlns:a="http://schemas.openxmlformats.org/drawingml/2006/main" marL="1828800" algn="l">
+      <a:lvl5pPr marL="1828800" algn="l">
         <a:buNone/>
         <a:defRPr sz="1800">
           <a:solidFill>
@@ -1428,7 +1174,7 @@
           <a:cs typeface="+mn-lt"/>
         </a:defRPr>
       </a:lvl5pPr>
-      <a:lvl6pPr xmlns:a="http://schemas.openxmlformats.org/drawingml/2006/main" marL="2286000" algn="l">
+      <a:lvl6pPr marL="2286000" algn="l">
         <a:buNone/>
         <a:defRPr sz="1800">
           <a:solidFill>
@@ -1439,7 +1185,7 @@
           <a:cs typeface="+mn-lt"/>
         </a:defRPr>
       </a:lvl6pPr>
-      <a:lvl7pPr xmlns:a="http://schemas.openxmlformats.org/drawingml/2006/main" marL="2743200" algn="l">
+      <a:lvl7pPr marL="2743200" algn="l">
         <a:buNone/>
         <a:defRPr sz="1800">
           <a:solidFill>
@@ -1450,7 +1196,7 @@
           <a:cs typeface="+mn-lt"/>
         </a:defRPr>
       </a:lvl7pPr>
-      <a:lvl8pPr xmlns:a="http://schemas.openxmlformats.org/drawingml/2006/main" marL="3200400" algn="l">
+      <a:lvl8pPr marL="3200400" algn="l">
         <a:buNone/>
         <a:defRPr sz="1800">
           <a:solidFill>
@@ -1461,7 +1207,7 @@
           <a:cs typeface="+mn-lt"/>
         </a:defRPr>
       </a:lvl8pPr>
-      <a:lvl9pPr xmlns:a="http://schemas.openxmlformats.org/drawingml/2006/main" marL="3657600" algn="l">
+      <a:lvl9pPr marL="3657600" algn="l">
         <a:buNone/>
         <a:defRPr sz="1800">
           <a:solidFill>
@@ -1477,293 +1223,8 @@
 </p:sldMaster>
 </file>
 
-<file path=ppt/slideMasters/theme/theme2.xml><?xml version="1.0" encoding="utf-8"?>
-<a:theme xmlns:a="http://schemas.openxmlformats.org/drawingml/2006/main" name="Weekly Update">
-  <a:themeElements>
-    <a:clrScheme name="Weekly Update">
-      <a:dk1>
-        <a:srgbClr val="000000"/>
-      </a:dk1>
-      <a:lt1>
-        <a:srgbClr val="FFFFFF"/>
-      </a:lt1>
-      <a:dk2>
-        <a:srgbClr val="333333"/>
-      </a:dk2>
-      <a:lt2>
-        <a:srgbClr val="EDEDED"/>
-      </a:lt2>
-      <a:accent1>
-        <a:srgbClr val="FFFF00"/>
-      </a:accent1>
-      <a:accent2>
-        <a:srgbClr val="2E7D32"/>
-      </a:accent2>
-      <a:accent3>
-        <a:srgbClr val="E65100"/>
-      </a:accent3>
-      <a:accent4>
-        <a:srgbClr val="C62828"/>
-      </a:accent4>
-      <a:accent5>
-        <a:srgbClr val="1565C0"/>
-      </a:accent5>
-      <a:accent6>
-        <a:srgbClr val="666666"/>
-      </a:accent6>
-      <a:hlink>
-        <a:srgbClr val="1565C0"/>
-      </a:hlink>
-      <a:folHlink>
-        <a:srgbClr val="666666"/>
-      </a:folHlink>
-    </a:clrScheme>
-    <a:fontScheme name="Weekly Update">
-      <a:majorFont>
-        <a:latin typeface="Arial"/>
-        <a:ea typeface=""/>
-        <a:cs typeface=""/>
-        <a:font script="Jpan" typeface="游ゴシック Light"/>
-        <a:font script="Hang" typeface="맑은 고딕"/>
-        <a:font script="Hans" typeface="等线 Light"/>
-        <a:font script="Hant" typeface="新細明體"/>
-        <a:font script="Arab" typeface="Times New Roman"/>
-        <a:font script="Hebr" typeface="Times New Roman"/>
-        <a:font script="Thai" typeface="Angsana New"/>
-        <a:font script="Ethi" typeface="Nyala"/>
-        <a:font script="Beng" typeface="Vrinda"/>
-        <a:font script="Gujr" typeface="Shruti"/>
-        <a:font script="Khmr" typeface="MoolBoran"/>
-        <a:font script="Knda" typeface="Tunga"/>
-        <a:font script="Guru" typeface="Raavi"/>
-        <a:font script="Cans" typeface="Euphemia"/>
-        <a:font script="Cher" typeface="Plantagenet Cherokee"/>
-        <a:font script="Yiii" typeface="Microsoft Yi Baiti"/>
-        <a:font script="Tibt" typeface="Microsoft Himalaya"/>
-        <a:font script="Thaa" typeface="MV Boli"/>
-        <a:font script="Deva" typeface="Mangal"/>
-        <a:font script="Telu" typeface="Gautami"/>
-        <a:font script="Taml" typeface="Latha"/>
-        <a:font script="Syrc" typeface="Estrangelo Edessa"/>
-        <a:font script="Orya" typeface="Kalinga"/>
-        <a:font script="Mlym" typeface="Kartika"/>
-        <a:font script="Laoo" typeface="DokChampa"/>
-        <a:font script="Sinh" typeface="Iskoola Pota"/>
-        <a:font script="Mong" typeface="Mongolian Baiti"/>
-        <a:font script="Viet" typeface="Times New Roman"/>
-        <a:font script="Uigh" typeface="Microsoft Uighur"/>
-        <a:font script="Geor" typeface="Sylfaen"/>
-        <a:font script="Armn" typeface="Arial"/>
-        <a:font script="Bugi" typeface="Leelawadee UI"/>
-        <a:font script="Bopo" typeface="Microsoft JhengHei"/>
-        <a:font script="Java" typeface="Javanese Text"/>
-        <a:font script="Lisu" typeface="Segoe UI"/>
-        <a:font script="Mymr" typeface="Myanmar Text"/>
-        <a:font script="Nkoo" typeface="Ebrima"/>
-        <a:font script="Olck" typeface="Nirmala UI"/>
-        <a:font script="Osma" typeface="Ebrima"/>
-        <a:font script="Phag" typeface="Phagspa"/>
-        <a:font script="Syrn" typeface="Estrangelo Edessa"/>
-        <a:font script="Syrj" typeface="Estrangelo Edessa"/>
-        <a:font script="Syre" typeface="Estrangelo Edessa"/>
-        <a:font script="Sora" typeface="Nirmala UI"/>
-        <a:font script="Tale" typeface="Microsoft Tai Le"/>
-        <a:font script="Talu" typeface="Microsoft New Tai Lue"/>
-        <a:font script="Tfng" typeface="Ebrima"/>
-      </a:majorFont>
-      <a:minorFont>
-        <a:latin typeface="Arial"/>
-        <a:ea typeface=""/>
-        <a:cs typeface=""/>
-        <a:font script="Jpan" typeface="游ゴシック"/>
-        <a:font script="Hang" typeface="맑은 고딕"/>
-        <a:font script="Hans" typeface="等线"/>
-        <a:font script="Hant" typeface="新細明體"/>
-        <a:font script="Arab" typeface="Arial"/>
-        <a:font script="Hebr" typeface="Arial"/>
-        <a:font script="Thai" typeface="Cordia New"/>
-        <a:font script="Ethi" typeface="Nyala"/>
-        <a:font script="Beng" typeface="Vrinda"/>
-        <a:font script="Gujr" typeface="Shruti"/>
-        <a:font script="Khmr" typeface="DaunPenh"/>
-        <a:font script="Knda" typeface="Tunga"/>
-        <a:font script="Guru" typeface="Raavi"/>
-        <a:font script="Cans" typeface="Euphemia"/>
-        <a:font script="Cher" typeface="Plantagenet Cherokee"/>
-        <a:font script="Yiii" typeface="Microsoft Yi Baiti"/>
-        <a:font script="Tibt" typeface="Microsoft Himalaya"/>
-        <a:font script="Thaa" typeface="MV Boli"/>
-        <a:font script="Deva" typeface="Mangal"/>
-        <a:font script="Telu" typeface="Gautami"/>
-        <a:font script="Taml" typeface="Latha"/>
-        <a:font script="Syrc" typeface="Estrangelo Edessa"/>
-        <a:font script="Orya" typeface="Kalinga"/>
-        <a:font script="Mlym" typeface="Kartika"/>
-        <a:font script="Laoo" typeface="DokChampa"/>
-        <a:font script="Sinh" typeface="Iskoola Pota"/>
-        <a:font script="Mong" typeface="Mongolian Baiti"/>
-        <a:font script="Viet" typeface="Arial"/>
-        <a:font script="Uigh" typeface="Microsoft Uighur"/>
-        <a:font script="Geor" typeface="Sylfaen"/>
-        <a:font script="Armn" typeface="Arial"/>
-        <a:font script="Bugi" typeface="Leelawadee UI"/>
-        <a:font script="Bopo" typeface="Microsoft JhengHei"/>
-        <a:font script="Java" typeface="Javanese Text"/>
-        <a:font script="Lisu" typeface="Segoe UI"/>
-        <a:font script="Mymr" typeface="Myanmar Text"/>
-        <a:font script="Nkoo" typeface="Ebrima"/>
-        <a:font script="Olck" typeface="Nirmala UI"/>
-        <a:font script="Osma" typeface="Ebrima"/>
-        <a:font script="Phag" typeface="Phagspa"/>
-        <a:font script="Syrn" typeface="Estrangelo Edessa"/>
-        <a:font script="Syrj" typeface="Estrangelo Edessa"/>
-        <a:font script="Syre" typeface="Estrangelo Edessa"/>
-        <a:font script="Sora" typeface="Nirmala UI"/>
-        <a:font script="Tale" typeface="Microsoft Tai Le"/>
-        <a:font script="Talu" typeface="Microsoft New Tai Lue"/>
-        <a:font script="Tfng" typeface="Ebrima"/>
-      </a:minorFont>
-    </a:fontScheme>
-    <a:fmtScheme name="Weekly Update">
-      <a:fillStyleLst>
-        <a:solidFill>
-          <a:schemeClr val="phClr"/>
-        </a:solidFill>
-        <a:gradFill rotWithShape="1">
-          <a:gsLst>
-            <a:gs pos="0">
-              <a:schemeClr val="phClr">
-                <a:tint val="67000"/>
-                <a:lumMod val="110000"/>
-                <a:satMod val="105000"/>
-              </a:schemeClr>
-            </a:gs>
-            <a:gs pos="50000">
-              <a:schemeClr val="phClr">
-                <a:tint val="73000"/>
-                <a:lumMod val="105000"/>
-                <a:satMod val="103000"/>
-              </a:schemeClr>
-            </a:gs>
-            <a:gs pos="100000">
-              <a:schemeClr val="phClr">
-                <a:tint val="81000"/>
-                <a:lumMod val="105000"/>
-                <a:satMod val="109000"/>
-              </a:schemeClr>
-            </a:gs>
-          </a:gsLst>
-          <a:lin ang="5400000" scaled="0"/>
-        </a:gradFill>
-        <a:gradFill rotWithShape="1">
-          <a:gsLst>
-            <a:gs pos="0">
-              <a:schemeClr val="phClr">
-                <a:tint val="94000"/>
-                <a:lumMod val="102000"/>
-                <a:satMod val="103000"/>
-              </a:schemeClr>
-            </a:gs>
-            <a:gs pos="50000">
-              <a:schemeClr val="phClr">
-                <a:shade val="100000"/>
-                <a:lumMod val="100000"/>
-                <a:satMod val="110000"/>
-              </a:schemeClr>
-            </a:gs>
-            <a:gs pos="100000">
-              <a:schemeClr val="phClr">
-                <a:shade val="78000"/>
-                <a:lumMod val="99000"/>
-                <a:satMod val="120000"/>
-              </a:schemeClr>
-            </a:gs>
-          </a:gsLst>
-          <a:lin ang="5400000" scaled="0"/>
-        </a:gradFill>
-      </a:fillStyleLst>
-      <a:lnStyleLst>
-        <a:ln w="6350">
-          <a:solidFill>
-            <a:schemeClr val="phClr"/>
-          </a:solidFill>
-          <a:prstDash val="solid"/>
-        </a:ln>
-        <a:ln w="12700">
-          <a:solidFill>
-            <a:schemeClr val="phClr"/>
-          </a:solidFill>
-          <a:prstDash val="solid"/>
-        </a:ln>
-        <a:ln w="19050">
-          <a:solidFill>
-            <a:schemeClr val="phClr"/>
-          </a:solidFill>
-          <a:prstDash val="solid"/>
-        </a:ln>
-      </a:lnStyleLst>
-      <a:effectStyleLst>
-        <a:effectStyle>
-          <a:effectLst/>
-        </a:effectStyle>
-        <a:effectStyle>
-          <a:effectLst/>
-        </a:effectStyle>
-        <a:effectStyle>
-          <a:effectLst>
-            <a:outerShdw blurRad="57150" dist="19050" dir="5400000" algn="ctr" rotWithShape="0">
-              <a:srgbClr val="000000">
-                <a:alpha val="63000"/>
-              </a:srgbClr>
-            </a:outerShdw>
-          </a:effectLst>
-        </a:effectStyle>
-      </a:effectStyleLst>
-      <a:bgFillStyleLst>
-        <a:solidFill>
-          <a:schemeClr val="phClr"/>
-        </a:solidFill>
-        <a:solidFill>
-          <a:schemeClr val="phClr">
-            <a:tint val="95000"/>
-            <a:satMod val="170000"/>
-          </a:schemeClr>
-        </a:solidFill>
-        <a:gradFill rotWithShape="1">
-          <a:gsLst>
-            <a:gs pos="0">
-              <a:schemeClr val="phClr">
-                <a:tint val="93000"/>
-                <a:shade val="98000"/>
-                <a:lumMod val="102000"/>
-                <a:satMod val="150000"/>
-              </a:schemeClr>
-            </a:gs>
-            <a:gs pos="50000">
-              <a:schemeClr val="phClr">
-                <a:tint val="98000"/>
-                <a:shade val="90000"/>
-                <a:lumMod val="103000"/>
-                <a:satMod val="130000"/>
-              </a:schemeClr>
-            </a:gs>
-            <a:gs pos="100000">
-              <a:schemeClr val="phClr">
-                <a:shade val="63000"/>
-                <a:satMod val="120000"/>
-              </a:schemeClr>
-            </a:gs>
-          </a:gsLst>
-          <a:lin ang="5400000" scaled="0"/>
-        </a:gradFill>
-      </a:bgFillStyleLst>
-    </a:fmtScheme>
-  </a:themeElements>
-</a:theme>
-</file>
-
 <file path=ppt/slides/slide1.xml><?xml version="1.0" encoding="utf-8"?>
-<p:sld xmlns:p="http://schemas.openxmlformats.org/presentationml/2006/main">
+<p:sld xmlns:a="http://schemas.openxmlformats.org/drawingml/2006/main" xmlns:r="http://schemas.openxmlformats.org/officeDocument/2006/relationships" xmlns:p="http://schemas.openxmlformats.org/presentationml/2006/main">
   <p:cSld>
     <p:spTree>
       <p:nvGrpSpPr>
@@ -1772,36 +1233,41 @@
         <p:nvPr/>
       </p:nvGrpSpPr>
       <p:grpSpPr>
-        <a:xfrm xmlns:a="http://schemas.openxmlformats.org/drawingml/2006/main"/>
+        <a:xfrm>
+          <a:off x="0" y="0"/>
+          <a:ext cx="0" cy="0"/>
+          <a:chOff x="0" y="0"/>
+          <a:chExt cx="0" cy="0"/>
+        </a:xfrm>
       </p:grpSpPr>
       <p:sp>
         <p:nvSpPr>
           <p:cNvPr id="2" name="Section label">
-            <a:extLst xmlns:a="http://schemas.openxmlformats.org/drawingml/2006/main">
+            <a:extLst>
               <a:ext uri="{FF2B5EF4-FFF2-40B4-BE49-F238E27FC236}">
                 <a16:creationId xmlns:a16="http://schemas.microsoft.com/office/drawing/2014/main" id="{1DEA861F-7B57-4219-8476-54B24F1B14E8}"/>
               </a:ext>
             </a:extLst>
           </p:cNvPr>
           <p:cNvSpPr>
-            <a:spLocks xmlns:a="http://schemas.openxmlformats.org/drawingml/2006/main" noGrp="1"/>
+            <a:spLocks noGrp="1"/>
           </p:cNvSpPr>
           <p:nvPr/>
         </p:nvSpPr>
         <p:spPr>
-          <a:xfrm xmlns:a="http://schemas.openxmlformats.org/drawingml/2006/main">
+          <a:xfrm>
             <a:off x="612648" y="777240"/>
             <a:ext cx="6583680" cy="365760"/>
           </a:xfrm>
-          <a:prstGeom xmlns:a="http://schemas.openxmlformats.org/drawingml/2006/main" prst="rect">
+          <a:prstGeom prst="rect">
             <a:avLst/>
           </a:prstGeom>
-          <a:noFill xmlns:a="http://schemas.openxmlformats.org/drawingml/2006/main"/>
+          <a:noFill/>
         </p:spPr>
         <p:txBody>
-          <a:bodyPr xmlns:a="http://schemas.openxmlformats.org/drawingml/2006/main" wrap="square" lIns="50800" tIns="50800" rIns="50800" bIns="50800" anchor="ctr"/>
-          <a:lstStyle xmlns:a="http://schemas.openxmlformats.org/drawingml/2006/main"/>
-          <a:p xmlns:a="http://schemas.openxmlformats.org/drawingml/2006/main">
+          <a:bodyPr wrap="square" lIns="50800" tIns="50800" rIns="50800" bIns="50800" anchor="ctr"/>
+          <a:lstStyle/>
+          <a:p>
             <a:pPr marL="0" indent="0">
               <a:buNone/>
             </a:pPr>
@@ -1829,17 +1295,35 @@
           <p:nvPr/>
         </p:nvGraphicFramePr>
         <p:xfrm>
-          <a:off xmlns:a="http://schemas.openxmlformats.org/drawingml/2006/main" x="612648" y="1280160"/>
-          <a:ext xmlns:a="http://schemas.openxmlformats.org/drawingml/2006/main" cx="11064240" cy="3931920"/>
+          <a:off x="612648" y="1280160"/>
+          <a:ext cx="11064240" cy="3931920"/>
         </p:xfrm>
-        <a:graphic xmlns:a="http://schemas.openxmlformats.org/drawingml/2006/main">
+        <a:graphic>
           <a:graphicData uri="http://schemas.openxmlformats.org/drawingml/2006/table">
             <a:tbl>
               <a:tblPr/>
               <a:tblGrid>
-                <a:gridCol w="2651760"/>
-                <a:gridCol w="4663440"/>
-                <a:gridCol w="3749040"/>
+                <a:gridCol w="2651760">
+                  <a:extLst>
+                    <a:ext uri="{9D8B030D-6E8A-4147-A177-3AD203B41FA5}">
+                      <a16:colId xmlns:a16="http://schemas.microsoft.com/office/drawing/2014/main" val="20000"/>
+                    </a:ext>
+                  </a:extLst>
+                </a:gridCol>
+                <a:gridCol w="4663440">
+                  <a:extLst>
+                    <a:ext uri="{9D8B030D-6E8A-4147-A177-3AD203B41FA5}">
+                      <a16:colId xmlns:a16="http://schemas.microsoft.com/office/drawing/2014/main" val="20001"/>
+                    </a:ext>
+                  </a:extLst>
+                </a:gridCol>
+                <a:gridCol w="3749040">
+                  <a:extLst>
+                    <a:ext uri="{9D8B030D-6E8A-4147-A177-3AD203B41FA5}">
+                      <a16:colId xmlns:a16="http://schemas.microsoft.com/office/drawing/2014/main" val="20002"/>
+                    </a:ext>
+                  </a:extLst>
+                </a:gridCol>
               </a:tblGrid>
               <a:tr h="347472">
                 <a:tc>
@@ -1995,6 +1479,11 @@
                     </a:solidFill>
                   </a:tcPr>
                 </a:tc>
+                <a:extLst>
+                  <a:ext uri="{0D108BD9-81ED-4DB2-BD59-A6C34878D82A}">
+                    <a16:rowId xmlns:a16="http://schemas.microsoft.com/office/drawing/2014/main" val="10000"/>
+                  </a:ext>
+                </a:extLst>
               </a:tr>
               <a:tr h="621792">
                 <a:tc>
@@ -2141,6 +1630,11 @@
                     </a:lnB>
                   </a:tcPr>
                 </a:tc>
+                <a:extLst>
+                  <a:ext uri="{0D108BD9-81ED-4DB2-BD59-A6C34878D82A}">
+                    <a16:rowId xmlns:a16="http://schemas.microsoft.com/office/drawing/2014/main" val="10001"/>
+                  </a:ext>
+                </a:extLst>
               </a:tr>
               <a:tr h="566928">
                 <a:tc>
@@ -2287,6 +1781,11 @@
                     </a:lnB>
                   </a:tcPr>
                 </a:tc>
+                <a:extLst>
+                  <a:ext uri="{0D108BD9-81ED-4DB2-BD59-A6C34878D82A}">
+                    <a16:rowId xmlns:a16="http://schemas.microsoft.com/office/drawing/2014/main" val="10002"/>
+                  </a:ext>
+                </a:extLst>
               </a:tr>
               <a:tr h="548640">
                 <a:tc>
@@ -2433,6 +1932,11 @@
                     </a:lnB>
                   </a:tcPr>
                 </a:tc>
+                <a:extLst>
+                  <a:ext uri="{0D108BD9-81ED-4DB2-BD59-A6C34878D82A}">
+                    <a16:rowId xmlns:a16="http://schemas.microsoft.com/office/drawing/2014/main" val="10003"/>
+                  </a:ext>
+                </a:extLst>
               </a:tr>
               <a:tr h="566928">
                 <a:tc>
@@ -2579,6 +2083,11 @@
                     </a:lnB>
                   </a:tcPr>
                 </a:tc>
+                <a:extLst>
+                  <a:ext uri="{0D108BD9-81ED-4DB2-BD59-A6C34878D82A}">
+                    <a16:rowId xmlns:a16="http://schemas.microsoft.com/office/drawing/2014/main" val="10004"/>
+                  </a:ext>
+                </a:extLst>
               </a:tr>
               <a:tr h="713232">
                 <a:tc>
@@ -2725,6 +2234,11 @@
                     </a:lnB>
                   </a:tcPr>
                 </a:tc>
+                <a:extLst>
+                  <a:ext uri="{0D108BD9-81ED-4DB2-BD59-A6C34878D82A}">
+                    <a16:rowId xmlns:a16="http://schemas.microsoft.com/office/drawing/2014/main" val="10005"/>
+                  </a:ext>
+                </a:extLst>
               </a:tr>
               <a:tr h="566928">
                 <a:tc>
@@ -2871,6 +2385,11 @@
                     </a:lnB>
                   </a:tcPr>
                 </a:tc>
+                <a:extLst>
+                  <a:ext uri="{0D108BD9-81ED-4DB2-BD59-A6C34878D82A}">
+                    <a16:rowId xmlns:a16="http://schemas.microsoft.com/office/drawing/2014/main" val="10006"/>
+                  </a:ext>
+                </a:extLst>
               </a:tr>
             </a:tbl>
           </a:graphicData>
@@ -2878,42 +2397,205 @@
       </p:graphicFrame>
       <p:sp>
         <p:nvSpPr>
-          <p:cNvPr id="4" name="Text 1">
-            <a:extLst xmlns:a="http://schemas.openxmlformats.org/drawingml/2006/main">
+          <p:cNvPr id="3" name="Text 1">
+            <a:extLst>
               <a:ext uri="{FF2B5EF4-FFF2-40B4-BE49-F238E27FC236}">
-                <a16:creationId xmlns:a16="http://schemas.microsoft.com/office/drawing/2014/main" id="{D69C757A-DA28-4110-9B94-57514DC3CE6C}"/>
+                <a16:creationId xmlns:a16="http://schemas.microsoft.com/office/drawing/2014/main" id="{895CC997-7307-B106-3AD8-6C4BB560001A}"/>
               </a:ext>
             </a:extLst>
           </p:cNvPr>
           <p:cNvSpPr>
-            <a:spLocks xmlns:a="http://schemas.openxmlformats.org/drawingml/2006/main" noGrp="1"/>
+            <a:spLocks noGrp="1"/>
           </p:cNvSpPr>
           <p:nvPr/>
         </p:nvSpPr>
         <p:spPr>
-          <a:xfrm xmlns:a="http://schemas.openxmlformats.org/drawingml/2006/main">
-            <a:off x="612648" y="5897880"/>
-            <a:ext cx="11064240" cy="365760"/>
+          <a:xfrm>
+            <a:off x="178756" y="5349240"/>
+            <a:ext cx="7017572" cy="1101314"/>
           </a:xfrm>
-          <a:prstGeom xmlns:a="http://schemas.openxmlformats.org/drawingml/2006/main" prst="rect">
+          <a:prstGeom prst="rect">
             <a:avLst/>
           </a:prstGeom>
-          <a:noFill xmlns:a="http://schemas.openxmlformats.org/drawingml/2006/main"/>
+          <a:noFill/>
         </p:spPr>
         <p:txBody>
-          <a:bodyPr xmlns:a="http://schemas.openxmlformats.org/drawingml/2006/main" wrap="square" lIns="0" tIns="0" rIns="0" bIns="0" anchor="ctr"/>
-          <a:lstStyle xmlns:a="http://schemas.openxmlformats.org/drawingml/2006/main"/>
-          <a:p xmlns:a="http://schemas.openxmlformats.org/drawingml/2006/main">
-            <a:pPr marL="0" indent="0">
-              <a:buNone/>
+          <a:bodyPr wrap="square" lIns="0" tIns="0" rIns="0" bIns="0" anchor="t"/>
+          <a:lstStyle/>
+          <a:p>
+            <a:pPr marL="177800" indent="-177800">
+              <a:spcAft>
+                <a:spcPts val="400"/>
+              </a:spcAft>
+              <a:buChar char="•"/>
             </a:pPr>
             <a:r>
-              <a:rPr sz="1300">
+              <a:rPr sz="1700" b="1" dirty="0">
                 <a:solidFill>
                   <a:schemeClr val="tx1"/>
                 </a:solidFill>
+                <a:latin typeface="Arial"/>
+                <a:ea typeface="Arial"/>
+                <a:cs typeface="Arial"/>
               </a:rPr>
-              <a:t>Reference: usual 3-second minimum, plus a strict NIGHT-only cyclist exception. Broad 0.4-second settings are OFF.</a:t>
+              <a:t>The “full system” contains six parts</a:t>
+            </a:r>
+          </a:p>
+          <a:p>
+            <a:pPr marL="406400" indent="-203200">
+              <a:spcAft>
+                <a:spcPts val="300"/>
+              </a:spcAft>
+              <a:buChar char="•"/>
+            </a:pPr>
+            <a:r>
+              <a:rPr sz="1400" dirty="0">
+                <a:solidFill>
+                  <a:schemeClr val="tx1"/>
+                </a:solidFill>
+                <a:latin typeface="Arial"/>
+                <a:ea typeface="Arial"/>
+                <a:cs typeface="Arial"/>
+              </a:rPr>
+              <a:t>Fine-tuned RT-DETR (“V3”) detects objects; SAHI examines overlapping close-up tiles.</a:t>
+            </a:r>
+          </a:p>
+          <a:p>
+            <a:pPr marL="406400" indent="-203200">
+              <a:spcAft>
+                <a:spcPts val="300"/>
+              </a:spcAft>
+              <a:buChar char="•"/>
+            </a:pPr>
+            <a:r>
+              <a:rPr sz="1400" dirty="0" err="1">
+                <a:solidFill>
+                  <a:schemeClr val="tx1"/>
+                </a:solidFill>
+                <a:latin typeface="Arial"/>
+                <a:ea typeface="Arial"/>
+                <a:cs typeface="Arial"/>
+              </a:rPr>
+              <a:t>ByteTrack</a:t>
+            </a:r>
+            <a:r>
+              <a:rPr sz="1400" dirty="0">
+                <a:solidFill>
+                  <a:schemeClr val="tx1"/>
+                </a:solidFill>
+                <a:latin typeface="Arial"/>
+                <a:ea typeface="Arial"/>
+                <a:cs typeface="Arial"/>
+              </a:rPr>
+              <a:t> follows boxes through time; ID stitching reconnects short gaps.</a:t>
+            </a:r>
+          </a:p>
+          <a:p>
+            <a:pPr marL="406400" indent="-203200">
+              <a:spcAft>
+                <a:spcPts val="300"/>
+              </a:spcAft>
+              <a:buChar char="•"/>
+            </a:pPr>
+            <a:r>
+              <a:rPr sz="1400" dirty="0">
+                <a:solidFill>
+                  <a:schemeClr val="tx1"/>
+                </a:solidFill>
+                <a:latin typeface="Arial"/>
+                <a:ea typeface="Arial"/>
+                <a:cs typeface="Arial"/>
+              </a:rPr>
+              <a:t>X-CLIP labels video crops; final rules combine labels/motion and reject short or still-object tracks.</a:t>
+            </a:r>
+          </a:p>
+        </p:txBody>
+      </p:sp>
+      <p:sp>
+        <p:nvSpPr>
+          <p:cNvPr id="6" name="TextBox 5">
+            <a:extLst>
+              <a:ext uri="{FF2B5EF4-FFF2-40B4-BE49-F238E27FC236}">
+                <a16:creationId xmlns:a16="http://schemas.microsoft.com/office/drawing/2014/main" id="{E85A3CC2-D8DC-4DA0-8E51-FB7CF0160866}"/>
+              </a:ext>
+            </a:extLst>
+          </p:cNvPr>
+          <p:cNvSpPr txBox="1"/>
+          <p:nvPr/>
+        </p:nvSpPr>
+        <p:spPr>
+          <a:xfrm>
+            <a:off x="7196328" y="5349240"/>
+            <a:ext cx="4995672" cy="1305486"/>
+          </a:xfrm>
+          <a:prstGeom prst="rect">
+            <a:avLst/>
+          </a:prstGeom>
+          <a:noFill/>
+        </p:spPr>
+        <p:txBody>
+          <a:bodyPr wrap="square">
+            <a:spAutoFit/>
+          </a:bodyPr>
+          <a:lstStyle/>
+          <a:p>
+            <a:pPr marL="177800" indent="-177800">
+              <a:spcBef>
+                <a:spcPts val="1000"/>
+              </a:spcBef>
+              <a:spcAft>
+                <a:spcPts val="400"/>
+              </a:spcAft>
+              <a:buChar char="•"/>
+            </a:pPr>
+            <a:r>
+              <a:rPr lang="en-US" sz="1700" b="1" dirty="0">
+                <a:solidFill>
+                  <a:schemeClr val="tx1"/>
+                </a:solidFill>
+                <a:latin typeface="Arial"/>
+                <a:ea typeface="Arial"/>
+                <a:cs typeface="Arial"/>
+              </a:rPr>
+              <a:t>Test the same system on four labelled clips</a:t>
+            </a:r>
+          </a:p>
+          <a:p>
+            <a:pPr marL="406400" indent="-203200">
+              <a:spcAft>
+                <a:spcPts val="300"/>
+              </a:spcAft>
+              <a:buChar char="•"/>
+            </a:pPr>
+            <a:r>
+              <a:rPr lang="en-US" sz="1400" dirty="0">
+                <a:solidFill>
+                  <a:schemeClr val="tx1"/>
+                </a:solidFill>
+                <a:latin typeface="Arial"/>
+                <a:ea typeface="Arial"/>
+                <a:cs typeface="Arial"/>
+              </a:rPr>
+              <a:t>Colonial 2019: 12:45–13:00, 14:00–14:15, 21:15–21:30 and 22:00–22:15.</a:t>
+            </a:r>
+          </a:p>
+          <a:p>
+            <a:pPr marL="406400" indent="-203200">
+              <a:spcAft>
+                <a:spcPts val="300"/>
+              </a:spcAft>
+              <a:buChar char="•"/>
+            </a:pPr>
+            <a:r>
+              <a:rPr lang="en-US" sz="1400" dirty="0">
+                <a:solidFill>
+                  <a:schemeClr val="tx1"/>
+                </a:solidFill>
+                <a:latin typeface="Arial"/>
+                <a:ea typeface="Arial"/>
+                <a:cs typeface="Arial"/>
+              </a:rPr>
+              <a:t>That is 60 minutes of video and 21 human-labelled people: two daytime clips and two night clips.</a:t>
             </a:r>
           </a:p>
         </p:txBody>
@@ -2925,11 +2607,14 @@
       </p:ext>
     </p:extLst>
   </p:cSld>
+  <p:clrMapOvr>
+    <a:masterClrMapping/>
+  </p:clrMapOvr>
 </p:sld>
 </file>
 
 <file path=ppt/slides/slide2.xml><?xml version="1.0" encoding="utf-8"?>
-<p:sld xmlns:p="http://schemas.openxmlformats.org/presentationml/2006/main">
+<p:sld xmlns:a="http://schemas.openxmlformats.org/drawingml/2006/main" xmlns:r="http://schemas.openxmlformats.org/officeDocument/2006/relationships" xmlns:p="http://schemas.openxmlformats.org/presentationml/2006/main">
   <p:cSld>
     <p:spTree>
       <p:nvGrpSpPr>
@@ -2938,323 +2623,41 @@
         <p:nvPr/>
       </p:nvGrpSpPr>
       <p:grpSpPr>
-        <a:xfrm xmlns:a="http://schemas.openxmlformats.org/drawingml/2006/main"/>
+        <a:xfrm>
+          <a:off x="0" y="0"/>
+          <a:ext cx="0" cy="0"/>
+          <a:chOff x="0" y="0"/>
+          <a:chExt cx="0" cy="0"/>
+        </a:xfrm>
       </p:grpSpPr>
       <p:sp>
         <p:nvSpPr>
           <p:cNvPr id="2" name="Section label">
-            <a:extLst xmlns:a="http://schemas.openxmlformats.org/drawingml/2006/main">
-              <a:ext uri="{FF2B5EF4-FFF2-40B4-BE49-F238E27FC236}">
-                <a16:creationId xmlns:a16="http://schemas.microsoft.com/office/drawing/2014/main" id="{98AE12B0-69D4-41D1-B147-3AF00974C843}"/>
-              </a:ext>
-            </a:extLst>
-          </p:cNvPr>
-          <p:cNvSpPr>
-            <a:spLocks xmlns:a="http://schemas.openxmlformats.org/drawingml/2006/main" noGrp="1"/>
-          </p:cNvSpPr>
-          <p:nvPr/>
-        </p:nvSpPr>
-        <p:spPr>
-          <a:xfrm xmlns:a="http://schemas.openxmlformats.org/drawingml/2006/main">
-            <a:off x="612648" y="777240"/>
-            <a:ext cx="7680960" cy="365760"/>
-          </a:xfrm>
-          <a:prstGeom xmlns:a="http://schemas.openxmlformats.org/drawingml/2006/main" prst="rect">
-            <a:avLst/>
-          </a:prstGeom>
-          <a:noFill xmlns:a="http://schemas.openxmlformats.org/drawingml/2006/main"/>
-        </p:spPr>
-        <p:txBody>
-          <a:bodyPr xmlns:a="http://schemas.openxmlformats.org/drawingml/2006/main" wrap="square" lIns="50800" tIns="50800" rIns="50800" bIns="50800" anchor="ctr"/>
-          <a:lstStyle xmlns:a="http://schemas.openxmlformats.org/drawingml/2006/main"/>
-          <a:p xmlns:a="http://schemas.openxmlformats.org/drawingml/2006/main">
-            <a:pPr marL="0" indent="0">
-              <a:buNone/>
-            </a:pPr>
-            <a:r>
-              <a:rPr sz="1800">
-                <a:solidFill>
-                  <a:schemeClr val="tx1"/>
-                </a:solidFill>
-                <a:highlight>
-                  <a:srgbClr val="FFFF00"/>
-                </a:highlight>
-                <a:latin typeface="Arial"/>
-                <a:ea typeface="Arial"/>
-                <a:cs typeface="Arial"/>
-              </a:rPr>
-              <a:t>Method: from video to checked counts</a:t>
-            </a:r>
-          </a:p>
-        </p:txBody>
-      </p:sp>
-      <p:sp>
-        <p:nvSpPr>
-          <p:cNvPr id="3" name="Text 1">
-            <a:extLst xmlns:a="http://schemas.openxmlformats.org/drawingml/2006/main">
-              <a:ext uri="{FF2B5EF4-FFF2-40B4-BE49-F238E27FC236}">
-                <a16:creationId xmlns:a16="http://schemas.microsoft.com/office/drawing/2014/main" id="{D2C8747C-346F-4C47-8055-B74740B915D2}"/>
-              </a:ext>
-            </a:extLst>
-          </p:cNvPr>
-          <p:cNvSpPr>
-            <a:spLocks xmlns:a="http://schemas.openxmlformats.org/drawingml/2006/main" noGrp="1"/>
-          </p:cNvSpPr>
-          <p:nvPr/>
-        </p:nvSpPr>
-        <p:spPr>
-          <a:xfrm xmlns:a="http://schemas.openxmlformats.org/drawingml/2006/main">
-            <a:off x="667512" y="1325880"/>
-            <a:ext cx="11064240" cy="5029200"/>
-          </a:xfrm>
-          <a:prstGeom xmlns:a="http://schemas.openxmlformats.org/drawingml/2006/main" prst="rect">
-            <a:avLst/>
-          </a:prstGeom>
-          <a:noFill xmlns:a="http://schemas.openxmlformats.org/drawingml/2006/main"/>
-        </p:spPr>
-        <p:txBody>
-          <a:bodyPr xmlns:a="http://schemas.openxmlformats.org/drawingml/2006/main" wrap="square" lIns="0" tIns="0" rIns="0" bIns="0" anchor="t"/>
-          <a:lstStyle xmlns:a="http://schemas.openxmlformats.org/drawingml/2006/main"/>
-          <a:p xmlns:a="http://schemas.openxmlformats.org/drawingml/2006/main">
-            <a:pPr marL="177800" indent="-177800">
-              <a:spcAft>
-                <a:spcPts val="400"/>
-              </a:spcAft>
-              <a:buChar char="•"/>
-            </a:pPr>
-            <a:r>
-              <a:rPr sz="1700" b="1">
-                <a:solidFill>
-                  <a:schemeClr val="tx1"/>
-                </a:solidFill>
-                <a:latin typeface="Arial"/>
-                <a:ea typeface="Arial"/>
-                <a:cs typeface="Arial"/>
-              </a:rPr>
-              <a:t>The “full system” contains six parts</a:t>
-            </a:r>
-          </a:p>
-          <a:p xmlns:a="http://schemas.openxmlformats.org/drawingml/2006/main">
-            <a:pPr marL="406400" indent="-203200">
-              <a:spcAft>
-                <a:spcPts val="300"/>
-              </a:spcAft>
-              <a:buChar char="•"/>
-            </a:pPr>
-            <a:r>
-              <a:rPr sz="1400">
-                <a:solidFill>
-                  <a:schemeClr val="tx1"/>
-                </a:solidFill>
-                <a:latin typeface="Arial"/>
-                <a:ea typeface="Arial"/>
-                <a:cs typeface="Arial"/>
-              </a:rPr>
-              <a:t>Fine-tuned RT-DETR (“V3”) detects objects; SAHI examines overlapping close-up tiles.</a:t>
-            </a:r>
-          </a:p>
-          <a:p xmlns:a="http://schemas.openxmlformats.org/drawingml/2006/main">
-            <a:pPr marL="406400" indent="-203200">
-              <a:spcAft>
-                <a:spcPts val="300"/>
-              </a:spcAft>
-              <a:buChar char="•"/>
-            </a:pPr>
-            <a:r>
-              <a:rPr sz="1400">
-                <a:solidFill>
-                  <a:schemeClr val="tx1"/>
-                </a:solidFill>
-                <a:latin typeface="Arial"/>
-                <a:ea typeface="Arial"/>
-                <a:cs typeface="Arial"/>
-              </a:rPr>
-              <a:t>ByteTrack</a:t>
-            </a:r>
-            <a:r>
-              <a:rPr sz="1400">
-                <a:solidFill>
-                  <a:schemeClr val="tx1"/>
-                </a:solidFill>
-                <a:latin typeface="Arial"/>
-                <a:ea typeface="Arial"/>
-                <a:cs typeface="Arial"/>
-              </a:rPr>
-              <a:t> follows boxes through time; ID stitching reconnects short gaps.</a:t>
-            </a:r>
-          </a:p>
-          <a:p xmlns:a="http://schemas.openxmlformats.org/drawingml/2006/main">
-            <a:pPr marL="406400" indent="-203200">
-              <a:spcAft>
-                <a:spcPts val="300"/>
-              </a:spcAft>
-              <a:buChar char="•"/>
-            </a:pPr>
-            <a:r>
-              <a:rPr sz="1400">
-                <a:solidFill>
-                  <a:schemeClr val="tx1"/>
-                </a:solidFill>
-                <a:latin typeface="Arial"/>
-                <a:ea typeface="Arial"/>
-                <a:cs typeface="Arial"/>
-              </a:rPr>
-              <a:t>X-CLIP labels video crops; final rules combine labels/motion and reject short or still-object tracks.</a:t>
-            </a:r>
-          </a:p>
-          <a:p xmlns:a="http://schemas.openxmlformats.org/drawingml/2006/main">
-            <a:pPr marL="177800" indent="-177800">
-              <a:spcBef>
-                <a:spcPts val="1000"/>
-              </a:spcBef>
-              <a:spcAft>
-                <a:spcPts val="400"/>
-              </a:spcAft>
-              <a:buChar char="•"/>
-            </a:pPr>
-            <a:r>
-              <a:rPr sz="1700" b="1">
-                <a:solidFill>
-                  <a:schemeClr val="tx1"/>
-                </a:solidFill>
-                <a:latin typeface="Arial"/>
-                <a:ea typeface="Arial"/>
-                <a:cs typeface="Arial"/>
-              </a:rPr>
-              <a:t>Test the same system on four labelled clips</a:t>
-            </a:r>
-          </a:p>
-          <a:p xmlns:a="http://schemas.openxmlformats.org/drawingml/2006/main">
-            <a:pPr marL="406400" indent="-203200">
-              <a:spcAft>
-                <a:spcPts val="300"/>
-              </a:spcAft>
-              <a:buChar char="•"/>
-            </a:pPr>
-            <a:r>
-              <a:rPr sz="1400">
-                <a:solidFill>
-                  <a:schemeClr val="tx1"/>
-                </a:solidFill>
-                <a:latin typeface="Arial"/>
-                <a:ea typeface="Arial"/>
-                <a:cs typeface="Arial"/>
-              </a:rPr>
-              <a:t>Colonial 2019: 12:45–13:00, 14:00–14:15, 21:15–21:30 and 22:00–22:15.</a:t>
-            </a:r>
-          </a:p>
-          <a:p xmlns:a="http://schemas.openxmlformats.org/drawingml/2006/main">
-            <a:pPr marL="406400" indent="-203200">
-              <a:spcAft>
-                <a:spcPts val="300"/>
-              </a:spcAft>
-              <a:buChar char="•"/>
-            </a:pPr>
-            <a:r>
-              <a:rPr sz="1400">
-                <a:solidFill>
-                  <a:schemeClr val="tx1"/>
-                </a:solidFill>
-                <a:latin typeface="Arial"/>
-                <a:ea typeface="Arial"/>
-                <a:cs typeface="Arial"/>
-              </a:rPr>
-              <a:t>That is 60 minutes of video and 21 human-labelled people: two daytime clips and two night clips.</a:t>
-            </a:r>
-          </a:p>
-          <a:p xmlns:a="http://schemas.openxmlformats.org/drawingml/2006/main">
-            <a:pPr marL="406400" indent="-203200">
-              <a:spcAft>
-                <a:spcPts val="300"/>
-              </a:spcAft>
-              <a:buChar char="•"/>
-            </a:pPr>
-            <a:r>
-              <a:rPr sz="1400">
-                <a:solidFill>
-                  <a:schemeClr val="tx1"/>
-                </a:solidFill>
-                <a:latin typeface="Arial"/>
-                <a:ea typeface="Arial"/>
-                <a:cs typeface="Arial"/>
-              </a:rPr>
-              <a:t>The “night clips” result repeats only the night subset; it is not a different detector.</a:t>
-            </a:r>
-          </a:p>
-          <a:p xmlns:a="http://schemas.openxmlformats.org/drawingml/2006/main">
-            <a:pPr marL="177800" indent="-177800">
-              <a:spcBef>
-                <a:spcPts val="1000"/>
-              </a:spcBef>
-              <a:spcAft>
-                <a:spcPts val="400"/>
-              </a:spcAft>
-              <a:buChar char="•"/>
-            </a:pPr>
-            <a:r>
-              <a:rPr sz="1700" b="1">
-                <a:solidFill>
-                  <a:schemeClr val="tx1"/>
-                </a:solidFill>
-                <a:latin typeface="Arial"/>
-                <a:ea typeface="Arial"/>
-                <a:cs typeface="Arial"/>
-              </a:rPr>
-              <a:t>Time scores remain provisional; the new identity-required evaluation gives unreviewed tracks no credit.</a:t>
-            </a:r>
-          </a:p>
-        </p:txBody>
-      </p:sp>
-    </p:spTree>
-    <p:extLst>
-      <p:ext uri="{BB962C8B-B14F-4D97-AF65-F5344CB8AC3E}">
-        <p14:creationId xmlns:p14="http://schemas.microsoft.com/office/powerpoint/2010/main" val="556953811"/>
-      </p:ext>
-    </p:extLst>
-  </p:cSld>
-</p:sld>
-</file>
-
-<file path=ppt/slides/slide3.xml><?xml version="1.0" encoding="utf-8"?>
-<p:sld xmlns:p="http://schemas.openxmlformats.org/presentationml/2006/main">
-  <p:cSld>
-    <p:spTree>
-      <p:nvGrpSpPr>
-        <p:cNvPr id="1" name=""/>
-        <p:cNvGrpSpPr/>
-        <p:nvPr/>
-      </p:nvGrpSpPr>
-      <p:grpSpPr>
-        <a:xfrm xmlns:a="http://schemas.openxmlformats.org/drawingml/2006/main"/>
-      </p:grpSpPr>
-      <p:sp>
-        <p:nvSpPr>
-          <p:cNvPr id="2" name="Section label">
-            <a:extLst xmlns:a="http://schemas.openxmlformats.org/drawingml/2006/main">
+            <a:extLst>
               <a:ext uri="{FF2B5EF4-FFF2-40B4-BE49-F238E27FC236}">
                 <a16:creationId xmlns:a16="http://schemas.microsoft.com/office/drawing/2014/main" id="{E8B749DA-ED86-4E73-8D2E-6E2A95EBDB40}"/>
               </a:ext>
             </a:extLst>
           </p:cNvPr>
           <p:cNvSpPr>
-            <a:spLocks xmlns:a="http://schemas.openxmlformats.org/drawingml/2006/main" noGrp="1"/>
+            <a:spLocks noGrp="1"/>
           </p:cNvSpPr>
           <p:nvPr/>
         </p:nvSpPr>
         <p:spPr>
-          <a:xfrm xmlns:a="http://schemas.openxmlformats.org/drawingml/2006/main">
+          <a:xfrm>
             <a:off x="612648" y="777240"/>
             <a:ext cx="7498080" cy="365760"/>
           </a:xfrm>
-          <a:prstGeom xmlns:a="http://schemas.openxmlformats.org/drawingml/2006/main" prst="rect">
+          <a:prstGeom prst="rect">
             <a:avLst/>
           </a:prstGeom>
-          <a:noFill xmlns:a="http://schemas.openxmlformats.org/drawingml/2006/main"/>
+          <a:noFill/>
         </p:spPr>
         <p:txBody>
-          <a:bodyPr xmlns:a="http://schemas.openxmlformats.org/drawingml/2006/main" wrap="square" lIns="50800" tIns="50800" rIns="50800" bIns="50800" anchor="ctr"/>
-          <a:lstStyle xmlns:a="http://schemas.openxmlformats.org/drawingml/2006/main"/>
-          <a:p xmlns:a="http://schemas.openxmlformats.org/drawingml/2006/main">
+          <a:bodyPr wrap="square" lIns="50800" tIns="50800" rIns="50800" bIns="50800" anchor="ctr"/>
+          <a:lstStyle/>
+          <a:p>
             <a:pPr marL="0" indent="0">
               <a:buNone/>
             </a:pPr>
@@ -3282,17 +2685,35 @@
           <p:nvPr/>
         </p:nvGraphicFramePr>
         <p:xfrm>
-          <a:off xmlns:a="http://schemas.openxmlformats.org/drawingml/2006/main" x="612648" y="1280160"/>
-          <a:ext xmlns:a="http://schemas.openxmlformats.org/drawingml/2006/main" cx="11064240" cy="3721608"/>
+          <a:off x="612648" y="1280160"/>
+          <a:ext cx="11064240" cy="3721608"/>
         </p:xfrm>
-        <a:graphic xmlns:a="http://schemas.openxmlformats.org/drawingml/2006/main">
+        <a:graphic>
           <a:graphicData uri="http://schemas.openxmlformats.org/drawingml/2006/table">
             <a:tbl>
               <a:tblPr/>
               <a:tblGrid>
-                <a:gridCol w="2103120"/>
-                <a:gridCol w="5669280"/>
-                <a:gridCol w="3291840"/>
+                <a:gridCol w="2103120">
+                  <a:extLst>
+                    <a:ext uri="{9D8B030D-6E8A-4147-A177-3AD203B41FA5}">
+                      <a16:colId xmlns:a16="http://schemas.microsoft.com/office/drawing/2014/main" val="20000"/>
+                    </a:ext>
+                  </a:extLst>
+                </a:gridCol>
+                <a:gridCol w="5669280">
+                  <a:extLst>
+                    <a:ext uri="{9D8B030D-6E8A-4147-A177-3AD203B41FA5}">
+                      <a16:colId xmlns:a16="http://schemas.microsoft.com/office/drawing/2014/main" val="20001"/>
+                    </a:ext>
+                  </a:extLst>
+                </a:gridCol>
+                <a:gridCol w="3291840">
+                  <a:extLst>
+                    <a:ext uri="{9D8B030D-6E8A-4147-A177-3AD203B41FA5}">
+                      <a16:colId xmlns:a16="http://schemas.microsoft.com/office/drawing/2014/main" val="20002"/>
+                    </a:ext>
+                  </a:extLst>
+                </a:gridCol>
               </a:tblGrid>
               <a:tr h="347472">
                 <a:tc>
@@ -3448,6 +2869,11 @@
                     </a:solidFill>
                   </a:tcPr>
                 </a:tc>
+                <a:extLst>
+                  <a:ext uri="{0D108BD9-81ED-4DB2-BD59-A6C34878D82A}">
+                    <a16:rowId xmlns:a16="http://schemas.microsoft.com/office/drawing/2014/main" val="10000"/>
+                  </a:ext>
+                </a:extLst>
               </a:tr>
               <a:tr h="566928">
                 <a:tc>
@@ -3459,7 +2885,7 @@
                         <a:buNone/>
                       </a:pPr>
                       <a:r>
-                        <a:rPr sz="1200" b="1">
+                        <a:rPr sz="1200" b="1" dirty="0">
                           <a:solidFill>
                             <a:schemeClr val="tx1"/>
                           </a:solidFill>
@@ -3507,6 +2933,54 @@
                         <a:buNone/>
                       </a:pPr>
                       <a:r>
+                        <a:rPr sz="1200" dirty="0">
+                          <a:solidFill>
+                            <a:schemeClr val="tx1"/>
+                          </a:solidFill>
+                          <a:latin typeface="Arial"/>
+                          <a:ea typeface="Arial"/>
+                          <a:cs typeface="Arial"/>
+                        </a:rPr>
+                        <a:t>Weighted X-CLIP mean = sum(box height × class probability) ÷ sum(box heights); choose the larger class score</a:t>
+                      </a:r>
+                    </a:p>
+                  </a:txBody>
+                  <a:tcPr marL="73152" marR="73152" marT="36576" marB="36576" anchor="ctr">
+                    <a:lnL w="9525" cmpd="sng">
+                      <a:solidFill>
+                        <a:srgbClr val="BFBFBF"/>
+                      </a:solidFill>
+                      <a:prstDash val="solid"/>
+                    </a:lnL>
+                    <a:lnR w="9525" cmpd="sng">
+                      <a:solidFill>
+                        <a:srgbClr val="BFBFBF"/>
+                      </a:solidFill>
+                      <a:prstDash val="solid"/>
+                    </a:lnR>
+                    <a:lnT w="9525" cmpd="sng">
+                      <a:solidFill>
+                        <a:srgbClr val="BFBFBF"/>
+                      </a:solidFill>
+                      <a:prstDash val="solid"/>
+                    </a:lnT>
+                    <a:lnB w="9525" cmpd="sng">
+                      <a:solidFill>
+                        <a:srgbClr val="BFBFBF"/>
+                      </a:solidFill>
+                      <a:prstDash val="solid"/>
+                    </a:lnB>
+                  </a:tcPr>
+                </a:tc>
+                <a:tc>
+                  <a:txBody>
+                    <a:bodyPr/>
+                    <a:lstStyle/>
+                    <a:p>
+                      <a:pPr marL="0" indent="0">
+                        <a:buNone/>
+                      </a:pPr>
+                      <a:r>
                         <a:rPr sz="1200">
                           <a:solidFill>
                             <a:schemeClr val="tx1"/>
@@ -3515,54 +2989,6 @@
                           <a:ea typeface="Arial"/>
                           <a:cs typeface="Arial"/>
                         </a:rPr>
-                        <a:t>Weighted X-CLIP mean = sum(box height × class probability) ÷ sum(box heights); choose the larger class score</a:t>
-                      </a:r>
-                    </a:p>
-                  </a:txBody>
-                  <a:tcPr marL="73152" marR="73152" marT="36576" marB="36576" anchor="ctr">
-                    <a:lnL w="9525" cmpd="sng">
-                      <a:solidFill>
-                        <a:srgbClr val="BFBFBF"/>
-                      </a:solidFill>
-                      <a:prstDash val="solid"/>
-                    </a:lnL>
-                    <a:lnR w="9525" cmpd="sng">
-                      <a:solidFill>
-                        <a:srgbClr val="BFBFBF"/>
-                      </a:solidFill>
-                      <a:prstDash val="solid"/>
-                    </a:lnR>
-                    <a:lnT w="9525" cmpd="sng">
-                      <a:solidFill>
-                        <a:srgbClr val="BFBFBF"/>
-                      </a:solidFill>
-                      <a:prstDash val="solid"/>
-                    </a:lnT>
-                    <a:lnB w="9525" cmpd="sng">
-                      <a:solidFill>
-                        <a:srgbClr val="BFBFBF"/>
-                      </a:solidFill>
-                      <a:prstDash val="solid"/>
-                    </a:lnB>
-                  </a:tcPr>
-                </a:tc>
-                <a:tc>
-                  <a:txBody>
-                    <a:bodyPr/>
-                    <a:lstStyle/>
-                    <a:p>
-                      <a:pPr marL="0" indent="0">
-                        <a:buNone/>
-                      </a:pPr>
-                      <a:r>
-                        <a:rPr sz="1200">
-                          <a:solidFill>
-                            <a:schemeClr val="tx1"/>
-                          </a:solidFill>
-                          <a:latin typeface="Arial"/>
-                          <a:ea typeface="Arial"/>
-                          <a:cs typeface="Arial"/>
-                        </a:rPr>
                         <a:t>X-CLIP supplies the initial label</a:t>
                       </a:r>
                     </a:p>
@@ -3594,6 +3020,11 @@
                     </a:lnB>
                   </a:tcPr>
                 </a:tc>
+                <a:extLst>
+                  <a:ext uri="{0D108BD9-81ED-4DB2-BD59-A6C34878D82A}">
+                    <a16:rowId xmlns:a16="http://schemas.microsoft.com/office/drawing/2014/main" val="10001"/>
+                  </a:ext>
+                </a:extLst>
               </a:tr>
               <a:tr h="566928">
                 <a:tc>
@@ -3605,7 +3036,7 @@
                         <a:buNone/>
                       </a:pPr>
                       <a:r>
-                        <a:rPr sz="1200" b="1">
+                        <a:rPr sz="1200" b="1" dirty="0">
                           <a:solidFill>
                             <a:schemeClr val="tx1"/>
                           </a:solidFill>
@@ -3653,6 +3084,54 @@
                         <a:buNone/>
                       </a:pPr>
                       <a:r>
+                        <a:rPr sz="1200" dirty="0">
+                          <a:solidFill>
+                            <a:schemeClr val="tx1"/>
+                          </a:solidFill>
+                          <a:latin typeface="Arial"/>
+                          <a:ea typeface="Arial"/>
+                          <a:cs typeface="Arial"/>
+                        </a:rPr>
+                        <a:t>With ≥20 detector frames: if X-CLIP says cyclist but detector cyclist share &lt;15%, label pedestrian</a:t>
+                      </a:r>
+                    </a:p>
+                  </a:txBody>
+                  <a:tcPr marL="73152" marR="73152" marT="36576" marB="36576" anchor="ctr">
+                    <a:lnL w="9525" cmpd="sng">
+                      <a:solidFill>
+                        <a:srgbClr val="BFBFBF"/>
+                      </a:solidFill>
+                      <a:prstDash val="solid"/>
+                    </a:lnL>
+                    <a:lnR w="9525" cmpd="sng">
+                      <a:solidFill>
+                        <a:srgbClr val="BFBFBF"/>
+                      </a:solidFill>
+                      <a:prstDash val="solid"/>
+                    </a:lnR>
+                    <a:lnT w="9525" cmpd="sng">
+                      <a:solidFill>
+                        <a:srgbClr val="BFBFBF"/>
+                      </a:solidFill>
+                      <a:prstDash val="solid"/>
+                    </a:lnT>
+                    <a:lnB w="9525" cmpd="sng">
+                      <a:solidFill>
+                        <a:srgbClr val="BFBFBF"/>
+                      </a:solidFill>
+                      <a:prstDash val="solid"/>
+                    </a:lnB>
+                  </a:tcPr>
+                </a:tc>
+                <a:tc>
+                  <a:txBody>
+                    <a:bodyPr/>
+                    <a:lstStyle/>
+                    <a:p>
+                      <a:pPr marL="0" indent="0">
+                        <a:buNone/>
+                      </a:pPr>
+                      <a:r>
                         <a:rPr sz="1200">
                           <a:solidFill>
                             <a:schemeClr val="tx1"/>
@@ -3661,54 +3140,6 @@
                           <a:ea typeface="Arial"/>
                           <a:cs typeface="Arial"/>
                         </a:rPr>
-                        <a:t>With ≥20 detector frames: if X-CLIP says cyclist but detector cyclist share &lt;15%, label pedestrian</a:t>
-                      </a:r>
-                    </a:p>
-                  </a:txBody>
-                  <a:tcPr marL="73152" marR="73152" marT="36576" marB="36576" anchor="ctr">
-                    <a:lnL w="9525" cmpd="sng">
-                      <a:solidFill>
-                        <a:srgbClr val="BFBFBF"/>
-                      </a:solidFill>
-                      <a:prstDash val="solid"/>
-                    </a:lnL>
-                    <a:lnR w="9525" cmpd="sng">
-                      <a:solidFill>
-                        <a:srgbClr val="BFBFBF"/>
-                      </a:solidFill>
-                      <a:prstDash val="solid"/>
-                    </a:lnR>
-                    <a:lnT w="9525" cmpd="sng">
-                      <a:solidFill>
-                        <a:srgbClr val="BFBFBF"/>
-                      </a:solidFill>
-                      <a:prstDash val="solid"/>
-                    </a:lnT>
-                    <a:lnB w="9525" cmpd="sng">
-                      <a:solidFill>
-                        <a:srgbClr val="BFBFBF"/>
-                      </a:solidFill>
-                      <a:prstDash val="solid"/>
-                    </a:lnB>
-                  </a:tcPr>
-                </a:tc>
-                <a:tc>
-                  <a:txBody>
-                    <a:bodyPr/>
-                    <a:lstStyle/>
-                    <a:p>
-                      <a:pPr marL="0" indent="0">
-                        <a:buNone/>
-                      </a:pPr>
-                      <a:r>
-                        <a:rPr sz="1200">
-                          <a:solidFill>
-                            <a:schemeClr val="tx1"/>
-                          </a:solidFill>
-                          <a:latin typeface="Arial"/>
-                          <a:ea typeface="Arial"/>
-                          <a:cs typeface="Arial"/>
-                        </a:rPr>
                         <a:t>Detector almost never saw a cyclist shape</a:t>
                       </a:r>
                     </a:p>
@@ -3740,6 +3171,11 @@
                     </a:lnB>
                   </a:tcPr>
                 </a:tc>
+                <a:extLst>
+                  <a:ext uri="{0D108BD9-81ED-4DB2-BD59-A6C34878D82A}">
+                    <a16:rowId xmlns:a16="http://schemas.microsoft.com/office/drawing/2014/main" val="10002"/>
+                  </a:ext>
+                </a:extLst>
               </a:tr>
               <a:tr h="868680">
                 <a:tc>
@@ -3799,6 +3235,54 @@
                         <a:buNone/>
                       </a:pPr>
                       <a:r>
+                        <a:rPr sz="1200" dirty="0">
+                          <a:solidFill>
+                            <a:schemeClr val="tx1"/>
+                          </a:solidFill>
+                          <a:latin typeface="Arial"/>
+                          <a:ea typeface="Arial"/>
+                          <a:cs typeface="Arial"/>
+                        </a:rPr>
+                        <a:t>Lateral tracks seen &gt;=1.5 s: speed &lt;0.8 and detector cyclist &lt;50%: pedestrian; speed &gt;2.0 and detector &gt;=50%: cyclist</a:t>
+                      </a:r>
+                    </a:p>
+                  </a:txBody>
+                  <a:tcPr marL="73152" marR="73152" marT="36576" marB="36576" anchor="ctr">
+                    <a:lnL w="9525" cmpd="sng">
+                      <a:solidFill>
+                        <a:srgbClr val="BFBFBF"/>
+                      </a:solidFill>
+                      <a:prstDash val="solid"/>
+                    </a:lnL>
+                    <a:lnR w="9525" cmpd="sng">
+                      <a:solidFill>
+                        <a:srgbClr val="BFBFBF"/>
+                      </a:solidFill>
+                      <a:prstDash val="solid"/>
+                    </a:lnR>
+                    <a:lnT w="9525" cmpd="sng">
+                      <a:solidFill>
+                        <a:srgbClr val="BFBFBF"/>
+                      </a:solidFill>
+                      <a:prstDash val="solid"/>
+                    </a:lnT>
+                    <a:lnB w="9525" cmpd="sng">
+                      <a:solidFill>
+                        <a:srgbClr val="BFBFBF"/>
+                      </a:solidFill>
+                      <a:prstDash val="solid"/>
+                    </a:lnB>
+                  </a:tcPr>
+                </a:tc>
+                <a:tc>
+                  <a:txBody>
+                    <a:bodyPr/>
+                    <a:lstStyle/>
+                    <a:p>
+                      <a:pPr marL="0" indent="0">
+                        <a:buNone/>
+                      </a:pPr>
+                      <a:r>
                         <a:rPr sz="1200">
                           <a:solidFill>
                             <a:schemeClr val="tx1"/>
@@ -3807,54 +3291,6 @@
                           <a:ea typeface="Arial"/>
                           <a:cs typeface="Arial"/>
                         </a:rPr>
-                        <a:t>Lateral tracks seen &gt;=1.5 s: speed &lt;0.8 and detector cyclist &lt;50%: pedestrian; speed &gt;2.0 and detector &gt;=50%: cyclist</a:t>
-                      </a:r>
-                    </a:p>
-                  </a:txBody>
-                  <a:tcPr marL="73152" marR="73152" marT="36576" marB="36576" anchor="ctr">
-                    <a:lnL w="9525" cmpd="sng">
-                      <a:solidFill>
-                        <a:srgbClr val="BFBFBF"/>
-                      </a:solidFill>
-                      <a:prstDash val="solid"/>
-                    </a:lnL>
-                    <a:lnR w="9525" cmpd="sng">
-                      <a:solidFill>
-                        <a:srgbClr val="BFBFBF"/>
-                      </a:solidFill>
-                      <a:prstDash val="solid"/>
-                    </a:lnR>
-                    <a:lnT w="9525" cmpd="sng">
-                      <a:solidFill>
-                        <a:srgbClr val="BFBFBF"/>
-                      </a:solidFill>
-                      <a:prstDash val="solid"/>
-                    </a:lnT>
-                    <a:lnB w="9525" cmpd="sng">
-                      <a:solidFill>
-                        <a:srgbClr val="BFBFBF"/>
-                      </a:solidFill>
-                      <a:prstDash val="solid"/>
-                    </a:lnB>
-                  </a:tcPr>
-                </a:tc>
-                <a:tc>
-                  <a:txBody>
-                    <a:bodyPr/>
-                    <a:lstStyle/>
-                    <a:p>
-                      <a:pPr marL="0" indent="0">
-                        <a:buNone/>
-                      </a:pPr>
-                      <a:r>
-                        <a:rPr sz="1200">
-                          <a:solidFill>
-                            <a:schemeClr val="tx1"/>
-                          </a:solidFill>
-                          <a:latin typeface="Arial"/>
-                          <a:ea typeface="Arial"/>
-                          <a:cs typeface="Arial"/>
-                        </a:rPr>
                         <a:t>Apply only when detector and movement support the change</a:t>
                       </a:r>
                     </a:p>
@@ -3886,6 +3322,11 @@
                     </a:lnB>
                   </a:tcPr>
                 </a:tc>
+                <a:extLst>
+                  <a:ext uri="{0D108BD9-81ED-4DB2-BD59-A6C34878D82A}">
+                    <a16:rowId xmlns:a16="http://schemas.microsoft.com/office/drawing/2014/main" val="10003"/>
+                  </a:ext>
+                </a:extLst>
               </a:tr>
               <a:tr h="685800">
                 <a:tc>
@@ -3945,6 +3386,54 @@
                         <a:buNone/>
                       </a:pPr>
                       <a:r>
+                        <a:rPr sz="1200" dirty="0">
+                          <a:solidFill>
+                            <a:schemeClr val="tx1"/>
+                          </a:solidFill>
+                          <a:latin typeface="Arial"/>
+                          <a:ea typeface="Arial"/>
+                          <a:cs typeface="Arial"/>
+                        </a:rPr>
+                        <a:t>21:00-06:00; 0.3-3 s; final label cyclist; detector cyclist &gt;=90%; weighted X-CLIP cyclist &gt;=0.90</a:t>
+                      </a:r>
+                    </a:p>
+                  </a:txBody>
+                  <a:tcPr marL="73152" marR="73152" marT="36576" marB="36576" anchor="ctr">
+                    <a:lnL w="9525" cmpd="sng">
+                      <a:solidFill>
+                        <a:srgbClr val="BFBFBF"/>
+                      </a:solidFill>
+                      <a:prstDash val="solid"/>
+                    </a:lnL>
+                    <a:lnR w="9525" cmpd="sng">
+                      <a:solidFill>
+                        <a:srgbClr val="BFBFBF"/>
+                      </a:solidFill>
+                      <a:prstDash val="solid"/>
+                    </a:lnR>
+                    <a:lnT w="9525" cmpd="sng">
+                      <a:solidFill>
+                        <a:srgbClr val="BFBFBF"/>
+                      </a:solidFill>
+                      <a:prstDash val="solid"/>
+                    </a:lnT>
+                    <a:lnB w="9525" cmpd="sng">
+                      <a:solidFill>
+                        <a:srgbClr val="BFBFBF"/>
+                      </a:solidFill>
+                      <a:prstDash val="solid"/>
+                    </a:lnB>
+                  </a:tcPr>
+                </a:tc>
+                <a:tc>
+                  <a:txBody>
+                    <a:bodyPr/>
+                    <a:lstStyle/>
+                    <a:p>
+                      <a:pPr marL="0" indent="0">
+                        <a:buNone/>
+                      </a:pPr>
+                      <a:r>
                         <a:rPr sz="1200">
                           <a:solidFill>
                             <a:schemeClr val="tx1"/>
@@ -3953,54 +3442,6 @@
                           <a:ea typeface="Arial"/>
                           <a:cs typeface="Arial"/>
                         </a:rPr>
-                        <a:t>21:00-06:00; 0.3-3 s; final label cyclist; detector cyclist &gt;=90%; weighted X-CLIP cyclist &gt;=0.90</a:t>
-                      </a:r>
-                    </a:p>
-                  </a:txBody>
-                  <a:tcPr marL="73152" marR="73152" marT="36576" marB="36576" anchor="ctr">
-                    <a:lnL w="9525" cmpd="sng">
-                      <a:solidFill>
-                        <a:srgbClr val="BFBFBF"/>
-                      </a:solidFill>
-                      <a:prstDash val="solid"/>
-                    </a:lnL>
-                    <a:lnR w="9525" cmpd="sng">
-                      <a:solidFill>
-                        <a:srgbClr val="BFBFBF"/>
-                      </a:solidFill>
-                      <a:prstDash val="solid"/>
-                    </a:lnR>
-                    <a:lnT w="9525" cmpd="sng">
-                      <a:solidFill>
-                        <a:srgbClr val="BFBFBF"/>
-                      </a:solidFill>
-                      <a:prstDash val="solid"/>
-                    </a:lnT>
-                    <a:lnB w="9525" cmpd="sng">
-                      <a:solidFill>
-                        <a:srgbClr val="BFBFBF"/>
-                      </a:solidFill>
-                      <a:prstDash val="solid"/>
-                    </a:lnB>
-                  </a:tcPr>
-                </a:tc>
-                <a:tc>
-                  <a:txBody>
-                    <a:bodyPr/>
-                    <a:lstStyle/>
-                    <a:p>
-                      <a:pPr marL="0" indent="0">
-                        <a:buNone/>
-                      </a:pPr>
-                      <a:r>
-                        <a:rPr sz="1200">
-                          <a:solidFill>
-                            <a:schemeClr val="tx1"/>
-                          </a:solidFill>
-                          <a:latin typeface="Arial"/>
-                          <a:ea typeface="Arial"/>
-                          <a:cs typeface="Arial"/>
-                        </a:rPr>
                         <a:t>A strict exception to the usual 3 s minimum</a:t>
                       </a:r>
                     </a:p>
@@ -4032,6 +3473,11 @@
                     </a:lnB>
                   </a:tcPr>
                 </a:tc>
+                <a:extLst>
+                  <a:ext uri="{0D108BD9-81ED-4DB2-BD59-A6C34878D82A}">
+                    <a16:rowId xmlns:a16="http://schemas.microsoft.com/office/drawing/2014/main" val="10004"/>
+                  </a:ext>
+                </a:extLst>
               </a:tr>
               <a:tr h="685800">
                 <a:tc>
@@ -4091,15 +3537,37 @@
                         <a:buNone/>
                       </a:pPr>
                       <a:r>
-                        <a:rPr sz="1200">
-                          <a:solidFill>
-                            <a:schemeClr val="tx1"/>
-                          </a:solidFill>
-                          <a:latin typeface="Arial"/>
-                          <a:ea typeface="Arial"/>
-                          <a:cs typeface="Arial"/>
-                        </a:rPr>
-                        <a:t>After &gt;=3 s: reject if net movement &lt;5 px AND path speed &lt;0.05 body heights/s</a:t>
+                        <a:rPr sz="1200" dirty="0">
+                          <a:solidFill>
+                            <a:schemeClr val="tx1"/>
+                          </a:solidFill>
+                          <a:latin typeface="Arial"/>
+                          <a:ea typeface="Arial"/>
+                          <a:cs typeface="Arial"/>
+                        </a:rPr>
+                        <a:t>After &gt;=3 s: reject if net movement &lt;5 </a:t>
+                      </a:r>
+                      <a:r>
+                        <a:rPr sz="1200" dirty="0" err="1">
+                          <a:solidFill>
+                            <a:schemeClr val="tx1"/>
+                          </a:solidFill>
+                          <a:latin typeface="Arial"/>
+                          <a:ea typeface="Arial"/>
+                          <a:cs typeface="Arial"/>
+                        </a:rPr>
+                        <a:t>px</a:t>
+                      </a:r>
+                      <a:r>
+                        <a:rPr sz="1200" dirty="0">
+                          <a:solidFill>
+                            <a:schemeClr val="tx1"/>
+                          </a:solidFill>
+                          <a:latin typeface="Arial"/>
+                          <a:ea typeface="Arial"/>
+                          <a:cs typeface="Arial"/>
+                        </a:rPr>
+                        <a:t> AND path speed &lt;0.05 body heights/s</a:t>
                       </a:r>
                     </a:p>
                   </a:txBody>
@@ -4139,7 +3607,7 @@
                         <a:buNone/>
                       </a:pPr>
                       <a:r>
-                        <a:rPr sz="1200">
+                        <a:rPr sz="1200" dirty="0">
                           <a:solidFill>
                             <a:schemeClr val="tx1"/>
                           </a:solidFill>
@@ -4178,6 +3646,11 @@
                     </a:lnB>
                   </a:tcPr>
                 </a:tc>
+                <a:extLst>
+                  <a:ext uri="{0D108BD9-81ED-4DB2-BD59-A6C34878D82A}">
+                    <a16:rowId xmlns:a16="http://schemas.microsoft.com/office/drawing/2014/main" val="10005"/>
+                  </a:ext>
+                </a:extLst>
               </a:tr>
             </a:tbl>
           </a:graphicData>
@@ -4186,31 +3659,31 @@
       <p:sp>
         <p:nvSpPr>
           <p:cNvPr id="4" name="Text 1">
-            <a:extLst xmlns:a="http://schemas.openxmlformats.org/drawingml/2006/main">
+            <a:extLst>
               <a:ext uri="{FF2B5EF4-FFF2-40B4-BE49-F238E27FC236}">
                 <a16:creationId xmlns:a16="http://schemas.microsoft.com/office/drawing/2014/main" id="{9B707F78-5BA2-40DD-AA7D-160CF929D2BE}"/>
               </a:ext>
             </a:extLst>
           </p:cNvPr>
           <p:cNvSpPr>
-            <a:spLocks xmlns:a="http://schemas.openxmlformats.org/drawingml/2006/main" noGrp="1"/>
+            <a:spLocks noGrp="1"/>
           </p:cNvSpPr>
           <p:nvPr/>
         </p:nvSpPr>
         <p:spPr>
-          <a:xfrm xmlns:a="http://schemas.openxmlformats.org/drawingml/2006/main">
+          <a:xfrm>
             <a:off x="612648" y="5440680"/>
             <a:ext cx="11064240" cy="731520"/>
           </a:xfrm>
-          <a:prstGeom xmlns:a="http://schemas.openxmlformats.org/drawingml/2006/main" prst="rect">
+          <a:prstGeom prst="rect">
             <a:avLst/>
           </a:prstGeom>
-          <a:noFill xmlns:a="http://schemas.openxmlformats.org/drawingml/2006/main"/>
+          <a:noFill/>
         </p:spPr>
         <p:txBody>
-          <a:bodyPr xmlns:a="http://schemas.openxmlformats.org/drawingml/2006/main" wrap="square" lIns="0" tIns="0" rIns="0" bIns="0" anchor="ctr"/>
-          <a:lstStyle xmlns:a="http://schemas.openxmlformats.org/drawingml/2006/main"/>
-          <a:p xmlns:a="http://schemas.openxmlformats.org/drawingml/2006/main">
+          <a:bodyPr wrap="square" lIns="0" tIns="0" rIns="0" bIns="0" anchor="ctr"/>
+          <a:lstStyle/>
+          <a:p>
             <a:pPr marL="0" indent="0">
               <a:buNone/>
             </a:pPr>
@@ -4225,6 +3698,150 @@
           </a:p>
         </p:txBody>
       </p:sp>
+      <p:pic>
+        <p:nvPicPr>
+          <p:cNvPr id="5" name="Picture 4">
+            <a:extLst>
+              <a:ext uri="{FF2B5EF4-FFF2-40B4-BE49-F238E27FC236}">
+                <a16:creationId xmlns:a16="http://schemas.microsoft.com/office/drawing/2014/main" id="{5B4F7E86-BAC7-B280-14CB-FA0F45A63F4F}"/>
+              </a:ext>
+            </a:extLst>
+          </p:cNvPr>
+          <p:cNvPicPr>
+            <a:picLocks noChangeAspect="1"/>
+          </p:cNvPicPr>
+          <p:nvPr/>
+        </p:nvPicPr>
+        <p:blipFill>
+          <a:blip r:embed="rId3">
+            <a:extLst>
+              <a:ext uri="{28A0092B-C50C-407E-A947-70E740481C1C}">
+                <a14:useLocalDpi xmlns:a14="http://schemas.microsoft.com/office/drawing/2010/main" val="0"/>
+              </a:ext>
+            </a:extLst>
+          </a:blip>
+          <a:stretch>
+            <a:fillRect/>
+          </a:stretch>
+        </p:blipFill>
+        <p:spPr>
+          <a:xfrm>
+            <a:off x="12650177" y="-230886"/>
+            <a:ext cx="4864101" cy="3371850"/>
+          </a:xfrm>
+          <a:prstGeom prst="rect">
+            <a:avLst/>
+          </a:prstGeom>
+        </p:spPr>
+      </p:pic>
+      <p:pic>
+        <p:nvPicPr>
+          <p:cNvPr id="8" name="Picture 7">
+            <a:extLst>
+              <a:ext uri="{FF2B5EF4-FFF2-40B4-BE49-F238E27FC236}">
+                <a16:creationId xmlns:a16="http://schemas.microsoft.com/office/drawing/2014/main" id="{B473D816-03B8-16CF-74F4-AA4DAF00327D}"/>
+              </a:ext>
+            </a:extLst>
+          </p:cNvPr>
+          <p:cNvPicPr>
+            <a:picLocks noChangeAspect="1"/>
+          </p:cNvPicPr>
+          <p:nvPr/>
+        </p:nvPicPr>
+        <p:blipFill>
+          <a:blip r:embed="rId4">
+            <a:extLst>
+              <a:ext uri="{28A0092B-C50C-407E-A947-70E740481C1C}">
+                <a14:useLocalDpi xmlns:a14="http://schemas.microsoft.com/office/drawing/2010/main" val="0"/>
+              </a:ext>
+            </a:extLst>
+          </a:blip>
+          <a:stretch>
+            <a:fillRect/>
+          </a:stretch>
+        </p:blipFill>
+        <p:spPr>
+          <a:xfrm>
+            <a:off x="12650177" y="3585270"/>
+            <a:ext cx="4553780" cy="3980941"/>
+          </a:xfrm>
+          <a:prstGeom prst="rect">
+            <a:avLst/>
+          </a:prstGeom>
+        </p:spPr>
+      </p:pic>
+      <p:pic>
+        <p:nvPicPr>
+          <p:cNvPr id="10" name="Picture 9">
+            <a:extLst>
+              <a:ext uri="{FF2B5EF4-FFF2-40B4-BE49-F238E27FC236}">
+                <a16:creationId xmlns:a16="http://schemas.microsoft.com/office/drawing/2014/main" id="{4EB87C86-7126-8707-BD93-742F71C3A5B6}"/>
+              </a:ext>
+            </a:extLst>
+          </p:cNvPr>
+          <p:cNvPicPr>
+            <a:picLocks noChangeAspect="1"/>
+          </p:cNvPicPr>
+          <p:nvPr/>
+        </p:nvPicPr>
+        <p:blipFill>
+          <a:blip r:embed="rId5">
+            <a:extLst>
+              <a:ext uri="{28A0092B-C50C-407E-A947-70E740481C1C}">
+                <a14:useLocalDpi xmlns:a14="http://schemas.microsoft.com/office/drawing/2010/main" val="0"/>
+              </a:ext>
+            </a:extLst>
+          </a:blip>
+          <a:stretch>
+            <a:fillRect/>
+          </a:stretch>
+        </p:blipFill>
+        <p:spPr>
+          <a:xfrm>
+            <a:off x="-5543276" y="0"/>
+            <a:ext cx="5302697" cy="2599765"/>
+          </a:xfrm>
+          <a:prstGeom prst="rect">
+            <a:avLst/>
+          </a:prstGeom>
+        </p:spPr>
+      </p:pic>
+      <p:pic>
+        <p:nvPicPr>
+          <p:cNvPr id="12" name="Picture 11">
+            <a:extLst>
+              <a:ext uri="{FF2B5EF4-FFF2-40B4-BE49-F238E27FC236}">
+                <a16:creationId xmlns:a16="http://schemas.microsoft.com/office/drawing/2014/main" id="{DB878895-2289-7885-E0FA-3B8A45F81612}"/>
+              </a:ext>
+            </a:extLst>
+          </p:cNvPr>
+          <p:cNvPicPr>
+            <a:picLocks noChangeAspect="1"/>
+          </p:cNvPicPr>
+          <p:nvPr/>
+        </p:nvPicPr>
+        <p:blipFill>
+          <a:blip r:embed="rId6">
+            <a:extLst>
+              <a:ext uri="{28A0092B-C50C-407E-A947-70E740481C1C}">
+                <a14:useLocalDpi xmlns:a14="http://schemas.microsoft.com/office/drawing/2010/main" val="0"/>
+              </a:ext>
+            </a:extLst>
+          </a:blip>
+          <a:stretch>
+            <a:fillRect/>
+          </a:stretch>
+        </p:blipFill>
+        <p:spPr>
+          <a:xfrm>
+            <a:off x="-5438469" y="3355183"/>
+            <a:ext cx="5093081" cy="3293170"/>
+          </a:xfrm>
+          <a:prstGeom prst="rect">
+            <a:avLst/>
+          </a:prstGeom>
+        </p:spPr>
+      </p:pic>
     </p:spTree>
     <p:extLst>
       <p:ext uri="{BB962C8B-B14F-4D97-AF65-F5344CB8AC3E}">
@@ -4232,11 +3849,14 @@
       </p:ext>
     </p:extLst>
   </p:cSld>
+  <p:clrMapOvr>
+    <a:masterClrMapping/>
+  </p:clrMapOvr>
 </p:sld>
 </file>
 
-<file path=ppt/slides/slide4.xml><?xml version="1.0" encoding="utf-8"?>
-<p:sld xmlns:p="http://schemas.openxmlformats.org/presentationml/2006/main">
+<file path=ppt/slides/slide3.xml><?xml version="1.0" encoding="utf-8"?>
+<p:sld xmlns:a="http://schemas.openxmlformats.org/drawingml/2006/main" xmlns:r="http://schemas.openxmlformats.org/officeDocument/2006/relationships" xmlns:p="http://schemas.openxmlformats.org/presentationml/2006/main">
   <p:cSld>
     <p:spTree>
       <p:nvGrpSpPr>
@@ -4245,36 +3865,41 @@
         <p:nvPr/>
       </p:nvGrpSpPr>
       <p:grpSpPr>
-        <a:xfrm xmlns:a="http://schemas.openxmlformats.org/drawingml/2006/main"/>
+        <a:xfrm>
+          <a:off x="0" y="0"/>
+          <a:ext cx="0" cy="0"/>
+          <a:chOff x="0" y="0"/>
+          <a:chExt cx="0" cy="0"/>
+        </a:xfrm>
       </p:grpSpPr>
       <p:sp>
         <p:nvSpPr>
           <p:cNvPr id="2" name="Section label">
-            <a:extLst xmlns:a="http://schemas.openxmlformats.org/drawingml/2006/main">
+            <a:extLst>
               <a:ext uri="{FF2B5EF4-FFF2-40B4-BE49-F238E27FC236}">
                 <a16:creationId xmlns:a16="http://schemas.microsoft.com/office/drawing/2014/main" id="{98AE12B0-69D4-41D1-B147-3AF00974C843}"/>
               </a:ext>
             </a:extLst>
           </p:cNvPr>
           <p:cNvSpPr>
-            <a:spLocks xmlns:a="http://schemas.openxmlformats.org/drawingml/2006/main" noGrp="1"/>
+            <a:spLocks noGrp="1"/>
           </p:cNvSpPr>
           <p:nvPr/>
         </p:nvSpPr>
         <p:spPr>
-          <a:xfrm xmlns:a="http://schemas.openxmlformats.org/drawingml/2006/main">
+          <a:xfrm>
             <a:off x="612648" y="777240"/>
             <a:ext cx="7680960" cy="365760"/>
           </a:xfrm>
-          <a:prstGeom xmlns:a="http://schemas.openxmlformats.org/drawingml/2006/main" prst="rect">
+          <a:prstGeom prst="rect">
             <a:avLst/>
           </a:prstGeom>
-          <a:noFill xmlns:a="http://schemas.openxmlformats.org/drawingml/2006/main"/>
+          <a:noFill/>
         </p:spPr>
         <p:txBody>
-          <a:bodyPr xmlns:a="http://schemas.openxmlformats.org/drawingml/2006/main" wrap="square" lIns="50800" tIns="50800" rIns="50800" bIns="50800" anchor="ctr"/>
-          <a:lstStyle xmlns:a="http://schemas.openxmlformats.org/drawingml/2006/main"/>
-          <a:p xmlns:a="http://schemas.openxmlformats.org/drawingml/2006/main">
+          <a:bodyPr wrap="square" lIns="50800" tIns="50800" rIns="50800" bIns="50800" anchor="ctr"/>
+          <a:lstStyle/>
+          <a:p>
             <a:pPr marL="0" indent="0">
               <a:buNone/>
             </a:pPr>
@@ -4298,31 +3923,31 @@
       <p:sp>
         <p:nvSpPr>
           <p:cNvPr id="3" name="Text 1">
-            <a:extLst xmlns:a="http://schemas.openxmlformats.org/drawingml/2006/main">
+            <a:extLst>
               <a:ext uri="{FF2B5EF4-FFF2-40B4-BE49-F238E27FC236}">
                 <a16:creationId xmlns:a16="http://schemas.microsoft.com/office/drawing/2014/main" id="{D2C8747C-346F-4C47-8055-B74740B915D2}"/>
               </a:ext>
             </a:extLst>
           </p:cNvPr>
           <p:cNvSpPr>
-            <a:spLocks xmlns:a="http://schemas.openxmlformats.org/drawingml/2006/main" noGrp="1"/>
+            <a:spLocks noGrp="1"/>
           </p:cNvSpPr>
           <p:nvPr/>
         </p:nvSpPr>
         <p:spPr>
-          <a:xfrm xmlns:a="http://schemas.openxmlformats.org/drawingml/2006/main">
+          <a:xfrm>
             <a:off x="667512" y="1325880"/>
-            <a:ext cx="11064240" cy="5029200"/>
+            <a:ext cx="6168717" cy="5029200"/>
           </a:xfrm>
-          <a:prstGeom xmlns:a="http://schemas.openxmlformats.org/drawingml/2006/main" prst="rect">
+          <a:prstGeom prst="rect">
             <a:avLst/>
           </a:prstGeom>
-          <a:noFill xmlns:a="http://schemas.openxmlformats.org/drawingml/2006/main"/>
+          <a:noFill/>
         </p:spPr>
         <p:txBody>
-          <a:bodyPr xmlns:a="http://schemas.openxmlformats.org/drawingml/2006/main" wrap="square" lIns="0" tIns="0" rIns="0" bIns="0" anchor="t"/>
-          <a:lstStyle xmlns:a="http://schemas.openxmlformats.org/drawingml/2006/main"/>
-          <a:p xmlns:a="http://schemas.openxmlformats.org/drawingml/2006/main">
+          <a:bodyPr wrap="square" lIns="0" tIns="0" rIns="0" bIns="0" anchor="t"/>
+          <a:lstStyle/>
+          <a:p>
             <a:pPr marL="177800" indent="-177800">
               <a:spcAft>
                 <a:spcPts val="400"/>
@@ -4330,7 +3955,7 @@
               <a:buChar char="•"/>
             </a:pPr>
             <a:r>
-              <a:rPr sz="1700" b="1">
+              <a:rPr sz="1700" b="1" dirty="0">
                 <a:solidFill>
                   <a:schemeClr val="tx1"/>
                 </a:solidFill>
@@ -4341,7 +3966,7 @@
               <a:t>How speed is represented</a:t>
             </a:r>
           </a:p>
-          <a:p xmlns:a="http://schemas.openxmlformats.org/drawingml/2006/main">
+          <a:p>
             <a:pPr marL="406400" indent="-203200">
               <a:spcAft>
                 <a:spcPts val="300"/>
@@ -4349,7 +3974,7 @@
               <a:buChar char="•"/>
             </a:pPr>
             <a:r>
-              <a:rPr sz="1400">
+              <a:rPr sz="1400" dirty="0">
                 <a:solidFill>
                   <a:schemeClr val="tx1"/>
                 </a:solidFill>
@@ -4360,7 +3985,7 @@
               <a:t>Smoothed 2-D path (pixels) ÷ elapsed seconds ÷ mean box height (pixels) = body heights per second.</a:t>
             </a:r>
           </a:p>
-          <a:p xmlns:a="http://schemas.openxmlformats.org/drawingml/2006/main">
+          <a:p>
             <a:pPr marL="406400" indent="-203200">
               <a:spcAft>
                 <a:spcPts val="300"/>
@@ -4368,7 +3993,7 @@
               <a:buChar char="•"/>
             </a:pPr>
             <a:r>
-              <a:rPr sz="1400">
+              <a:rPr sz="1400" dirty="0">
                 <a:solidFill>
                   <a:schemeClr val="tx1"/>
                 </a:solidFill>
@@ -4378,27 +4003,45 @@
               </a:rPr>
               <a:t>Hand-set cutoffs: below 0.8 supports walking; above 2.0 supports cycling, only when the detector agrees.</a:t>
             </a:r>
+            <a:endParaRPr lang="en-US" sz="1400" dirty="0">
+              <a:solidFill>
+                <a:schemeClr val="tx1"/>
+              </a:solidFill>
+              <a:latin typeface="Arial"/>
+              <a:ea typeface="Arial"/>
+              <a:cs typeface="Arial"/>
+            </a:endParaRPr>
           </a:p>
-          <a:p xmlns:a="http://schemas.openxmlformats.org/drawingml/2006/main">
+          <a:p>
             <a:pPr marL="406400" indent="-203200">
               <a:spcAft>
                 <a:spcPts val="300"/>
               </a:spcAft>
               <a:buChar char="•"/>
             </a:pPr>
-            <a:r>
-              <a:rPr sz="1400">
-                <a:solidFill>
-                  <a:schemeClr val="tx1"/>
-                </a:solidFill>
-                <a:latin typeface="Arial"/>
-                <a:ea typeface="Arial"/>
-                <a:cs typeface="Arial"/>
-              </a:rPr>
-              <a:t>Apply the relabelling rule only to left/right tracks; toward/away movement is less reliable.</a:t>
-            </a:r>
+            <a:endParaRPr lang="en-US" sz="1400" dirty="0">
+              <a:latin typeface="Arial"/>
+              <a:ea typeface="Arial"/>
+              <a:cs typeface="Arial"/>
+            </a:endParaRPr>
           </a:p>
-          <a:p xmlns:a="http://schemas.openxmlformats.org/drawingml/2006/main">
+          <a:p>
+            <a:pPr marL="406400" indent="-203200">
+              <a:spcAft>
+                <a:spcPts val="300"/>
+              </a:spcAft>
+              <a:buChar char="•"/>
+            </a:pPr>
+            <a:endParaRPr sz="1400" dirty="0">
+              <a:solidFill>
+                <a:schemeClr val="tx1"/>
+              </a:solidFill>
+              <a:latin typeface="Arial"/>
+              <a:ea typeface="Arial"/>
+              <a:cs typeface="Arial"/>
+            </a:endParaRPr>
+          </a:p>
+          <a:p>
             <a:pPr marL="177800" indent="-177800">
               <a:spcBef>
                 <a:spcPts val="1000"/>
@@ -4409,7 +4052,7 @@
               <a:buChar char="•"/>
             </a:pPr>
             <a:r>
-              <a:rPr sz="1700" b="1">
+              <a:rPr sz="1700" b="1" dirty="0">
                 <a:solidFill>
                   <a:schemeClr val="tx1"/>
                 </a:solidFill>
@@ -4420,7 +4063,7 @@
               <a:t>Completed switch-off tests on the same 21 people</a:t>
             </a:r>
           </a:p>
-          <a:p xmlns:a="http://schemas.openxmlformats.org/drawingml/2006/main">
+          <a:p>
             <a:pPr marL="406400" indent="-203200">
               <a:spcAft>
                 <a:spcPts val="300"/>
@@ -4428,7 +4071,7 @@
               <a:buChar char="•"/>
             </a:pPr>
             <a:r>
-              <a:rPr sz="1400">
+              <a:rPr sz="1400" dirty="0">
                 <a:solidFill>
                   <a:schemeClr val="tx1"/>
                 </a:solidFill>
@@ -4439,7 +4082,7 @@
               <a:t>Best setup: 19/21. Turn speed off, keep other rules: 17/21. Speed adds two correct counted classifications here.</a:t>
             </a:r>
           </a:p>
-          <a:p xmlns:a="http://schemas.openxmlformats.org/drawingml/2006/main">
+          <a:p>
             <a:pPr marL="406400" indent="-203200">
               <a:spcAft>
                 <a:spcPts val="300"/>
@@ -4447,7 +4090,7 @@
               <a:buChar char="•"/>
             </a:pPr>
             <a:r>
-              <a:rPr sz="1400">
+              <a:rPr sz="1400" dirty="0">
                 <a:solidFill>
                   <a:schemeClr val="tx1"/>
                 </a:solidFill>
@@ -4457,27 +4100,45 @@
               </a:rPr>
               <a:t>Turn the detector veto off, keep other rules: 18/21. The veto adds one correct counted classification here.</a:t>
             </a:r>
+            <a:endParaRPr lang="en-US" sz="1400" dirty="0">
+              <a:solidFill>
+                <a:schemeClr val="tx1"/>
+              </a:solidFill>
+              <a:latin typeface="Arial"/>
+              <a:ea typeface="Arial"/>
+              <a:cs typeface="Arial"/>
+            </a:endParaRPr>
           </a:p>
-          <a:p xmlns:a="http://schemas.openxmlformats.org/drawingml/2006/main">
+          <a:p>
             <a:pPr marL="406400" indent="-203200">
               <a:spcAft>
                 <a:spcPts val="300"/>
               </a:spcAft>
               <a:buChar char="•"/>
             </a:pPr>
-            <a:r>
-              <a:rPr sz="1400">
-                <a:solidFill>
-                  <a:schemeClr val="tx1"/>
-                </a:solidFill>
-                <a:latin typeface="Arial"/>
-                <a:ea typeface="Arial"/>
-                <a:cs typeface="Arial"/>
-              </a:rPr>
-              <a:t>These are marginal contributions with other rules active. The gains overlap and are not independent.</a:t>
-            </a:r>
+            <a:endParaRPr lang="en-US" sz="1400" dirty="0">
+              <a:latin typeface="Arial"/>
+              <a:ea typeface="Arial"/>
+              <a:cs typeface="Arial"/>
+            </a:endParaRPr>
           </a:p>
-          <a:p xmlns:a="http://schemas.openxmlformats.org/drawingml/2006/main">
+          <a:p>
+            <a:pPr marL="406400" indent="-203200">
+              <a:spcAft>
+                <a:spcPts val="300"/>
+              </a:spcAft>
+              <a:buChar char="•"/>
+            </a:pPr>
+            <a:endParaRPr sz="1400" dirty="0">
+              <a:solidFill>
+                <a:schemeClr val="tx1"/>
+              </a:solidFill>
+              <a:latin typeface="Arial"/>
+              <a:ea typeface="Arial"/>
+              <a:cs typeface="Arial"/>
+            </a:endParaRPr>
+          </a:p>
+          <a:p>
             <a:pPr marL="177800" indent="-177800">
               <a:spcBef>
                 <a:spcPts val="1000"/>
@@ -4488,7 +4149,7 @@
               <a:buChar char="•"/>
             </a:pPr>
             <a:r>
-              <a:rPr sz="1700" b="1">
+              <a:rPr sz="1700" b="1" dirty="0">
                 <a:solidFill>
                   <a:schemeClr val="tx1"/>
                 </a:solidFill>
@@ -4501,6 +4162,78 @@
           </a:p>
         </p:txBody>
       </p:sp>
+      <p:pic>
+        <p:nvPicPr>
+          <p:cNvPr id="5" name="Picture 4">
+            <a:extLst>
+              <a:ext uri="{FF2B5EF4-FFF2-40B4-BE49-F238E27FC236}">
+                <a16:creationId xmlns:a16="http://schemas.microsoft.com/office/drawing/2014/main" id="{613E694E-6A0D-6480-D26C-F2EC9B8C838F}"/>
+              </a:ext>
+            </a:extLst>
+          </p:cNvPr>
+          <p:cNvPicPr>
+            <a:picLocks noChangeAspect="1"/>
+          </p:cNvPicPr>
+          <p:nvPr/>
+        </p:nvPicPr>
+        <p:blipFill>
+          <a:blip r:embed="rId3">
+            <a:extLst>
+              <a:ext uri="{28A0092B-C50C-407E-A947-70E740481C1C}">
+                <a14:useLocalDpi xmlns:a14="http://schemas.microsoft.com/office/drawing/2010/main" val="0"/>
+              </a:ext>
+            </a:extLst>
+          </a:blip>
+          <a:stretch>
+            <a:fillRect/>
+          </a:stretch>
+        </p:blipFill>
+        <p:spPr>
+          <a:xfrm>
+            <a:off x="6929493" y="2841353"/>
+            <a:ext cx="5080090" cy="3696607"/>
+          </a:xfrm>
+          <a:prstGeom prst="rect">
+            <a:avLst/>
+          </a:prstGeom>
+        </p:spPr>
+      </p:pic>
+      <p:pic>
+        <p:nvPicPr>
+          <p:cNvPr id="7" name="Picture 6">
+            <a:extLst>
+              <a:ext uri="{FF2B5EF4-FFF2-40B4-BE49-F238E27FC236}">
+                <a16:creationId xmlns:a16="http://schemas.microsoft.com/office/drawing/2014/main" id="{F94BAAFE-CB6B-1C82-2F17-AA48650ECC6C}"/>
+              </a:ext>
+            </a:extLst>
+          </p:cNvPr>
+          <p:cNvPicPr>
+            <a:picLocks noChangeAspect="1"/>
+          </p:cNvPicPr>
+          <p:nvPr/>
+        </p:nvPicPr>
+        <p:blipFill>
+          <a:blip r:embed="rId4">
+            <a:extLst>
+              <a:ext uri="{28A0092B-C50C-407E-A947-70E740481C1C}">
+                <a14:useLocalDpi xmlns:a14="http://schemas.microsoft.com/office/drawing/2010/main" val="0"/>
+              </a:ext>
+            </a:extLst>
+          </a:blip>
+          <a:stretch>
+            <a:fillRect/>
+          </a:stretch>
+        </p:blipFill>
+        <p:spPr>
+          <a:xfrm>
+            <a:off x="7642352" y="777240"/>
+            <a:ext cx="3937000" cy="1803400"/>
+          </a:xfrm>
+          <a:prstGeom prst="rect">
+            <a:avLst/>
+          </a:prstGeom>
+        </p:spPr>
+      </p:pic>
     </p:spTree>
     <p:extLst>
       <p:ext uri="{BB962C8B-B14F-4D97-AF65-F5344CB8AC3E}">
@@ -4508,11 +4241,14 @@
       </p:ext>
     </p:extLst>
   </p:cSld>
+  <p:clrMapOvr>
+    <a:masterClrMapping/>
+  </p:clrMapOvr>
 </p:sld>
 </file>
 
-<file path=ppt/slides/slide5.xml><?xml version="1.0" encoding="utf-8"?>
-<p:sld xmlns:p="http://schemas.openxmlformats.org/presentationml/2006/main">
+<file path=ppt/slides/slide4.xml><?xml version="1.0" encoding="utf-8"?>
+<p:sld xmlns:a="http://schemas.openxmlformats.org/drawingml/2006/main" xmlns:r="http://schemas.openxmlformats.org/officeDocument/2006/relationships" xmlns:p="http://schemas.openxmlformats.org/presentationml/2006/main">
   <p:cSld>
     <p:spTree>
       <p:nvGrpSpPr>
@@ -4521,36 +4257,41 @@
         <p:nvPr/>
       </p:nvGrpSpPr>
       <p:grpSpPr>
-        <a:xfrm xmlns:a="http://schemas.openxmlformats.org/drawingml/2006/main"/>
+        <a:xfrm>
+          <a:off x="0" y="0"/>
+          <a:ext cx="0" cy="0"/>
+          <a:chOff x="0" y="0"/>
+          <a:chExt cx="0" cy="0"/>
+        </a:xfrm>
       </p:grpSpPr>
       <p:sp>
         <p:nvSpPr>
           <p:cNvPr id="2" name="Section label">
-            <a:extLst xmlns:a="http://schemas.openxmlformats.org/drawingml/2006/main">
+            <a:extLst>
               <a:ext uri="{FF2B5EF4-FFF2-40B4-BE49-F238E27FC236}">
                 <a16:creationId xmlns:a16="http://schemas.microsoft.com/office/drawing/2014/main" id="{5C9A9E26-F40A-4979-88CD-3FFCAFDEC3B5}"/>
               </a:ext>
             </a:extLst>
           </p:cNvPr>
           <p:cNvSpPr>
-            <a:spLocks xmlns:a="http://schemas.openxmlformats.org/drawingml/2006/main" noGrp="1"/>
+            <a:spLocks noGrp="1"/>
           </p:cNvSpPr>
           <p:nvPr/>
         </p:nvSpPr>
         <p:spPr>
-          <a:xfrm xmlns:a="http://schemas.openxmlformats.org/drawingml/2006/main">
+          <a:xfrm>
             <a:off x="612648" y="777240"/>
             <a:ext cx="6949440" cy="365760"/>
           </a:xfrm>
-          <a:prstGeom xmlns:a="http://schemas.openxmlformats.org/drawingml/2006/main" prst="rect">
+          <a:prstGeom prst="rect">
             <a:avLst/>
           </a:prstGeom>
-          <a:noFill xmlns:a="http://schemas.openxmlformats.org/drawingml/2006/main"/>
+          <a:noFill/>
         </p:spPr>
         <p:txBody>
-          <a:bodyPr xmlns:a="http://schemas.openxmlformats.org/drawingml/2006/main" wrap="square" lIns="50800" tIns="50800" rIns="50800" bIns="50800" anchor="ctr"/>
-          <a:lstStyle xmlns:a="http://schemas.openxmlformats.org/drawingml/2006/main"/>
-          <a:p xmlns:a="http://schemas.openxmlformats.org/drawingml/2006/main">
+          <a:bodyPr wrap="square" lIns="50800" tIns="50800" rIns="50800" bIns="50800" anchor="ctr"/>
+          <a:lstStyle/>
+          <a:p>
             <a:pPr marL="0" indent="0">
               <a:buNone/>
             </a:pPr>
@@ -4578,19 +4319,49 @@
           <p:nvPr/>
         </p:nvGraphicFramePr>
         <p:xfrm>
-          <a:off xmlns:a="http://schemas.openxmlformats.org/drawingml/2006/main" x="612648" y="1280160"/>
-          <a:ext xmlns:a="http://schemas.openxmlformats.org/drawingml/2006/main" cx="10972800" cy="2560320"/>
+          <a:off x="612648" y="1280160"/>
+          <a:ext cx="10972800" cy="2560320"/>
         </p:xfrm>
-        <a:graphic xmlns:a="http://schemas.openxmlformats.org/drawingml/2006/main">
+        <a:graphic>
           <a:graphicData uri="http://schemas.openxmlformats.org/drawingml/2006/table">
             <a:tbl>
               <a:tblPr/>
               <a:tblGrid>
-                <a:gridCol w="3566160"/>
-                <a:gridCol w="1554480"/>
-                <a:gridCol w="1463040"/>
-                <a:gridCol w="2194560"/>
-                <a:gridCol w="2194560"/>
+                <a:gridCol w="3566160">
+                  <a:extLst>
+                    <a:ext uri="{9D8B030D-6E8A-4147-A177-3AD203B41FA5}">
+                      <a16:colId xmlns:a16="http://schemas.microsoft.com/office/drawing/2014/main" val="20000"/>
+                    </a:ext>
+                  </a:extLst>
+                </a:gridCol>
+                <a:gridCol w="1554480">
+                  <a:extLst>
+                    <a:ext uri="{9D8B030D-6E8A-4147-A177-3AD203B41FA5}">
+                      <a16:colId xmlns:a16="http://schemas.microsoft.com/office/drawing/2014/main" val="20001"/>
+                    </a:ext>
+                  </a:extLst>
+                </a:gridCol>
+                <a:gridCol w="1463040">
+                  <a:extLst>
+                    <a:ext uri="{9D8B030D-6E8A-4147-A177-3AD203B41FA5}">
+                      <a16:colId xmlns:a16="http://schemas.microsoft.com/office/drawing/2014/main" val="20002"/>
+                    </a:ext>
+                  </a:extLst>
+                </a:gridCol>
+                <a:gridCol w="2194560">
+                  <a:extLst>
+                    <a:ext uri="{9D8B030D-6E8A-4147-A177-3AD203B41FA5}">
+                      <a16:colId xmlns:a16="http://schemas.microsoft.com/office/drawing/2014/main" val="20003"/>
+                    </a:ext>
+                  </a:extLst>
+                </a:gridCol>
+                <a:gridCol w="2194560">
+                  <a:extLst>
+                    <a:ext uri="{9D8B030D-6E8A-4147-A177-3AD203B41FA5}">
+                      <a16:colId xmlns:a16="http://schemas.microsoft.com/office/drawing/2014/main" val="20004"/>
+                    </a:ext>
+                  </a:extLst>
+                </a:gridCol>
               </a:tblGrid>
               <a:tr h="566928">
                 <a:tc>
@@ -4848,6 +4619,11 @@
                     </a:solidFill>
                   </a:tcPr>
                 </a:tc>
+                <a:extLst>
+                  <a:ext uri="{0D108BD9-81ED-4DB2-BD59-A6C34878D82A}">
+                    <a16:rowId xmlns:a16="http://schemas.microsoft.com/office/drawing/2014/main" val="10000"/>
+                  </a:ext>
+                </a:extLst>
               </a:tr>
               <a:tr h="384048">
                 <a:tc>
@@ -5090,6 +4866,11 @@
                     </a:lnB>
                   </a:tcPr>
                 </a:tc>
+                <a:extLst>
+                  <a:ext uri="{0D108BD9-81ED-4DB2-BD59-A6C34878D82A}">
+                    <a16:rowId xmlns:a16="http://schemas.microsoft.com/office/drawing/2014/main" val="10001"/>
+                  </a:ext>
+                </a:extLst>
               </a:tr>
               <a:tr h="384048">
                 <a:tc>
@@ -5332,6 +5113,11 @@
                     </a:lnB>
                   </a:tcPr>
                 </a:tc>
+                <a:extLst>
+                  <a:ext uri="{0D108BD9-81ED-4DB2-BD59-A6C34878D82A}">
+                    <a16:rowId xmlns:a16="http://schemas.microsoft.com/office/drawing/2014/main" val="10002"/>
+                  </a:ext>
+                </a:extLst>
               </a:tr>
               <a:tr h="457200">
                 <a:tc>
@@ -5574,6 +5360,11 @@
                     </a:lnB>
                   </a:tcPr>
                 </a:tc>
+                <a:extLst>
+                  <a:ext uri="{0D108BD9-81ED-4DB2-BD59-A6C34878D82A}">
+                    <a16:rowId xmlns:a16="http://schemas.microsoft.com/office/drawing/2014/main" val="10003"/>
+                  </a:ext>
+                </a:extLst>
               </a:tr>
               <a:tr h="384048">
                 <a:tc>
@@ -5816,6 +5607,11 @@
                     </a:lnB>
                   </a:tcPr>
                 </a:tc>
+                <a:extLst>
+                  <a:ext uri="{0D108BD9-81ED-4DB2-BD59-A6C34878D82A}">
+                    <a16:rowId xmlns:a16="http://schemas.microsoft.com/office/drawing/2014/main" val="10004"/>
+                  </a:ext>
+                </a:extLst>
               </a:tr>
               <a:tr h="384048">
                 <a:tc>
@@ -6058,6 +5854,11 @@
                     </a:lnB>
                   </a:tcPr>
                 </a:tc>
+                <a:extLst>
+                  <a:ext uri="{0D108BD9-81ED-4DB2-BD59-A6C34878D82A}">
+                    <a16:rowId xmlns:a16="http://schemas.microsoft.com/office/drawing/2014/main" val="10005"/>
+                  </a:ext>
+                </a:extLst>
               </a:tr>
             </a:tbl>
           </a:graphicData>
@@ -6065,74 +5866,32 @@
       </p:graphicFrame>
       <p:sp>
         <p:nvSpPr>
-          <p:cNvPr id="4" name="Text 1">
-            <a:extLst xmlns:a="http://schemas.openxmlformats.org/drawingml/2006/main">
-              <a:ext uri="{FF2B5EF4-FFF2-40B4-BE49-F238E27FC236}">
-                <a16:creationId xmlns:a16="http://schemas.microsoft.com/office/drawing/2014/main" id="{633CC19A-2B54-4E51-9579-2485D0860C00}"/>
-              </a:ext>
-            </a:extLst>
-          </p:cNvPr>
-          <p:cNvSpPr>
-            <a:spLocks xmlns:a="http://schemas.openxmlformats.org/drawingml/2006/main" noGrp="1"/>
-          </p:cNvSpPr>
-          <p:nvPr/>
-        </p:nvSpPr>
-        <p:spPr>
-          <a:xfrm xmlns:a="http://schemas.openxmlformats.org/drawingml/2006/main">
-            <a:off x="612648" y="4069080"/>
-            <a:ext cx="10972800" cy="274320"/>
-          </a:xfrm>
-          <a:prstGeom xmlns:a="http://schemas.openxmlformats.org/drawingml/2006/main" prst="rect">
-            <a:avLst/>
-          </a:prstGeom>
-          <a:noFill xmlns:a="http://schemas.openxmlformats.org/drawingml/2006/main"/>
-        </p:spPr>
-        <p:txBody>
-          <a:bodyPr xmlns:a="http://schemas.openxmlformats.org/drawingml/2006/main" wrap="square" lIns="0" tIns="0" rIns="0" bIns="0" anchor="ctr"/>
-          <a:lstStyle xmlns:a="http://schemas.openxmlformats.org/drawingml/2006/main"/>
-          <a:p xmlns:a="http://schemas.openxmlformats.org/drawingml/2006/main">
-            <a:pPr marL="0" indent="0">
-              <a:buNone/>
-            </a:pPr>
-            <a:r>
-              <a:rPr sz="1200">
-                <a:solidFill>
-                  <a:schemeClr val="tx2"/>
-                </a:solidFill>
-              </a:rPr>
-              <a:t>Found = time-matched and counted with the correct class. It does not confirm that the whole track follows one person.</a:t>
-            </a:r>
-          </a:p>
-        </p:txBody>
-      </p:sp>
-      <p:sp>
-        <p:nvSpPr>
           <p:cNvPr id="5" name="Text 2">
-            <a:extLst xmlns:a="http://schemas.openxmlformats.org/drawingml/2006/main">
+            <a:extLst>
               <a:ext uri="{FF2B5EF4-FFF2-40B4-BE49-F238E27FC236}">
                 <a16:creationId xmlns:a16="http://schemas.microsoft.com/office/drawing/2014/main" id="{74FCE794-1DA6-41AC-B529-835C9304B923}"/>
               </a:ext>
             </a:extLst>
           </p:cNvPr>
           <p:cNvSpPr>
-            <a:spLocks xmlns:a="http://schemas.openxmlformats.org/drawingml/2006/main" noGrp="1"/>
+            <a:spLocks noGrp="1"/>
           </p:cNvSpPr>
           <p:nvPr/>
         </p:nvSpPr>
         <p:spPr>
-          <a:xfrm xmlns:a="http://schemas.openxmlformats.org/drawingml/2006/main">
+          <a:xfrm>
             <a:off x="667512" y="4480560"/>
             <a:ext cx="10972800" cy="1920240"/>
           </a:xfrm>
-          <a:prstGeom xmlns:a="http://schemas.openxmlformats.org/drawingml/2006/main" prst="rect">
+          <a:prstGeom prst="rect">
             <a:avLst/>
           </a:prstGeom>
-          <a:noFill xmlns:a="http://schemas.openxmlformats.org/drawingml/2006/main"/>
+          <a:noFill/>
         </p:spPr>
         <p:txBody>
-          <a:bodyPr xmlns:a="http://schemas.openxmlformats.org/drawingml/2006/main" wrap="square" lIns="0" tIns="0" rIns="0" bIns="0" anchor="t"/>
-          <a:lstStyle xmlns:a="http://schemas.openxmlformats.org/drawingml/2006/main"/>
-          <a:p xmlns:a="http://schemas.openxmlformats.org/drawingml/2006/main">
+          <a:bodyPr wrap="square" lIns="0" tIns="0" rIns="0" bIns="0" anchor="t"/>
+          <a:lstStyle/>
+          <a:p>
             <a:pPr marL="406400" indent="-203200">
               <a:spcAft>
                 <a:spcPts val="300"/>
@@ -6140,7 +5899,7 @@
               <a:buChar char="•"/>
             </a:pPr>
             <a:r>
-              <a:rPr sz="1400">
+              <a:rPr sz="1400" dirty="0">
                 <a:solidFill>
                   <a:schemeClr val="tx1"/>
                 </a:solidFill>
@@ -6151,43 +5910,21 @@
               <a:t>Remaining errors: short cyclist n5 at 14:21–14:26 rejected; pedestrian n6 at 14:47–14:58 labelled cyclist.</a:t>
             </a:r>
           </a:p>
-          <a:p xmlns:a="http://schemas.openxmlformats.org/drawingml/2006/main">
+          <a:p>
             <a:pPr marL="406400" indent="-203200">
               <a:spcAft>
                 <a:spcPts val="300"/>
               </a:spcAft>
               <a:buChar char="•"/>
             </a:pPr>
-            <a:r>
-              <a:rPr sz="1400">
-                <a:solidFill>
-                  <a:schemeClr val="tx1"/>
-                </a:solidFill>
-                <a:latin typeface="Arial"/>
-                <a:ea typeface="Arial"/>
-                <a:cs typeface="Arial"/>
-              </a:rPr>
-              <a:t>Truth files stay unchanged. Complete-track identity checks are needed to rule out object-to-person ID switches.</a:t>
-            </a:r>
-          </a:p>
-          <a:p xmlns:a="http://schemas.openxmlformats.org/drawingml/2006/main">
-            <a:pPr marL="406400" indent="-203200">
-              <a:spcAft>
-                <a:spcPts val="300"/>
-              </a:spcAft>
-              <a:buChar char="•"/>
-            </a:pPr>
-            <a:r>
-              <a:rPr sz="1400">
-                <a:solidFill>
-                  <a:schemeClr val="tx1"/>
-                </a:solidFill>
-                <a:latin typeface="Arial"/>
-                <a:ea typeface="Arial"/>
-                <a:cs typeface="Arial"/>
-              </a:rPr>
-              <a:t>19/21 is development evidence from one camera/day. These repeatedly inspected clips are not an independent test set.</a:t>
-            </a:r>
+            <a:endParaRPr sz="1400" dirty="0">
+              <a:solidFill>
+                <a:schemeClr val="tx1"/>
+              </a:solidFill>
+              <a:latin typeface="Arial"/>
+              <a:ea typeface="Arial"/>
+              <a:cs typeface="Arial"/>
+            </a:endParaRPr>
           </a:p>
         </p:txBody>
       </p:sp>
@@ -6198,11 +5935,14 @@
       </p:ext>
     </p:extLst>
   </p:cSld>
+  <p:clrMapOvr>
+    <a:masterClrMapping/>
+  </p:clrMapOvr>
 </p:sld>
 </file>
 
-<file path=ppt/slides/slide6.xml><?xml version="1.0" encoding="utf-8"?>
-<p:sld xmlns:p="http://schemas.openxmlformats.org/presentationml/2006/main">
+<file path=ppt/slides/slide5.xml><?xml version="1.0" encoding="utf-8"?>
+<p:sld xmlns:a="http://schemas.openxmlformats.org/drawingml/2006/main" xmlns:r="http://schemas.openxmlformats.org/officeDocument/2006/relationships" xmlns:p="http://schemas.openxmlformats.org/presentationml/2006/main">
   <p:cSld>
     <p:spTree>
       <p:nvGrpSpPr>
@@ -6211,36 +5951,41 @@
         <p:nvPr/>
       </p:nvGrpSpPr>
       <p:grpSpPr>
-        <a:xfrm xmlns:a="http://schemas.openxmlformats.org/drawingml/2006/main"/>
+        <a:xfrm>
+          <a:off x="0" y="0"/>
+          <a:ext cx="0" cy="0"/>
+          <a:chOff x="0" y="0"/>
+          <a:chExt cx="0" cy="0"/>
+        </a:xfrm>
       </p:grpSpPr>
       <p:sp>
         <p:nvSpPr>
           <p:cNvPr id="2" name="Section label">
-            <a:extLst xmlns:a="http://schemas.openxmlformats.org/drawingml/2006/main">
+            <a:extLst>
               <a:ext uri="{FF2B5EF4-FFF2-40B4-BE49-F238E27FC236}">
                 <a16:creationId xmlns:a16="http://schemas.microsoft.com/office/drawing/2014/main" id="{5C9A9E26-F40A-4979-88CD-3FFCAFDEC3B5}"/>
               </a:ext>
             </a:extLst>
           </p:cNvPr>
           <p:cNvSpPr>
-            <a:spLocks xmlns:a="http://schemas.openxmlformats.org/drawingml/2006/main" noGrp="1"/>
+            <a:spLocks noGrp="1"/>
           </p:cNvSpPr>
           <p:nvPr/>
         </p:nvSpPr>
         <p:spPr>
-          <a:xfrm xmlns:a="http://schemas.openxmlformats.org/drawingml/2006/main">
+          <a:xfrm>
             <a:off x="612648" y="777240"/>
             <a:ext cx="6949440" cy="365760"/>
           </a:xfrm>
-          <a:prstGeom xmlns:a="http://schemas.openxmlformats.org/drawingml/2006/main" prst="rect">
+          <a:prstGeom prst="rect">
             <a:avLst/>
           </a:prstGeom>
-          <a:noFill xmlns:a="http://schemas.openxmlformats.org/drawingml/2006/main"/>
+          <a:noFill/>
         </p:spPr>
         <p:txBody>
-          <a:bodyPr xmlns:a="http://schemas.openxmlformats.org/drawingml/2006/main" wrap="square" lIns="50800" tIns="50800" rIns="50800" bIns="50800" anchor="ctr"/>
-          <a:lstStyle xmlns:a="http://schemas.openxmlformats.org/drawingml/2006/main"/>
-          <a:p xmlns:a="http://schemas.openxmlformats.org/drawingml/2006/main">
+          <a:bodyPr wrap="square" lIns="50800" tIns="50800" rIns="50800" bIns="50800" anchor="ctr"/>
+          <a:lstStyle/>
+          <a:p>
             <a:pPr marL="0" indent="0">
               <a:buNone/>
             </a:pPr>
@@ -6268,19 +6013,49 @@
           <p:nvPr/>
         </p:nvGraphicFramePr>
         <p:xfrm>
-          <a:off xmlns:a="http://schemas.openxmlformats.org/drawingml/2006/main" x="612648" y="1280160"/>
-          <a:ext xmlns:a="http://schemas.openxmlformats.org/drawingml/2006/main" cx="10972800" cy="2560320"/>
+          <a:off x="612648" y="1280160"/>
+          <a:ext cx="10972800" cy="2560320"/>
         </p:xfrm>
-        <a:graphic xmlns:a="http://schemas.openxmlformats.org/drawingml/2006/main">
+        <a:graphic>
           <a:graphicData uri="http://schemas.openxmlformats.org/drawingml/2006/table">
             <a:tbl>
               <a:tblPr/>
               <a:tblGrid>
-                <a:gridCol w="3566160"/>
-                <a:gridCol w="1554480"/>
-                <a:gridCol w="1463040"/>
-                <a:gridCol w="2194560"/>
-                <a:gridCol w="2194560"/>
+                <a:gridCol w="3566160">
+                  <a:extLst>
+                    <a:ext uri="{9D8B030D-6E8A-4147-A177-3AD203B41FA5}">
+                      <a16:colId xmlns:a16="http://schemas.microsoft.com/office/drawing/2014/main" val="20000"/>
+                    </a:ext>
+                  </a:extLst>
+                </a:gridCol>
+                <a:gridCol w="1554480">
+                  <a:extLst>
+                    <a:ext uri="{9D8B030D-6E8A-4147-A177-3AD203B41FA5}">
+                      <a16:colId xmlns:a16="http://schemas.microsoft.com/office/drawing/2014/main" val="20001"/>
+                    </a:ext>
+                  </a:extLst>
+                </a:gridCol>
+                <a:gridCol w="1463040">
+                  <a:extLst>
+                    <a:ext uri="{9D8B030D-6E8A-4147-A177-3AD203B41FA5}">
+                      <a16:colId xmlns:a16="http://schemas.microsoft.com/office/drawing/2014/main" val="20002"/>
+                    </a:ext>
+                  </a:extLst>
+                </a:gridCol>
+                <a:gridCol w="2194560">
+                  <a:extLst>
+                    <a:ext uri="{9D8B030D-6E8A-4147-A177-3AD203B41FA5}">
+                      <a16:colId xmlns:a16="http://schemas.microsoft.com/office/drawing/2014/main" val="20003"/>
+                    </a:ext>
+                  </a:extLst>
+                </a:gridCol>
+                <a:gridCol w="2194560">
+                  <a:extLst>
+                    <a:ext uri="{9D8B030D-6E8A-4147-A177-3AD203B41FA5}">
+                      <a16:colId xmlns:a16="http://schemas.microsoft.com/office/drawing/2014/main" val="20004"/>
+                    </a:ext>
+                  </a:extLst>
+                </a:gridCol>
               </a:tblGrid>
               <a:tr h="566928">
                 <a:tc>
@@ -6538,6 +6313,11 @@
                     </a:solidFill>
                   </a:tcPr>
                 </a:tc>
+                <a:extLst>
+                  <a:ext uri="{0D108BD9-81ED-4DB2-BD59-A6C34878D82A}">
+                    <a16:rowId xmlns:a16="http://schemas.microsoft.com/office/drawing/2014/main" val="10000"/>
+                  </a:ext>
+                </a:extLst>
               </a:tr>
               <a:tr h="384048">
                 <a:tc>
@@ -6780,6 +6560,11 @@
                     </a:lnB>
                   </a:tcPr>
                 </a:tc>
+                <a:extLst>
+                  <a:ext uri="{0D108BD9-81ED-4DB2-BD59-A6C34878D82A}">
+                    <a16:rowId xmlns:a16="http://schemas.microsoft.com/office/drawing/2014/main" val="10001"/>
+                  </a:ext>
+                </a:extLst>
               </a:tr>
               <a:tr h="384048">
                 <a:tc>
@@ -7022,6 +6807,11 @@
                     </a:lnB>
                   </a:tcPr>
                 </a:tc>
+                <a:extLst>
+                  <a:ext uri="{0D108BD9-81ED-4DB2-BD59-A6C34878D82A}">
+                    <a16:rowId xmlns:a16="http://schemas.microsoft.com/office/drawing/2014/main" val="10002"/>
+                  </a:ext>
+                </a:extLst>
               </a:tr>
               <a:tr h="457200">
                 <a:tc>
@@ -7264,6 +7054,11 @@
                     </a:lnB>
                   </a:tcPr>
                 </a:tc>
+                <a:extLst>
+                  <a:ext uri="{0D108BD9-81ED-4DB2-BD59-A6C34878D82A}">
+                    <a16:rowId xmlns:a16="http://schemas.microsoft.com/office/drawing/2014/main" val="10003"/>
+                  </a:ext>
+                </a:extLst>
               </a:tr>
               <a:tr h="384048">
                 <a:tc>
@@ -7506,6 +7301,11 @@
                     </a:lnB>
                   </a:tcPr>
                 </a:tc>
+                <a:extLst>
+                  <a:ext uri="{0D108BD9-81ED-4DB2-BD59-A6C34878D82A}">
+                    <a16:rowId xmlns:a16="http://schemas.microsoft.com/office/drawing/2014/main" val="10004"/>
+                  </a:ext>
+                </a:extLst>
               </a:tr>
               <a:tr h="384048">
                 <a:tc>
@@ -7748,6 +7548,11 @@
                     </a:lnB>
                   </a:tcPr>
                 </a:tc>
+                <a:extLst>
+                  <a:ext uri="{0D108BD9-81ED-4DB2-BD59-A6C34878D82A}">
+                    <a16:rowId xmlns:a16="http://schemas.microsoft.com/office/drawing/2014/main" val="10005"/>
+                  </a:ext>
+                </a:extLst>
               </a:tr>
             </a:tbl>
           </a:graphicData>
@@ -7756,31 +7561,31 @@
       <p:sp>
         <p:nvSpPr>
           <p:cNvPr id="5" name="Text 2">
-            <a:extLst xmlns:a="http://schemas.openxmlformats.org/drawingml/2006/main">
+            <a:extLst>
               <a:ext uri="{FF2B5EF4-FFF2-40B4-BE49-F238E27FC236}">
                 <a16:creationId xmlns:a16="http://schemas.microsoft.com/office/drawing/2014/main" id="{74FCE794-1DA6-41AC-B529-835C9304B923}"/>
               </a:ext>
             </a:extLst>
           </p:cNvPr>
           <p:cNvSpPr>
-            <a:spLocks xmlns:a="http://schemas.openxmlformats.org/drawingml/2006/main" noGrp="1"/>
+            <a:spLocks noGrp="1"/>
           </p:cNvSpPr>
           <p:nvPr/>
         </p:nvSpPr>
         <p:spPr>
-          <a:xfrm xmlns:a="http://schemas.openxmlformats.org/drawingml/2006/main">
+          <a:xfrm>
             <a:off x="667512" y="4480560"/>
             <a:ext cx="10972800" cy="1920240"/>
           </a:xfrm>
-          <a:prstGeom xmlns:a="http://schemas.openxmlformats.org/drawingml/2006/main" prst="rect">
+          <a:prstGeom prst="rect">
             <a:avLst/>
           </a:prstGeom>
-          <a:noFill xmlns:a="http://schemas.openxmlformats.org/drawingml/2006/main"/>
+          <a:noFill/>
         </p:spPr>
         <p:txBody>
-          <a:bodyPr xmlns:a="http://schemas.openxmlformats.org/drawingml/2006/main" wrap="square" lIns="0" tIns="0" rIns="0" bIns="0" anchor="t"/>
-          <a:lstStyle xmlns:a="http://schemas.openxmlformats.org/drawingml/2006/main"/>
-          <a:p xmlns:a="http://schemas.openxmlformats.org/drawingml/2006/main">
+          <a:bodyPr wrap="square" lIns="0" tIns="0" rIns="0" bIns="0" anchor="t"/>
+          <a:lstStyle/>
+          <a:p>
             <a:pPr marL="406400" indent="-203200">
               <a:spcAft>
                 <a:spcPts val="300"/>
@@ -7788,7 +7593,7 @@
               <a:buChar char="•"/>
             </a:pPr>
             <a:r>
-              <a:rPr sz="1400">
+              <a:rPr sz="1400" dirty="0">
                 <a:solidFill>
                   <a:schemeClr val="tx1"/>
                 </a:solidFill>
@@ -7799,7 +7604,7 @@
               <a:t>The failed sensitive run used 0.4 seconds during BOTH day and night, confidence 0.15 and no static filter.</a:t>
             </a:r>
           </a:p>
-          <a:p xmlns:a="http://schemas.openxmlformats.org/drawingml/2006/main">
+          <a:p>
             <a:pPr marL="406400" indent="-203200">
               <a:spcAft>
                 <a:spcPts val="300"/>
@@ -7807,18 +7612,28 @@
               <a:buChar char="•"/>
             </a:pPr>
             <a:r>
-              <a:rPr sz="1400">
-                <a:solidFill>
-                  <a:schemeClr val="tx1"/>
-                </a:solidFill>
+              <a:rPr lang="en-US" sz="1400" dirty="0">
                 <a:latin typeface="Arial"/>
                 <a:ea typeface="Arial"/>
                 <a:cs typeface="Arial"/>
               </a:rPr>
-              <a:t>Reference runs keep the usual 3 seconds and strict night exception. No sensitive settings are enabled in the new-site runs.</a:t>
+              <a:t>*</a:t>
             </a:r>
+            <a:r>
+              <a:rPr sz="1400" dirty="0">
+                <a:latin typeface="Arial"/>
+                <a:ea typeface="Arial"/>
+                <a:cs typeface="Arial"/>
+              </a:rPr>
+              <a:t>Processing minutes are per 15-minute video.</a:t>
+            </a:r>
+            <a:endParaRPr lang="en-US" sz="1400" dirty="0">
+              <a:latin typeface="Arial"/>
+              <a:ea typeface="Arial"/>
+              <a:cs typeface="Arial"/>
+            </a:endParaRPr>
           </a:p>
-          <a:p xmlns:a="http://schemas.openxmlformats.org/drawingml/2006/main">
+          <a:p>
             <a:pPr marL="406400" indent="-203200">
               <a:spcAft>
                 <a:spcPts val="300"/>
@@ -7826,13 +7641,26 @@
               <a:buChar char="•"/>
             </a:pPr>
             <a:r>
-              <a:rPr sz="1400">
-                <a:latin typeface="Arial"/>
-                <a:ea typeface="Arial"/>
-                <a:cs typeface="Arial"/>
-              </a:rPr>
-              <a:t>Extra counts = unmatched tracks (often false objects or duplicates). Processing minutes are per 15-minute video.</a:t>
+              <a:rPr lang="en-US" sz="1400" b="1" dirty="0"/>
+              <a:t>full system:</a:t>
             </a:r>
+            <a:r>
+              <a:rPr lang="en-US" sz="1400" dirty="0"/>
+              <a:t> fine-tuned RT-DETR (“V3”) + SAHI close-up tiles + </a:t>
+            </a:r>
+            <a:r>
+              <a:rPr lang="en-US" sz="1400" dirty="0" err="1"/>
+              <a:t>ByteTrack</a:t>
+            </a:r>
+            <a:r>
+              <a:rPr lang="en-US" sz="1400" dirty="0"/>
+              <a:t> tracking + ID stitching + X-CLIP classification + motion, duration and static-object rules.</a:t>
+            </a:r>
+            <a:endParaRPr sz="1400" dirty="0">
+              <a:latin typeface="Arial"/>
+              <a:ea typeface="Arial"/>
+              <a:cs typeface="Arial"/>
+            </a:endParaRPr>
           </a:p>
         </p:txBody>
       </p:sp>
@@ -7843,11 +7671,14 @@
       </p:ext>
     </p:extLst>
   </p:cSld>
+  <p:clrMapOvr>
+    <a:masterClrMapping/>
+  </p:clrMapOvr>
 </p:sld>
 </file>
 
-<file path=ppt/slides/slide7.xml><?xml version="1.0" encoding="utf-8"?>
-<p:sld xmlns:p="http://schemas.openxmlformats.org/presentationml/2006/main">
+<file path=ppt/slides/slide6.xml><?xml version="1.0" encoding="utf-8"?>
+<p:sld xmlns:a="http://schemas.openxmlformats.org/drawingml/2006/main" xmlns:r="http://schemas.openxmlformats.org/officeDocument/2006/relationships" xmlns:p="http://schemas.openxmlformats.org/presentationml/2006/main">
   <p:cSld>
     <p:spTree>
       <p:nvGrpSpPr>
@@ -7856,36 +7687,41 @@
         <p:nvPr/>
       </p:nvGrpSpPr>
       <p:grpSpPr>
-        <a:xfrm xmlns:a="http://schemas.openxmlformats.org/drawingml/2006/main"/>
+        <a:xfrm>
+          <a:off x="0" y="0"/>
+          <a:ext cx="0" cy="0"/>
+          <a:chOff x="0" y="0"/>
+          <a:chExt cx="0" cy="0"/>
+        </a:xfrm>
       </p:grpSpPr>
       <p:sp>
         <p:nvSpPr>
           <p:cNvPr id="2" name="Section label">
-            <a:extLst xmlns:a="http://schemas.openxmlformats.org/drawingml/2006/main">
+            <a:extLst>
               <a:ext uri="{FF2B5EF4-FFF2-40B4-BE49-F238E27FC236}">
                 <a16:creationId xmlns:a16="http://schemas.microsoft.com/office/drawing/2014/main" id="{7E1558C4-49FD-48C2-B1B2-5EF0200D12B1}"/>
               </a:ext>
             </a:extLst>
           </p:cNvPr>
           <p:cNvSpPr>
-            <a:spLocks xmlns:a="http://schemas.openxmlformats.org/drawingml/2006/main" noGrp="1"/>
+            <a:spLocks noGrp="1"/>
           </p:cNvSpPr>
           <p:nvPr/>
         </p:nvSpPr>
         <p:spPr>
-          <a:xfrm xmlns:a="http://schemas.openxmlformats.org/drawingml/2006/main">
+          <a:xfrm>
             <a:off x="612648" y="777240"/>
             <a:ext cx="6035040" cy="365760"/>
           </a:xfrm>
-          <a:prstGeom xmlns:a="http://schemas.openxmlformats.org/drawingml/2006/main" prst="rect">
+          <a:prstGeom prst="rect">
             <a:avLst/>
           </a:prstGeom>
-          <a:noFill xmlns:a="http://schemas.openxmlformats.org/drawingml/2006/main"/>
+          <a:noFill/>
         </p:spPr>
         <p:txBody>
-          <a:bodyPr xmlns:a="http://schemas.openxmlformats.org/drawingml/2006/main" wrap="square" lIns="50800" tIns="50800" rIns="50800" bIns="50800" anchor="ctr"/>
-          <a:lstStyle xmlns:a="http://schemas.openxmlformats.org/drawingml/2006/main"/>
-          <a:p xmlns:a="http://schemas.openxmlformats.org/drawingml/2006/main">
+          <a:bodyPr wrap="square" lIns="50800" tIns="50800" rIns="50800" bIns="50800" anchor="ctr"/>
+          <a:lstStyle/>
+          <a:p>
             <a:pPr marL="0" indent="0">
               <a:buNone/>
             </a:pPr>
@@ -7909,31 +7745,31 @@
       <p:sp>
         <p:nvSpPr>
           <p:cNvPr id="3" name="Text 1">
-            <a:extLst xmlns:a="http://schemas.openxmlformats.org/drawingml/2006/main">
+            <a:extLst>
               <a:ext uri="{FF2B5EF4-FFF2-40B4-BE49-F238E27FC236}">
                 <a16:creationId xmlns:a16="http://schemas.microsoft.com/office/drawing/2014/main" id="{F3625BC1-D586-4AC1-B05C-9C274365CBDF}"/>
               </a:ext>
             </a:extLst>
           </p:cNvPr>
           <p:cNvSpPr>
-            <a:spLocks xmlns:a="http://schemas.openxmlformats.org/drawingml/2006/main" noGrp="1"/>
+            <a:spLocks noGrp="1"/>
           </p:cNvSpPr>
           <p:nvPr/>
         </p:nvSpPr>
         <p:spPr>
-          <a:xfrm xmlns:a="http://schemas.openxmlformats.org/drawingml/2006/main">
+          <a:xfrm>
             <a:off x="667512" y="1371600"/>
             <a:ext cx="10972800" cy="4937760"/>
           </a:xfrm>
-          <a:prstGeom xmlns:a="http://schemas.openxmlformats.org/drawingml/2006/main" prst="rect">
+          <a:prstGeom prst="rect">
             <a:avLst/>
           </a:prstGeom>
-          <a:noFill xmlns:a="http://schemas.openxmlformats.org/drawingml/2006/main"/>
+          <a:noFill/>
         </p:spPr>
         <p:txBody>
-          <a:bodyPr xmlns:a="http://schemas.openxmlformats.org/drawingml/2006/main" wrap="square" lIns="0" tIns="0" rIns="0" bIns="0" anchor="t"/>
-          <a:lstStyle xmlns:a="http://schemas.openxmlformats.org/drawingml/2006/main"/>
-          <a:p xmlns:a="http://schemas.openxmlformats.org/drawingml/2006/main">
+          <a:bodyPr wrap="square" lIns="0" tIns="0" rIns="0" bIns="0" anchor="t"/>
+          <a:lstStyle/>
+          <a:p>
             <a:pPr marL="177800" indent="-177800">
               <a:spcAft>
                 <a:spcPts val="400"/>
@@ -7941,7 +7777,7 @@
               <a:buChar char="•"/>
             </a:pPr>
             <a:r>
-              <a:rPr sz="1700" b="1">
+              <a:rPr sz="1700" b="1" dirty="0">
                 <a:solidFill>
                   <a:schemeClr val="tx1"/>
                 </a:solidFill>
@@ -7952,7 +7788,7 @@
               <a:t>Different site and year: Corrine 706, March 12, 2025</a:t>
             </a:r>
           </a:p>
-          <a:p xmlns:a="http://schemas.openxmlformats.org/drawingml/2006/main">
+          <a:p>
             <a:pPr marL="406400" indent="-203200">
               <a:spcAft>
                 <a:spcPts val="300"/>
@@ -7960,7 +7796,7 @@
               <a:buChar char="•"/>
             </a:pPr>
             <a:r>
-              <a:rPr sz="1400">
+              <a:rPr sz="1400" dirty="0">
                 <a:solidFill>
                   <a:schemeClr val="tx1"/>
                 </a:solidFill>
@@ -7971,7 +7807,7 @@
               <a:t>960×540 fisheye video versus Colonial’s 720×480. Matched runs counted 0 cyclists and 1 pedestrian.</a:t>
             </a:r>
           </a:p>
-          <a:p xmlns:a="http://schemas.openxmlformats.org/drawingml/2006/main">
+          <a:p>
             <a:pPr marL="406400" indent="-203200">
               <a:spcAft>
                 <a:spcPts val="300"/>
@@ -7979,7 +7815,7 @@
               <a:buChar char="•"/>
             </a:pPr>
             <a:r>
-              <a:rPr sz="1400">
+              <a:rPr sz="1400" dirty="0">
                 <a:solidFill>
                   <a:schemeClr val="tx1"/>
                 </a:solidFill>
@@ -7990,7 +7826,7 @@
               <a:t>Owner review of the older combination: two distant cyclists missed; an e-scooter labelled pedestrian.</a:t>
             </a:r>
           </a:p>
-          <a:p xmlns:a="http://schemas.openxmlformats.org/drawingml/2006/main">
+          <a:p>
             <a:pPr marL="177800" indent="-177800">
               <a:spcBef>
                 <a:spcPts val="1000"/>
@@ -8001,7 +7837,7 @@
               <a:buChar char="•"/>
             </a:pPr>
             <a:r>
-              <a:rPr sz="1700" b="1">
+              <a:rPr sz="1700" b="1" dirty="0">
                 <a:solidFill>
                   <a:schemeClr val="tx1"/>
                 </a:solidFill>
@@ -8012,7 +7848,7 @@
               <a:t>Corrine result: distant-cyclist detection still needs improvement</a:t>
             </a:r>
           </a:p>
-          <a:p xmlns:a="http://schemas.openxmlformats.org/drawingml/2006/main">
+          <a:p>
             <a:pPr marL="406400" indent="-203200">
               <a:spcAft>
                 <a:spcPts val="300"/>
@@ -8020,7 +7856,7 @@
               <a:buChar char="•"/>
             </a:pPr>
             <a:r>
-              <a:rPr sz="1400">
+              <a:rPr sz="1400" dirty="0">
                 <a:solidFill>
                   <a:schemeClr val="tx1"/>
                 </a:solidFill>
@@ -8031,7 +7867,7 @@
               <a:t>A parked car had no drawn box; vehicle movement filters can hide a detection. Raw boxes need checking.</a:t>
             </a:r>
           </a:p>
-          <a:p xmlns:a="http://schemas.openxmlformats.org/drawingml/2006/main">
+          <a:p>
             <a:pPr marL="177800" indent="-177800">
               <a:spcBef>
                 <a:spcPts val="1000"/>
@@ -8042,7 +7878,7 @@
               <a:buChar char="•"/>
             </a:pPr>
             <a:r>
-              <a:rPr sz="1700" b="1">
+              <a:rPr sz="1700" b="1" dirty="0">
                 <a:solidFill>
                   <a:schemeClr val="tx1"/>
                 </a:solidFill>
@@ -8053,27 +7889,564 @@
               <a:t>RF-DETR and Grounding DINO: no demonstrated counting improvement</a:t>
             </a:r>
           </a:p>
-          <a:p xmlns:a="http://schemas.openxmlformats.org/drawingml/2006/main">
-            <a:pPr marL="406400" indent="-203200">
-              <a:spcAft>
-                <a:spcPts val="300"/>
-              </a:spcAft>
+        </p:txBody>
+      </p:sp>
+      <p:graphicFrame>
+        <p:nvGraphicFramePr>
+          <p:cNvPr id="4" name="Table 3">
+            <a:extLst>
+              <a:ext uri="{FF2B5EF4-FFF2-40B4-BE49-F238E27FC236}">
+                <a16:creationId xmlns:a16="http://schemas.microsoft.com/office/drawing/2014/main" id="{5A5F8739-B7E1-063D-AB6B-08B70693E432}"/>
+              </a:ext>
+            </a:extLst>
+          </p:cNvPr>
+          <p:cNvGraphicFramePr>
+            <a:graphicFrameLocks noGrp="1"/>
+          </p:cNvGraphicFramePr>
+          <p:nvPr>
+            <p:extLst>
+              <p:ext uri="{D42A27DB-BD31-4B8C-83A1-F6EECF244321}">
+                <p14:modId xmlns:p14="http://schemas.microsoft.com/office/powerpoint/2010/main" val="4247242840"/>
+              </p:ext>
+            </p:extLst>
+          </p:nvPr>
+        </p:nvGraphicFramePr>
+        <p:xfrm>
+          <a:off x="667512" y="3509278"/>
+          <a:ext cx="10515600" cy="2194560"/>
+        </p:xfrm>
+        <a:graphic>
+          <a:graphicData uri="http://schemas.openxmlformats.org/drawingml/2006/table">
+            <a:tbl>
+              <a:tblPr>
+                <a:tableStyleId>{9DCAF9ED-07DC-4A11-8D7F-57B35C25682E}</a:tableStyleId>
+              </a:tblPr>
+              <a:tblGrid>
+                <a:gridCol w="3505200">
+                  <a:extLst>
+                    <a:ext uri="{9D8B030D-6E8A-4147-A177-3AD203B41FA5}">
+                      <a16:colId xmlns:a16="http://schemas.microsoft.com/office/drawing/2014/main" val="4113774043"/>
+                    </a:ext>
+                  </a:extLst>
+                </a:gridCol>
+                <a:gridCol w="3505200">
+                  <a:extLst>
+                    <a:ext uri="{9D8B030D-6E8A-4147-A177-3AD203B41FA5}">
+                      <a16:colId xmlns:a16="http://schemas.microsoft.com/office/drawing/2014/main" val="2900477532"/>
+                    </a:ext>
+                  </a:extLst>
+                </a:gridCol>
+                <a:gridCol w="3505200">
+                  <a:extLst>
+                    <a:ext uri="{9D8B030D-6E8A-4147-A177-3AD203B41FA5}">
+                      <a16:colId xmlns:a16="http://schemas.microsoft.com/office/drawing/2014/main" val="2156965349"/>
+                    </a:ext>
+                  </a:extLst>
+                </a:gridCol>
+              </a:tblGrid>
+              <a:tr h="0">
+                <a:tc>
+                  <a:txBody>
+                    <a:bodyPr/>
+                    <a:lstStyle/>
+                    <a:p>
+                      <a:pPr>
+                        <a:buNone/>
+                      </a:pPr>
+                      <a:r>
+                        <a:rPr lang="en-US" dirty="0"/>
+                        <a:t>Clip</a:t>
+                      </a:r>
+                    </a:p>
+                  </a:txBody>
+                  <a:tcPr anchor="ctr">
+                    <a:solidFill>
+                      <a:schemeClr val="accent2">
+                        <a:lumMod val="40000"/>
+                        <a:lumOff val="60000"/>
+                      </a:schemeClr>
+                    </a:solidFill>
+                  </a:tcPr>
+                </a:tc>
+                <a:tc>
+                  <a:txBody>
+                    <a:bodyPr/>
+                    <a:lstStyle/>
+                    <a:p>
+                      <a:pPr>
+                        <a:buNone/>
+                      </a:pPr>
+                      <a:r>
+                        <a:rPr lang="en-US" dirty="0"/>
+                        <a:t>RT-DETR Detector correct</a:t>
+                      </a:r>
+                    </a:p>
+                  </a:txBody>
+                  <a:tcPr anchor="ctr">
+                    <a:solidFill>
+                      <a:schemeClr val="accent2">
+                        <a:lumMod val="40000"/>
+                        <a:lumOff val="60000"/>
+                      </a:schemeClr>
+                    </a:solidFill>
+                  </a:tcPr>
+                </a:tc>
+                <a:tc>
+                  <a:txBody>
+                    <a:bodyPr/>
+                    <a:lstStyle/>
+                    <a:p>
+                      <a:pPr>
+                        <a:buNone/>
+                      </a:pPr>
+                      <a:r>
+                        <a:rPr lang="en-US" dirty="0"/>
+                        <a:t>X-CLIP correct</a:t>
+                      </a:r>
+                    </a:p>
+                  </a:txBody>
+                  <a:tcPr anchor="ctr">
+                    <a:solidFill>
+                      <a:schemeClr val="accent2">
+                        <a:lumMod val="40000"/>
+                        <a:lumOff val="60000"/>
+                      </a:schemeClr>
+                    </a:solidFill>
+                  </a:tcPr>
+                </a:tc>
+                <a:extLst>
+                  <a:ext uri="{0D108BD9-81ED-4DB2-BD59-A6C34878D82A}">
+                    <a16:rowId xmlns:a16="http://schemas.microsoft.com/office/drawing/2014/main" val="1734070826"/>
+                  </a:ext>
+                </a:extLst>
+              </a:tr>
+              <a:tr h="0">
+                <a:tc>
+                  <a:txBody>
+                    <a:bodyPr/>
+                    <a:lstStyle/>
+                    <a:p>
+                      <a:pPr>
+                        <a:buNone/>
+                      </a:pPr>
+                      <a:r>
+                        <a:rPr lang="en-US"/>
+                        <a:t>Night 21:15–21:30</a:t>
+                      </a:r>
+                    </a:p>
+                  </a:txBody>
+                  <a:tcPr anchor="ctr"/>
+                </a:tc>
+                <a:tc>
+                  <a:txBody>
+                    <a:bodyPr/>
+                    <a:lstStyle/>
+                    <a:p>
+                      <a:pPr>
+                        <a:buNone/>
+                      </a:pPr>
+                      <a:r>
+                        <a:rPr lang="en-US" dirty="0"/>
+                        <a:t>3/6</a:t>
+                      </a:r>
+                    </a:p>
+                  </a:txBody>
+                  <a:tcPr anchor="ctr"/>
+                </a:tc>
+                <a:tc>
+                  <a:txBody>
+                    <a:bodyPr/>
+                    <a:lstStyle/>
+                    <a:p>
+                      <a:pPr>
+                        <a:buNone/>
+                      </a:pPr>
+                      <a:r>
+                        <a:rPr lang="en-US" dirty="0"/>
+                        <a:t>3/6</a:t>
+                      </a:r>
+                    </a:p>
+                  </a:txBody>
+                  <a:tcPr anchor="ctr"/>
+                </a:tc>
+                <a:extLst>
+                  <a:ext uri="{0D108BD9-81ED-4DB2-BD59-A6C34878D82A}">
+                    <a16:rowId xmlns:a16="http://schemas.microsoft.com/office/drawing/2014/main" val="552889225"/>
+                  </a:ext>
+                </a:extLst>
+              </a:tr>
+              <a:tr h="0">
+                <a:tc>
+                  <a:txBody>
+                    <a:bodyPr/>
+                    <a:lstStyle/>
+                    <a:p>
+                      <a:pPr>
+                        <a:buNone/>
+                      </a:pPr>
+                      <a:r>
+                        <a:rPr lang="en-US"/>
+                        <a:t>Day 14:00–14:15</a:t>
+                      </a:r>
+                    </a:p>
+                  </a:txBody>
+                  <a:tcPr anchor="ctr"/>
+                </a:tc>
+                <a:tc>
+                  <a:txBody>
+                    <a:bodyPr/>
+                    <a:lstStyle/>
+                    <a:p>
+                      <a:pPr>
+                        <a:buNone/>
+                      </a:pPr>
+                      <a:r>
+                        <a:rPr lang="en-US"/>
+                        <a:t>5/5</a:t>
+                      </a:r>
+                    </a:p>
+                  </a:txBody>
+                  <a:tcPr anchor="ctr"/>
+                </a:tc>
+                <a:tc>
+                  <a:txBody>
+                    <a:bodyPr/>
+                    <a:lstStyle/>
+                    <a:p>
+                      <a:pPr>
+                        <a:buNone/>
+                      </a:pPr>
+                      <a:r>
+                        <a:rPr lang="en-US" dirty="0"/>
+                        <a:t>3/5</a:t>
+                      </a:r>
+                    </a:p>
+                  </a:txBody>
+                  <a:tcPr anchor="ctr"/>
+                </a:tc>
+                <a:extLst>
+                  <a:ext uri="{0D108BD9-81ED-4DB2-BD59-A6C34878D82A}">
+                    <a16:rowId xmlns:a16="http://schemas.microsoft.com/office/drawing/2014/main" val="745319457"/>
+                  </a:ext>
+                </a:extLst>
+              </a:tr>
+              <a:tr h="0">
+                <a:tc>
+                  <a:txBody>
+                    <a:bodyPr/>
+                    <a:lstStyle/>
+                    <a:p>
+                      <a:pPr>
+                        <a:buNone/>
+                      </a:pPr>
+                      <a:r>
+                        <a:rPr lang="en-US"/>
+                        <a:t>Night 22:00–22:15</a:t>
+                      </a:r>
+                    </a:p>
+                  </a:txBody>
+                  <a:tcPr anchor="ctr"/>
+                </a:tc>
+                <a:tc>
+                  <a:txBody>
+                    <a:bodyPr/>
+                    <a:lstStyle/>
+                    <a:p>
+                      <a:pPr>
+                        <a:buNone/>
+                      </a:pPr>
+                      <a:r>
+                        <a:rPr lang="en-US" dirty="0"/>
+                        <a:t>4/5</a:t>
+                      </a:r>
+                    </a:p>
+                  </a:txBody>
+                  <a:tcPr anchor="ctr"/>
+                </a:tc>
+                <a:tc>
+                  <a:txBody>
+                    <a:bodyPr/>
+                    <a:lstStyle/>
+                    <a:p>
+                      <a:pPr>
+                        <a:buNone/>
+                      </a:pPr>
+                      <a:r>
+                        <a:rPr lang="en-US" dirty="0"/>
+                        <a:t>5/5</a:t>
+                      </a:r>
+                    </a:p>
+                  </a:txBody>
+                  <a:tcPr anchor="ctr"/>
+                </a:tc>
+                <a:extLst>
+                  <a:ext uri="{0D108BD9-81ED-4DB2-BD59-A6C34878D82A}">
+                    <a16:rowId xmlns:a16="http://schemas.microsoft.com/office/drawing/2014/main" val="1873990786"/>
+                  </a:ext>
+                </a:extLst>
+              </a:tr>
+              <a:tr h="0">
+                <a:tc>
+                  <a:txBody>
+                    <a:bodyPr/>
+                    <a:lstStyle/>
+                    <a:p>
+                      <a:pPr>
+                        <a:buNone/>
+                      </a:pPr>
+                      <a:r>
+                        <a:rPr lang="en-US"/>
+                        <a:t>Day 12:45–13:00</a:t>
+                      </a:r>
+                    </a:p>
+                  </a:txBody>
+                  <a:tcPr anchor="ctr"/>
+                </a:tc>
+                <a:tc>
+                  <a:txBody>
+                    <a:bodyPr/>
+                    <a:lstStyle/>
+                    <a:p>
+                      <a:pPr>
+                        <a:buNone/>
+                      </a:pPr>
+                      <a:r>
+                        <a:rPr lang="en-US" dirty="0"/>
+                        <a:t>4/5</a:t>
+                      </a:r>
+                    </a:p>
+                  </a:txBody>
+                  <a:tcPr anchor="ctr"/>
+                </a:tc>
+                <a:tc>
+                  <a:txBody>
+                    <a:bodyPr/>
+                    <a:lstStyle/>
+                    <a:p>
+                      <a:pPr>
+                        <a:buNone/>
+                      </a:pPr>
+                      <a:r>
+                        <a:rPr lang="en-US" dirty="0"/>
+                        <a:t>3/5</a:t>
+                      </a:r>
+                    </a:p>
+                  </a:txBody>
+                  <a:tcPr anchor="ctr"/>
+                </a:tc>
+                <a:extLst>
+                  <a:ext uri="{0D108BD9-81ED-4DB2-BD59-A6C34878D82A}">
+                    <a16:rowId xmlns:a16="http://schemas.microsoft.com/office/drawing/2014/main" val="545473867"/>
+                  </a:ext>
+                </a:extLst>
+              </a:tr>
+              <a:tr h="0">
+                <a:tc>
+                  <a:txBody>
+                    <a:bodyPr/>
+                    <a:lstStyle/>
+                    <a:p>
+                      <a:pPr>
+                        <a:buNone/>
+                      </a:pPr>
+                      <a:r>
+                        <a:rPr lang="en-US" dirty="0"/>
+                        <a:t>Total</a:t>
+                      </a:r>
+                    </a:p>
+                  </a:txBody>
+                  <a:tcPr anchor="ctr"/>
+                </a:tc>
+                <a:tc>
+                  <a:txBody>
+                    <a:bodyPr/>
+                    <a:lstStyle/>
+                    <a:p>
+                      <a:pPr>
+                        <a:buNone/>
+                      </a:pPr>
+                      <a:r>
+                        <a:rPr lang="en-US" dirty="0"/>
+                        <a:t>16/21 — 76.2%</a:t>
+                      </a:r>
+                    </a:p>
+                  </a:txBody>
+                  <a:tcPr anchor="ctr"/>
+                </a:tc>
+                <a:tc>
+                  <a:txBody>
+                    <a:bodyPr/>
+                    <a:lstStyle/>
+                    <a:p>
+                      <a:pPr>
+                        <a:buNone/>
+                      </a:pPr>
+                      <a:r>
+                        <a:rPr lang="en-US" dirty="0"/>
+                        <a:t>14/21 — 66.7%</a:t>
+                      </a:r>
+                    </a:p>
+                  </a:txBody>
+                  <a:tcPr anchor="ctr"/>
+                </a:tc>
+                <a:extLst>
+                  <a:ext uri="{0D108BD9-81ED-4DB2-BD59-A6C34878D82A}">
+                    <a16:rowId xmlns:a16="http://schemas.microsoft.com/office/drawing/2014/main" val="792157446"/>
+                  </a:ext>
+                </a:extLst>
+              </a:tr>
+            </a:tbl>
+          </a:graphicData>
+        </a:graphic>
+      </p:graphicFrame>
+      <p:sp>
+        <p:nvSpPr>
+          <p:cNvPr id="6" name="TextBox 5">
+            <a:extLst>
+              <a:ext uri="{FF2B5EF4-FFF2-40B4-BE49-F238E27FC236}">
+                <a16:creationId xmlns:a16="http://schemas.microsoft.com/office/drawing/2014/main" id="{4CCDBB32-3F41-FBB4-8BD9-A5862F486EE8}"/>
+              </a:ext>
+            </a:extLst>
+          </p:cNvPr>
+          <p:cNvSpPr txBox="1"/>
+          <p:nvPr/>
+        </p:nvSpPr>
+        <p:spPr>
+          <a:xfrm>
+            <a:off x="551688" y="5703838"/>
+            <a:ext cx="10682369" cy="954107"/>
+          </a:xfrm>
+          <a:prstGeom prst="rect">
+            <a:avLst/>
+          </a:prstGeom>
+          <a:noFill/>
+        </p:spPr>
+        <p:txBody>
+          <a:bodyPr wrap="square">
+            <a:spAutoFit/>
+          </a:bodyPr>
+          <a:lstStyle/>
+          <a:p>
+            <a:pPr>
+              <a:buNone/>
+            </a:pPr>
+            <a:r>
+              <a:rPr lang="en-US" sz="1400" b="1" dirty="0"/>
+              <a:t>The detector did better overall on this sample</a:t>
+            </a:r>
+            <a:r>
+              <a:rPr lang="en-US" sz="1400" dirty="0"/>
+              <a:t>, but:</a:t>
+            </a:r>
+          </a:p>
+          <a:p>
+            <a:pPr marL="342900" lvl="0" indent="-342900">
+              <a:buFont typeface="Arial" panose="020B0604020202020204" pitchFamily="34" charset="0"/>
               <a:buChar char="•"/>
             </a:pPr>
             <a:r>
-              <a:rPr sz="1400">
-                <a:solidFill>
-                  <a:schemeClr val="tx1"/>
-                </a:solidFill>
-                <a:latin typeface="Arial"/>
-                <a:ea typeface="Arial"/>
-                <a:cs typeface="Arial"/>
-              </a:rPr>
-              <a:t>Next: label every person in selected raw frames, then compare correct boxes, false boxes and misses at the same IoU rule.</a:t>
+              <a:rPr lang="en-US" sz="1400" b="1" dirty="0"/>
+              <a:t>Cyclists:</a:t>
+            </a:r>
+            <a:r>
+              <a:rPr lang="en-US" sz="1400" dirty="0"/>
+              <a:t> X-CLIP did better, </a:t>
+            </a:r>
+            <a:r>
+              <a:rPr lang="en-US" sz="1400" b="1" dirty="0"/>
+              <a:t>6/8 versus 5/8</a:t>
+            </a:r>
+            <a:r>
+              <a:rPr lang="en-US" sz="1400" dirty="0"/>
+              <a:t>. This group includes the motorcycle, following your existing evaluation.</a:t>
+            </a:r>
+          </a:p>
+          <a:p>
+            <a:pPr marL="342900" lvl="0" indent="-342900">
+              <a:buFont typeface="Arial" panose="020B0604020202020204" pitchFamily="34" charset="0"/>
+              <a:buChar char="•"/>
+            </a:pPr>
+            <a:r>
+              <a:rPr lang="en-US" sz="1400" b="1" dirty="0"/>
+              <a:t>Pedestrians:</a:t>
+            </a:r>
+            <a:r>
+              <a:rPr lang="en-US" sz="1400" dirty="0"/>
+              <a:t> detector did better, </a:t>
+            </a:r>
+            <a:r>
+              <a:rPr lang="en-US" sz="1400" b="1" dirty="0"/>
+              <a:t>11/13 versus 8/13</a:t>
+            </a:r>
+            <a:r>
+              <a:rPr lang="en-US" sz="1400" dirty="0"/>
+              <a:t>.</a:t>
+            </a:r>
+          </a:p>
+          <a:p>
+            <a:pPr marL="342900" lvl="0" indent="-342900">
+              <a:buFont typeface="Arial" panose="020B0604020202020204" pitchFamily="34" charset="0"/>
+              <a:buChar char="•"/>
+            </a:pPr>
+            <a:r>
+              <a:rPr lang="en-US" sz="1400" dirty="0"/>
+              <a:t>Detector alone was right in </a:t>
+            </a:r>
+            <a:r>
+              <a:rPr lang="en-US" sz="1400" b="1" dirty="0"/>
+              <a:t>five disagreements</a:t>
+            </a:r>
+            <a:r>
+              <a:rPr lang="en-US" sz="1400" dirty="0"/>
+              <a:t>; X-CLIP alone was right in </a:t>
+            </a:r>
+            <a:r>
+              <a:rPr lang="en-US" sz="1400" b="1" dirty="0"/>
+              <a:t>three</a:t>
+            </a:r>
+            <a:r>
+              <a:rPr lang="en-US" sz="1400" dirty="0"/>
+              <a:t>.</a:t>
             </a:r>
           </a:p>
         </p:txBody>
       </p:sp>
+      <p:pic>
+        <p:nvPicPr>
+          <p:cNvPr id="8" name="Picture 7">
+            <a:extLst>
+              <a:ext uri="{FF2B5EF4-FFF2-40B4-BE49-F238E27FC236}">
+                <a16:creationId xmlns:a16="http://schemas.microsoft.com/office/drawing/2014/main" id="{8C971D2D-1086-4CFE-1E50-97A04FFDC379}"/>
+              </a:ext>
+            </a:extLst>
+          </p:cNvPr>
+          <p:cNvPicPr>
+            <a:picLocks noChangeAspect="1"/>
+          </p:cNvPicPr>
+          <p:nvPr/>
+        </p:nvPicPr>
+        <p:blipFill>
+          <a:blip r:embed="rId3">
+            <a:extLst>
+              <a:ext uri="{28A0092B-C50C-407E-A947-70E740481C1C}">
+                <a14:useLocalDpi xmlns:a14="http://schemas.microsoft.com/office/drawing/2010/main" val="0"/>
+              </a:ext>
+            </a:extLst>
+          </a:blip>
+          <a:stretch>
+            <a:fillRect/>
+          </a:stretch>
+        </p:blipFill>
+        <p:spPr>
+          <a:xfrm>
+            <a:off x="12598400" y="1143000"/>
+            <a:ext cx="3346450" cy="1401798"/>
+          </a:xfrm>
+          <a:prstGeom prst="rect">
+            <a:avLst/>
+          </a:prstGeom>
+        </p:spPr>
+      </p:pic>
     </p:spTree>
     <p:extLst>
       <p:ext uri="{BB962C8B-B14F-4D97-AF65-F5344CB8AC3E}">
@@ -8081,11 +8454,14 @@
       </p:ext>
     </p:extLst>
   </p:cSld>
+  <p:clrMapOvr>
+    <a:masterClrMapping/>
+  </p:clrMapOvr>
 </p:sld>
 </file>
 
-<file path=ppt/slides/slide8.xml><?xml version="1.0" encoding="utf-8"?>
-<p:sld xmlns:p="http://schemas.openxmlformats.org/presentationml/2006/main">
+<file path=ppt/slides/slide7.xml><?xml version="1.0" encoding="utf-8"?>
+<p:sld xmlns:a="http://schemas.openxmlformats.org/drawingml/2006/main" xmlns:r="http://schemas.openxmlformats.org/officeDocument/2006/relationships" xmlns:p="http://schemas.openxmlformats.org/presentationml/2006/main">
   <p:cSld>
     <p:spTree>
       <p:nvGrpSpPr>
@@ -8094,36 +8470,41 @@
         <p:nvPr/>
       </p:nvGrpSpPr>
       <p:grpSpPr>
-        <a:xfrm xmlns:a="http://schemas.openxmlformats.org/drawingml/2006/main"/>
+        <a:xfrm>
+          <a:off x="0" y="0"/>
+          <a:ext cx="0" cy="0"/>
+          <a:chOff x="0" y="0"/>
+          <a:chExt cx="0" cy="0"/>
+        </a:xfrm>
       </p:grpSpPr>
       <p:sp>
         <p:nvSpPr>
           <p:cNvPr id="2" name="Section label">
-            <a:extLst xmlns:a="http://schemas.openxmlformats.org/drawingml/2006/main">
+            <a:extLst>
               <a:ext uri="{FF2B5EF4-FFF2-40B4-BE49-F238E27FC236}">
                 <a16:creationId xmlns:a16="http://schemas.microsoft.com/office/drawing/2014/main" id="{EE7CB970-59CD-4FF4-962C-A30711EE8854}"/>
               </a:ext>
             </a:extLst>
           </p:cNvPr>
           <p:cNvSpPr>
-            <a:spLocks xmlns:a="http://schemas.openxmlformats.org/drawingml/2006/main" noGrp="1"/>
+            <a:spLocks noGrp="1"/>
           </p:cNvSpPr>
           <p:nvPr/>
         </p:nvSpPr>
         <p:spPr>
-          <a:xfrm xmlns:a="http://schemas.openxmlformats.org/drawingml/2006/main">
+          <a:xfrm>
             <a:off x="612648" y="731520"/>
             <a:ext cx="6035040" cy="365760"/>
           </a:xfrm>
-          <a:prstGeom xmlns:a="http://schemas.openxmlformats.org/drawingml/2006/main" prst="rect">
+          <a:prstGeom prst="rect">
             <a:avLst/>
           </a:prstGeom>
-          <a:noFill xmlns:a="http://schemas.openxmlformats.org/drawingml/2006/main"/>
+          <a:noFill/>
         </p:spPr>
         <p:txBody>
-          <a:bodyPr xmlns:a="http://schemas.openxmlformats.org/drawingml/2006/main" wrap="square" lIns="50800" tIns="50800" rIns="50800" bIns="50800" anchor="ctr"/>
-          <a:lstStyle xmlns:a="http://schemas.openxmlformats.org/drawingml/2006/main"/>
-          <a:p xmlns:a="http://schemas.openxmlformats.org/drawingml/2006/main">
+          <a:bodyPr wrap="square" lIns="50800" tIns="50800" rIns="50800" bIns="50800" anchor="ctr"/>
+          <a:lstStyle/>
+          <a:p>
             <a:pPr marL="0" indent="0">
               <a:buNone/>
             </a:pPr>
@@ -8144,914 +8525,99 @@
           </a:p>
         </p:txBody>
       </p:sp>
-      <p:graphicFrame>
-        <p:nvGraphicFramePr>
-          <p:cNvPr id="5" name="Table 0"/>
-          <p:cNvGraphicFramePr/>
+      <p:sp>
+        <p:nvSpPr>
+          <p:cNvPr id="4" name="TextBox 3">
+            <a:extLst>
+              <a:ext uri="{FF2B5EF4-FFF2-40B4-BE49-F238E27FC236}">
+                <a16:creationId xmlns:a16="http://schemas.microsoft.com/office/drawing/2014/main" id="{AE689B36-506C-1315-D39A-22AB8FBE82F0}"/>
+              </a:ext>
+            </a:extLst>
+          </p:cNvPr>
+          <p:cNvSpPr txBox="1"/>
           <p:nvPr/>
-        </p:nvGraphicFramePr>
-        <p:xfrm>
-          <a:off xmlns:a="http://schemas.openxmlformats.org/drawingml/2006/main" x="612648" y="1188720"/>
-          <a:ext xmlns:a="http://schemas.openxmlformats.org/drawingml/2006/main" cx="11064240" cy="3822192"/>
-        </p:xfrm>
-        <a:graphic xmlns:a="http://schemas.openxmlformats.org/drawingml/2006/main">
-          <a:graphicData uri="http://schemas.openxmlformats.org/drawingml/2006/table">
-            <a:tbl>
-              <a:tblPr/>
-              <a:tblGrid>
-                <a:gridCol w="3108960"/>
-                <a:gridCol w="4754880"/>
-                <a:gridCol w="3200400"/>
-              </a:tblGrid>
-              <a:tr h="347472">
-                <a:tc>
-                  <a:txBody>
-                    <a:bodyPr/>
-                    <a:lstStyle/>
-                    <a:p>
-                      <a:pPr marL="0" indent="0">
-                        <a:buNone/>
-                      </a:pPr>
-                      <a:r>
-                        <a:rPr sz="1200" b="1">
-                          <a:solidFill>
-                            <a:schemeClr val="tx1"/>
-                          </a:solidFill>
-                          <a:latin typeface="Arial"/>
-                          <a:ea typeface="Arial"/>
-                          <a:cs typeface="Arial"/>
-                        </a:rPr>
-                        <a:t>Work</a:t>
-                      </a:r>
-                    </a:p>
-                  </a:txBody>
-                  <a:tcPr marL="73152" marR="73152" marT="36576" marB="36576" anchor="ctr">
-                    <a:lnL w="9525" cmpd="sng">
-                      <a:solidFill>
-                        <a:srgbClr val="BFBFBF"/>
-                      </a:solidFill>
-                      <a:prstDash val="solid"/>
-                    </a:lnL>
-                    <a:lnR w="9525" cmpd="sng">
-                      <a:solidFill>
-                        <a:srgbClr val="BFBFBF"/>
-                      </a:solidFill>
-                      <a:prstDash val="solid"/>
-                    </a:lnR>
-                    <a:lnT w="9525" cmpd="sng">
-                      <a:solidFill>
-                        <a:srgbClr val="BFBFBF"/>
-                      </a:solidFill>
-                      <a:prstDash val="solid"/>
-                    </a:lnT>
-                    <a:lnB w="9525" cmpd="sng">
-                      <a:solidFill>
-                        <a:srgbClr val="BFBFBF"/>
-                      </a:solidFill>
-                      <a:prstDash val="solid"/>
-                    </a:lnB>
-                    <a:solidFill>
-                      <a:schemeClr val="bg2"/>
-                    </a:solidFill>
-                  </a:tcPr>
-                </a:tc>
-                <a:tc>
-                  <a:txBody>
-                    <a:bodyPr/>
-                    <a:lstStyle/>
-                    <a:p>
-                      <a:pPr marL="0" indent="0">
-                        <a:buNone/>
-                      </a:pPr>
-                      <a:r>
-                        <a:rPr sz="1200" b="1">
-                          <a:solidFill>
-                            <a:schemeClr val="tx1"/>
-                          </a:solidFill>
-                          <a:latin typeface="Arial"/>
-                          <a:ea typeface="Arial"/>
-                          <a:cs typeface="Arial"/>
-                        </a:rPr>
-                        <a:t>Status</a:t>
-                      </a:r>
-                    </a:p>
-                  </a:txBody>
-                  <a:tcPr marL="73152" marR="73152" marT="36576" marB="36576" anchor="ctr">
-                    <a:lnL w="9525" cmpd="sng">
-                      <a:solidFill>
-                        <a:srgbClr val="BFBFBF"/>
-                      </a:solidFill>
-                      <a:prstDash val="solid"/>
-                    </a:lnL>
-                    <a:lnR w="9525" cmpd="sng">
-                      <a:solidFill>
-                        <a:srgbClr val="BFBFBF"/>
-                      </a:solidFill>
-                      <a:prstDash val="solid"/>
-                    </a:lnR>
-                    <a:lnT w="9525" cmpd="sng">
-                      <a:solidFill>
-                        <a:srgbClr val="BFBFBF"/>
-                      </a:solidFill>
-                      <a:prstDash val="solid"/>
-                    </a:lnT>
-                    <a:lnB w="9525" cmpd="sng">
-                      <a:solidFill>
-                        <a:srgbClr val="BFBFBF"/>
-                      </a:solidFill>
-                      <a:prstDash val="solid"/>
-                    </a:lnB>
-                    <a:solidFill>
-                      <a:schemeClr val="bg2"/>
-                    </a:solidFill>
-                  </a:tcPr>
-                </a:tc>
-                <a:tc>
-                  <a:txBody>
-                    <a:bodyPr/>
-                    <a:lstStyle/>
-                    <a:p>
-                      <a:pPr marL="0" indent="0">
-                        <a:buNone/>
-                      </a:pPr>
-                      <a:r>
-                        <a:rPr sz="1200" b="1">
-                          <a:solidFill>
-                            <a:schemeClr val="tx1"/>
-                          </a:solidFill>
-                          <a:latin typeface="Arial"/>
-                          <a:ea typeface="Arial"/>
-                          <a:cs typeface="Arial"/>
-                        </a:rPr>
-                        <a:t>Evidence or final step</a:t>
-                      </a:r>
-                    </a:p>
-                  </a:txBody>
-                  <a:tcPr marL="73152" marR="73152" marT="36576" marB="36576" anchor="ctr">
-                    <a:lnL w="9525" cmpd="sng">
-                      <a:solidFill>
-                        <a:srgbClr val="BFBFBF"/>
-                      </a:solidFill>
-                      <a:prstDash val="solid"/>
-                    </a:lnL>
-                    <a:lnR w="9525" cmpd="sng">
-                      <a:solidFill>
-                        <a:srgbClr val="BFBFBF"/>
-                      </a:solidFill>
-                      <a:prstDash val="solid"/>
-                    </a:lnR>
-                    <a:lnT w="9525" cmpd="sng">
-                      <a:solidFill>
-                        <a:srgbClr val="BFBFBF"/>
-                      </a:solidFill>
-                      <a:prstDash val="solid"/>
-                    </a:lnT>
-                    <a:lnB w="9525" cmpd="sng">
-                      <a:solidFill>
-                        <a:srgbClr val="BFBFBF"/>
-                      </a:solidFill>
-                      <a:prstDash val="solid"/>
-                    </a:lnB>
-                    <a:solidFill>
-                      <a:schemeClr val="bg2"/>
-                    </a:solidFill>
-                  </a:tcPr>
-                </a:tc>
-              </a:tr>
-              <a:tr h="914400">
-                <a:tc>
-                  <a:txBody>
-                    <a:bodyPr/>
-                    <a:lstStyle/>
-                    <a:p>
-                      <a:pPr marL="0" indent="0">
-                        <a:buNone/>
-                      </a:pPr>
-                      <a:r>
-                        <a:rPr sz="1200" b="1">
-                          <a:solidFill>
-                            <a:schemeClr val="tx1"/>
-                          </a:solidFill>
-                          <a:latin typeface="Arial"/>
-                          <a:ea typeface="Arial"/>
-                          <a:cs typeface="Arial"/>
-                        </a:rPr>
-                        <a:t>Fusion, speed and error cases</a:t>
-                      </a:r>
-                    </a:p>
-                  </a:txBody>
-                  <a:tcPr marL="73152" marR="73152" marT="36576" marB="36576" anchor="ctr">
-                    <a:lnL w="9525" cmpd="sng">
-                      <a:solidFill>
-                        <a:srgbClr val="BFBFBF"/>
-                      </a:solidFill>
-                      <a:prstDash val="solid"/>
-                    </a:lnL>
-                    <a:lnR w="9525" cmpd="sng">
-                      <a:solidFill>
-                        <a:srgbClr val="BFBFBF"/>
-                      </a:solidFill>
-                      <a:prstDash val="solid"/>
-                    </a:lnR>
-                    <a:lnT w="9525" cmpd="sng">
-                      <a:solidFill>
-                        <a:srgbClr val="BFBFBF"/>
-                      </a:solidFill>
-                      <a:prstDash val="solid"/>
-                    </a:lnT>
-                    <a:lnB w="9525" cmpd="sng">
-                      <a:solidFill>
-                        <a:srgbClr val="BFBFBF"/>
-                      </a:solidFill>
-                      <a:prstDash val="solid"/>
-                    </a:lnB>
-                  </a:tcPr>
-                </a:tc>
-                <a:tc>
-                  <a:txBody>
-                    <a:bodyPr/>
-                    <a:lstStyle/>
-                    <a:p>
-                      <a:pPr marL="0" indent="0">
-                        <a:buNone/>
-                      </a:pPr>
-                      <a:r>
-                        <a:rPr sz="1200">
-                          <a:solidFill>
-                            <a:schemeClr val="tx1"/>
-                          </a:solidFill>
-                          <a:latin typeface="Arial"/>
-                          <a:ea typeface="Arial"/>
-                          <a:cs typeface="Arial"/>
-                        </a:rPr>
-                        <a:t>Done on existing sample</a:t>
-                      </a:r>
-                    </a:p>
-                  </a:txBody>
-                  <a:tcPr marL="73152" marR="73152" marT="36576" marB="36576" anchor="ctr">
-                    <a:lnL w="9525" cmpd="sng">
-                      <a:solidFill>
-                        <a:srgbClr val="BFBFBF"/>
-                      </a:solidFill>
-                      <a:prstDash val="solid"/>
-                    </a:lnL>
-                    <a:lnR w="9525" cmpd="sng">
-                      <a:solidFill>
-                        <a:srgbClr val="BFBFBF"/>
-                      </a:solidFill>
-                      <a:prstDash val="solid"/>
-                    </a:lnR>
-                    <a:lnT w="9525" cmpd="sng">
-                      <a:solidFill>
-                        <a:srgbClr val="BFBFBF"/>
-                      </a:solidFill>
-                      <a:prstDash val="solid"/>
-                    </a:lnT>
-                    <a:lnB w="9525" cmpd="sng">
-                      <a:solidFill>
-                        <a:srgbClr val="BFBFBF"/>
-                      </a:solidFill>
-                      <a:prstDash val="solid"/>
-                    </a:lnB>
-                  </a:tcPr>
-                </a:tc>
-                <a:tc>
-                  <a:txBody>
-                    <a:bodyPr/>
-                    <a:lstStyle/>
-                    <a:p>
-                      <a:pPr marL="0" indent="0">
-                        <a:buNone/>
-                      </a:pPr>
-                      <a:r>
-                        <a:rPr sz="1200">
-                          <a:solidFill>
-                            <a:schemeClr val="tx1"/>
-                          </a:solidFill>
-                          <a:latin typeface="Arial"/>
-                          <a:ea typeface="Arial"/>
-                          <a:cs typeface="Arial"/>
-                        </a:rPr>
-                        <a:t>Rules and switch-off tests documented; away-walker explanation remains partial</a:t>
-                      </a:r>
-                    </a:p>
-                  </a:txBody>
-                  <a:tcPr marL="73152" marR="73152" marT="36576" marB="36576" anchor="ctr">
-                    <a:lnL w="9525" cmpd="sng">
-                      <a:solidFill>
-                        <a:srgbClr val="BFBFBF"/>
-                      </a:solidFill>
-                      <a:prstDash val="solid"/>
-                    </a:lnL>
-                    <a:lnR w="9525" cmpd="sng">
-                      <a:solidFill>
-                        <a:srgbClr val="BFBFBF"/>
-                      </a:solidFill>
-                      <a:prstDash val="solid"/>
-                    </a:lnR>
-                    <a:lnT w="9525" cmpd="sng">
-                      <a:solidFill>
-                        <a:srgbClr val="BFBFBF"/>
-                      </a:solidFill>
-                      <a:prstDash val="solid"/>
-                    </a:lnT>
-                    <a:lnB w="9525" cmpd="sng">
-                      <a:solidFill>
-                        <a:srgbClr val="BFBFBF"/>
-                      </a:solidFill>
-                      <a:prstDash val="solid"/>
-                    </a:lnB>
-                  </a:tcPr>
-                </a:tc>
-              </a:tr>
-              <a:tr h="640080">
-                <a:tc>
-                  <a:txBody>
-                    <a:bodyPr/>
-                    <a:lstStyle/>
-                    <a:p>
-                      <a:pPr marL="0" indent="0">
-                        <a:buNone/>
-                      </a:pPr>
-                      <a:r>
-                        <a:rPr sz="1200" b="1">
-                          <a:solidFill>
-                            <a:schemeClr val="tx1"/>
-                          </a:solidFill>
-                          <a:latin typeface="Arial"/>
-                          <a:ea typeface="Arial"/>
-                          <a:cs typeface="Arial"/>
-                        </a:rPr>
-                        <a:t>TTA, sensitive settings, brightening</a:t>
-                      </a:r>
-                    </a:p>
-                  </a:txBody>
-                  <a:tcPr marL="73152" marR="73152" marT="36576" marB="36576" anchor="ctr">
-                    <a:lnL w="9525" cmpd="sng">
-                      <a:solidFill>
-                        <a:srgbClr val="BFBFBF"/>
-                      </a:solidFill>
-                      <a:prstDash val="solid"/>
-                    </a:lnL>
-                    <a:lnR w="9525" cmpd="sng">
-                      <a:solidFill>
-                        <a:srgbClr val="BFBFBF"/>
-                      </a:solidFill>
-                      <a:prstDash val="solid"/>
-                    </a:lnR>
-                    <a:lnT w="9525" cmpd="sng">
-                      <a:solidFill>
-                        <a:srgbClr val="BFBFBF"/>
-                      </a:solidFill>
-                      <a:prstDash val="solid"/>
-                    </a:lnT>
-                    <a:lnB w="9525" cmpd="sng">
-                      <a:solidFill>
-                        <a:srgbClr val="BFBFBF"/>
-                      </a:solidFill>
-                      <a:prstDash val="solid"/>
-                    </a:lnB>
-                  </a:tcPr>
-                </a:tc>
-                <a:tc>
-                  <a:txBody>
-                    <a:bodyPr/>
-                    <a:lstStyle/>
-                    <a:p>
-                      <a:pPr marL="0" indent="0">
-                        <a:buNone/>
-                      </a:pPr>
-                      <a:r>
-                        <a:rPr sz="1200">
-                          <a:solidFill>
-                            <a:schemeClr val="tx1"/>
-                          </a:solidFill>
-                          <a:latin typeface="Arial"/>
-                          <a:ea typeface="Arial"/>
-                          <a:cs typeface="Arial"/>
-                        </a:rPr>
-                        <a:t>Completed; do not promote</a:t>
-                      </a:r>
-                    </a:p>
-                  </a:txBody>
-                  <a:tcPr marL="73152" marR="73152" marT="36576" marB="36576" anchor="ctr">
-                    <a:lnL w="9525" cmpd="sng">
-                      <a:solidFill>
-                        <a:srgbClr val="BFBFBF"/>
-                      </a:solidFill>
-                      <a:prstDash val="solid"/>
-                    </a:lnL>
-                    <a:lnR w="9525" cmpd="sng">
-                      <a:solidFill>
-                        <a:srgbClr val="BFBFBF"/>
-                      </a:solidFill>
-                      <a:prstDash val="solid"/>
-                    </a:lnR>
-                    <a:lnT w="9525" cmpd="sng">
-                      <a:solidFill>
-                        <a:srgbClr val="BFBFBF"/>
-                      </a:solidFill>
-                      <a:prstDash val="solid"/>
-                    </a:lnT>
-                    <a:lnB w="9525" cmpd="sng">
-                      <a:solidFill>
-                        <a:srgbClr val="BFBFBF"/>
-                      </a:solidFill>
-                      <a:prstDash val="solid"/>
-                    </a:lnB>
-                  </a:tcPr>
-                </a:tc>
-                <a:tc>
-                  <a:txBody>
-                    <a:bodyPr/>
-                    <a:lstStyle/>
-                    <a:p>
-                      <a:pPr marL="0" indent="0">
-                        <a:buNone/>
-                      </a:pPr>
-                      <a:r>
-                        <a:rPr sz="1200">
-                          <a:solidFill>
-                            <a:schemeClr val="tx1"/>
-                          </a:solidFill>
-                          <a:latin typeface="Arial"/>
-                          <a:ea typeface="Arial"/>
-                          <a:cs typeface="Arial"/>
-                        </a:rPr>
-                        <a:t>No gain for TTA; sensitivity adds extras; Zero-DCE worse. Review-pack workload savings unproven</a:t>
-                      </a:r>
-                    </a:p>
-                  </a:txBody>
-                  <a:tcPr marL="73152" marR="73152" marT="36576" marB="36576" anchor="ctr">
-                    <a:lnL w="9525" cmpd="sng">
-                      <a:solidFill>
-                        <a:srgbClr val="BFBFBF"/>
-                      </a:solidFill>
-                      <a:prstDash val="solid"/>
-                    </a:lnL>
-                    <a:lnR w="9525" cmpd="sng">
-                      <a:solidFill>
-                        <a:srgbClr val="BFBFBF"/>
-                      </a:solidFill>
-                      <a:prstDash val="solid"/>
-                    </a:lnR>
-                    <a:lnT w="9525" cmpd="sng">
-                      <a:solidFill>
-                        <a:srgbClr val="BFBFBF"/>
-                      </a:solidFill>
-                      <a:prstDash val="solid"/>
-                    </a:lnT>
-                    <a:lnB w="9525" cmpd="sng">
-                      <a:solidFill>
-                        <a:srgbClr val="BFBFBF"/>
-                      </a:solidFill>
-                      <a:prstDash val="solid"/>
-                    </a:lnB>
-                  </a:tcPr>
-                </a:tc>
-              </a:tr>
-              <a:tr h="777240">
-                <a:tc>
-                  <a:txBody>
-                    <a:bodyPr/>
-                    <a:lstStyle/>
-                    <a:p>
-                      <a:pPr marL="0" indent="0">
-                        <a:buNone/>
-                      </a:pPr>
-                      <a:r>
-                        <a:rPr sz="1200" b="1">
-                          <a:solidFill>
-                            <a:schemeClr val="tx1"/>
-                          </a:solidFill>
-                          <a:latin typeface="Arial"/>
-                          <a:ea typeface="Arial"/>
-                          <a:cs typeface="Arial"/>
-                        </a:rPr>
-                        <a:t>Higher resolution / other sites</a:t>
-                      </a:r>
-                    </a:p>
-                  </a:txBody>
-                  <a:tcPr marL="73152" marR="73152" marT="36576" marB="36576" anchor="ctr">
-                    <a:lnL w="9525" cmpd="sng">
-                      <a:solidFill>
-                        <a:srgbClr val="BFBFBF"/>
-                      </a:solidFill>
-                      <a:prstDash val="solid"/>
-                    </a:lnL>
-                    <a:lnR w="9525" cmpd="sng">
-                      <a:solidFill>
-                        <a:srgbClr val="BFBFBF"/>
-                      </a:solidFill>
-                      <a:prstDash val="solid"/>
-                    </a:lnR>
-                    <a:lnT w="9525" cmpd="sng">
-                      <a:solidFill>
-                        <a:srgbClr val="BFBFBF"/>
-                      </a:solidFill>
-                      <a:prstDash val="solid"/>
-                    </a:lnT>
-                    <a:lnB w="9525" cmpd="sng">
-                      <a:solidFill>
-                        <a:srgbClr val="BFBFBF"/>
-                      </a:solidFill>
-                      <a:prstDash val="solid"/>
-                    </a:lnB>
-                  </a:tcPr>
-                </a:tc>
-                <a:tc>
-                  <a:txBody>
-                    <a:bodyPr/>
-                    <a:lstStyle/>
-                    <a:p>
-                      <a:pPr marL="0" indent="0">
-                        <a:buNone/>
-                      </a:pPr>
-                      <a:r>
-                        <a:rPr sz="1200">
-                          <a:solidFill>
-                            <a:schemeClr val="tx1"/>
-                          </a:solidFill>
-                          <a:latin typeface="Arial"/>
-                          <a:ea typeface="Arial"/>
-                          <a:cs typeface="Arial"/>
-                        </a:rPr>
-                        <a:t>Partly validated</a:t>
-                      </a:r>
-                    </a:p>
-                  </a:txBody>
-                  <a:tcPr marL="73152" marR="73152" marT="36576" marB="36576" anchor="ctr">
-                    <a:lnL w="9525" cmpd="sng">
-                      <a:solidFill>
-                        <a:srgbClr val="BFBFBF"/>
-                      </a:solidFill>
-                      <a:prstDash val="solid"/>
-                    </a:lnL>
-                    <a:lnR w="9525" cmpd="sng">
-                      <a:solidFill>
-                        <a:srgbClr val="BFBFBF"/>
-                      </a:solidFill>
-                      <a:prstDash val="solid"/>
-                    </a:lnR>
-                    <a:lnT w="9525" cmpd="sng">
-                      <a:solidFill>
-                        <a:srgbClr val="BFBFBF"/>
-                      </a:solidFill>
-                      <a:prstDash val="solid"/>
-                    </a:lnT>
-                    <a:lnB w="9525" cmpd="sng">
-                      <a:solidFill>
-                        <a:srgbClr val="BFBFBF"/>
-                      </a:solidFill>
-                      <a:prstDash val="solid"/>
-                    </a:lnB>
-                  </a:tcPr>
-                </a:tc>
-                <a:tc>
-                  <a:txBody>
-                    <a:bodyPr/>
-                    <a:lstStyle/>
-                    <a:p>
-                      <a:pPr marL="0" indent="0">
-                        <a:buNone/>
-                      </a:pPr>
-                      <a:r>
-                        <a:rPr sz="1200">
-                          <a:solidFill>
-                            <a:schemeClr val="tx1"/>
-                          </a:solidFill>
-                          <a:latin typeface="Arial"/>
-                          <a:ea typeface="Arial"/>
-                          <a:cs typeface="Arial"/>
-                        </a:rPr>
-                        <a:t>Corrine inspected with failures; Anderson2021/CurryFord2022 runs prepared, results not supplied</a:t>
-                      </a:r>
-                    </a:p>
-                  </a:txBody>
-                  <a:tcPr marL="73152" marR="73152" marT="36576" marB="36576" anchor="ctr">
-                    <a:lnL w="9525" cmpd="sng">
-                      <a:solidFill>
-                        <a:srgbClr val="BFBFBF"/>
-                      </a:solidFill>
-                      <a:prstDash val="solid"/>
-                    </a:lnL>
-                    <a:lnR w="9525" cmpd="sng">
-                      <a:solidFill>
-                        <a:srgbClr val="BFBFBF"/>
-                      </a:solidFill>
-                      <a:prstDash val="solid"/>
-                    </a:lnR>
-                    <a:lnT w="9525" cmpd="sng">
-                      <a:solidFill>
-                        <a:srgbClr val="BFBFBF"/>
-                      </a:solidFill>
-                      <a:prstDash val="solid"/>
-                    </a:lnT>
-                    <a:lnB w="9525" cmpd="sng">
-                      <a:solidFill>
-                        <a:srgbClr val="BFBFBF"/>
-                      </a:solidFill>
-                      <a:prstDash val="solid"/>
-                    </a:lnB>
-                  </a:tcPr>
-                </a:tc>
-              </a:tr>
-              <a:tr h="640080">
-                <a:tc>
-                  <a:txBody>
-                    <a:bodyPr/>
-                    <a:lstStyle/>
-                    <a:p>
-                      <a:pPr marL="0" indent="0">
-                        <a:buNone/>
-                      </a:pPr>
-                      <a:r>
-                        <a:rPr sz="1200" b="1">
-                          <a:solidFill>
-                            <a:schemeClr val="tx1"/>
-                          </a:solidFill>
-                          <a:latin typeface="Arial"/>
-                          <a:ea typeface="Arial"/>
-                          <a:cs typeface="Arial"/>
-                        </a:rPr>
-                        <a:t>Identity, lanes and detector boxes</a:t>
-                      </a:r>
-                    </a:p>
-                  </a:txBody>
-                  <a:tcPr marL="73152" marR="73152" marT="36576" marB="36576" anchor="ctr">
-                    <a:lnL w="9525" cmpd="sng">
-                      <a:solidFill>
-                        <a:srgbClr val="BFBFBF"/>
-                      </a:solidFill>
-                      <a:prstDash val="solid"/>
-                    </a:lnL>
-                    <a:lnR w="9525" cmpd="sng">
-                      <a:solidFill>
-                        <a:srgbClr val="BFBFBF"/>
-                      </a:solidFill>
-                      <a:prstDash val="solid"/>
-                    </a:lnR>
-                    <a:lnT w="9525" cmpd="sng">
-                      <a:solidFill>
-                        <a:srgbClr val="BFBFBF"/>
-                      </a:solidFill>
-                      <a:prstDash val="solid"/>
-                    </a:lnT>
-                    <a:lnB w="9525" cmpd="sng">
-                      <a:solidFill>
-                        <a:srgbClr val="BFBFBF"/>
-                      </a:solidFill>
-                      <a:prstDash val="solid"/>
-                    </a:lnB>
-                  </a:tcPr>
-                </a:tc>
-                <a:tc>
-                  <a:txBody>
-                    <a:bodyPr/>
-                    <a:lstStyle/>
-                    <a:p>
-                      <a:pPr marL="0" indent="0">
-                        <a:buNone/>
-                      </a:pPr>
-                      <a:r>
-                        <a:rPr sz="1200">
-                          <a:solidFill>
-                            <a:schemeClr val="tx1"/>
-                          </a:solidFill>
-                          <a:latin typeface="Arial"/>
-                          <a:ea typeface="Arial"/>
-                          <a:cs typeface="Arial"/>
-                        </a:rPr>
-                        <a:t>Final validation pending</a:t>
-                      </a:r>
-                    </a:p>
-                  </a:txBody>
-                  <a:tcPr marL="73152" marR="73152" marT="36576" marB="36576" anchor="ctr">
-                    <a:lnL w="9525" cmpd="sng">
-                      <a:solidFill>
-                        <a:srgbClr val="BFBFBF"/>
-                      </a:solidFill>
-                      <a:prstDash val="solid"/>
-                    </a:lnL>
-                    <a:lnR w="9525" cmpd="sng">
-                      <a:solidFill>
-                        <a:srgbClr val="BFBFBF"/>
-                      </a:solidFill>
-                      <a:prstDash val="solid"/>
-                    </a:lnR>
-                    <a:lnT w="9525" cmpd="sng">
-                      <a:solidFill>
-                        <a:srgbClr val="BFBFBF"/>
-                      </a:solidFill>
-                      <a:prstDash val="solid"/>
-                    </a:lnT>
-                    <a:lnB w="9525" cmpd="sng">
-                      <a:solidFill>
-                        <a:srgbClr val="BFBFBF"/>
-                      </a:solidFill>
-                      <a:prstDash val="solid"/>
-                    </a:lnB>
-                  </a:tcPr>
-                </a:tc>
-                <a:tc>
-                  <a:txBody>
-                    <a:bodyPr/>
-                    <a:lstStyle/>
-                    <a:p>
-                      <a:pPr marL="0" indent="0">
-                        <a:buNone/>
-                      </a:pPr>
-                      <a:r>
-                        <a:rPr sz="1200">
-                          <a:solidFill>
-                            <a:schemeClr val="tx1"/>
-                          </a:solidFill>
-                          <a:latin typeface="Arial"/>
-                          <a:ea typeface="Arial"/>
-                          <a:cs typeface="Arial"/>
-                        </a:rPr>
-                        <a:t>Confirm full track IDs and lane outlines; review existing RF/DINO raw frames. No new model sweep</a:t>
-                      </a:r>
-                    </a:p>
-                  </a:txBody>
-                  <a:tcPr marL="73152" marR="73152" marT="36576" marB="36576" anchor="ctr">
-                    <a:lnL w="9525" cmpd="sng">
-                      <a:solidFill>
-                        <a:srgbClr val="BFBFBF"/>
-                      </a:solidFill>
-                      <a:prstDash val="solid"/>
-                    </a:lnL>
-                    <a:lnR w="9525" cmpd="sng">
-                      <a:solidFill>
-                        <a:srgbClr val="BFBFBF"/>
-                      </a:solidFill>
-                      <a:prstDash val="solid"/>
-                    </a:lnR>
-                    <a:lnT w="9525" cmpd="sng">
-                      <a:solidFill>
-                        <a:srgbClr val="BFBFBF"/>
-                      </a:solidFill>
-                      <a:prstDash val="solid"/>
-                    </a:lnT>
-                    <a:lnB w="9525" cmpd="sng">
-                      <a:solidFill>
-                        <a:srgbClr val="BFBFBF"/>
-                      </a:solidFill>
-                      <a:prstDash val="solid"/>
-                    </a:lnB>
-                  </a:tcPr>
-                </a:tc>
-              </a:tr>
-              <a:tr h="502920">
-                <a:tc>
-                  <a:txBody>
-                    <a:bodyPr/>
-                    <a:lstStyle/>
-                    <a:p>
-                      <a:pPr marL="0" indent="0">
-                        <a:buNone/>
-                      </a:pPr>
-                      <a:r>
-                        <a:rPr sz="1200" b="1">
-                          <a:solidFill>
-                            <a:schemeClr val="tx1"/>
-                          </a:solidFill>
-                          <a:latin typeface="Arial"/>
-                          <a:ea typeface="Arial"/>
-                          <a:cs typeface="Arial"/>
-                        </a:rPr>
-                        <a:t>Physical cyclist speed</a:t>
-                      </a:r>
-                    </a:p>
-                  </a:txBody>
-                  <a:tcPr marL="73152" marR="73152" marT="36576" marB="36576" anchor="ctr">
-                    <a:lnL w="9525" cmpd="sng">
-                      <a:solidFill>
-                        <a:srgbClr val="BFBFBF"/>
-                      </a:solidFill>
-                      <a:prstDash val="solid"/>
-                    </a:lnL>
-                    <a:lnR w="9525" cmpd="sng">
-                      <a:solidFill>
-                        <a:srgbClr val="BFBFBF"/>
-                      </a:solidFill>
-                      <a:prstDash val="solid"/>
-                    </a:lnR>
-                    <a:lnT w="9525" cmpd="sng">
-                      <a:solidFill>
-                        <a:srgbClr val="BFBFBF"/>
-                      </a:solidFill>
-                      <a:prstDash val="solid"/>
-                    </a:lnT>
-                    <a:lnB w="9525" cmpd="sng">
-                      <a:solidFill>
-                        <a:srgbClr val="BFBFBF"/>
-                      </a:solidFill>
-                      <a:prstDash val="solid"/>
-                    </a:lnB>
-                  </a:tcPr>
-                </a:tc>
-                <a:tc>
-                  <a:txBody>
-                    <a:bodyPr/>
-                    <a:lstStyle/>
-                    <a:p>
-                      <a:pPr marL="0" indent="0">
-                        <a:buNone/>
-                      </a:pPr>
-                      <a:r>
-                        <a:rPr sz="1200">
-                          <a:solidFill>
-                            <a:schemeClr val="tx1"/>
-                          </a:solidFill>
-                          <a:latin typeface="Arial"/>
-                          <a:ea typeface="Arial"/>
-                          <a:cs typeface="Arial"/>
-                        </a:rPr>
-                        <a:t>Blocked on correspondence</a:t>
-                      </a:r>
-                    </a:p>
-                  </a:txBody>
-                  <a:tcPr marL="73152" marR="73152" marT="36576" marB="36576" anchor="ctr">
-                    <a:lnL w="9525" cmpd="sng">
-                      <a:solidFill>
-                        <a:srgbClr val="BFBFBF"/>
-                      </a:solidFill>
-                      <a:prstDash val="solid"/>
-                    </a:lnL>
-                    <a:lnR w="9525" cmpd="sng">
-                      <a:solidFill>
-                        <a:srgbClr val="BFBFBF"/>
-                      </a:solidFill>
-                      <a:prstDash val="solid"/>
-                    </a:lnR>
-                    <a:lnT w="9525" cmpd="sng">
-                      <a:solidFill>
-                        <a:srgbClr val="BFBFBF"/>
-                      </a:solidFill>
-                      <a:prstDash val="solid"/>
-                    </a:lnT>
-                    <a:lnB w="9525" cmpd="sng">
-                      <a:solidFill>
-                        <a:srgbClr val="BFBFBF"/>
-                      </a:solidFill>
-                      <a:prstDash val="solid"/>
-                    </a:lnB>
-                  </a:tcPr>
-                </a:tc>
-                <a:tc>
-                  <a:txBody>
-                    <a:bodyPr/>
-                    <a:lstStyle/>
-                    <a:p>
-                      <a:pPr marL="0" indent="0">
-                        <a:buNone/>
-                      </a:pPr>
-                      <a:r>
-                        <a:rPr sz="1200">
-                          <a:solidFill>
-                            <a:schemeClr val="tx1"/>
-                          </a:solidFill>
-                          <a:latin typeface="Arial"/>
-                          <a:ea typeface="Arial"/>
-                          <a:cs typeface="Arial"/>
-                        </a:rPr>
-                        <a:t>23 Colonial study rows extracted; need measured gate endpoints and record-to-video links</a:t>
-                      </a:r>
-                    </a:p>
-                  </a:txBody>
-                  <a:tcPr marL="73152" marR="73152" marT="36576" marB="36576" anchor="ctr">
-                    <a:lnL w="9525" cmpd="sng">
-                      <a:solidFill>
-                        <a:srgbClr val="BFBFBF"/>
-                      </a:solidFill>
-                      <a:prstDash val="solid"/>
-                    </a:lnL>
-                    <a:lnR w="9525" cmpd="sng">
-                      <a:solidFill>
-                        <a:srgbClr val="BFBFBF"/>
-                      </a:solidFill>
-                      <a:prstDash val="solid"/>
-                    </a:lnR>
-                    <a:lnT w="9525" cmpd="sng">
-                      <a:solidFill>
-                        <a:srgbClr val="BFBFBF"/>
-                      </a:solidFill>
-                      <a:prstDash val="solid"/>
-                    </a:lnT>
-                    <a:lnB w="9525" cmpd="sng">
-                      <a:solidFill>
-                        <a:srgbClr val="BFBFBF"/>
-                      </a:solidFill>
-                      <a:prstDash val="solid"/>
-                    </a:lnB>
-                  </a:tcPr>
-                </a:tc>
-              </a:tr>
-            </a:tbl>
-          </a:graphicData>
-        </a:graphic>
-      </p:graphicFrame>
+        </p:nvSpPr>
+        <p:spPr>
+          <a:xfrm>
+            <a:off x="612648" y="1383642"/>
+            <a:ext cx="10984620" cy="1077218"/>
+          </a:xfrm>
+          <a:prstGeom prst="rect">
+            <a:avLst/>
+          </a:prstGeom>
+          <a:noFill/>
+        </p:spPr>
+        <p:txBody>
+          <a:bodyPr wrap="square">
+            <a:spAutoFit/>
+          </a:bodyPr>
+          <a:lstStyle/>
+          <a:p>
+            <a:pPr marL="285750" indent="-285750">
+              <a:buFont typeface="Arial" panose="020B0604020202020204" pitchFamily="34" charset="0"/>
+              <a:buChar char="•"/>
+            </a:pPr>
+            <a:r>
+              <a:rPr lang="en-US" sz="1600" b="1" dirty="0">
+                <a:solidFill>
+                  <a:schemeClr val="tx1"/>
+                </a:solidFill>
+                <a:latin typeface="Arial"/>
+                <a:ea typeface="Arial"/>
+                <a:cs typeface="Arial"/>
+              </a:rPr>
+              <a:t>Physical cyclist speed= </a:t>
+            </a:r>
+            <a:r>
+              <a:rPr lang="en-US" sz="1600" dirty="0">
+                <a:ea typeface="Arial"/>
+                <a:cs typeface="Arial"/>
+              </a:rPr>
+              <a:t>23 Colonial study rows extracted; need measured gate endpoints and record-to-video links</a:t>
+            </a:r>
+          </a:p>
+          <a:p>
+            <a:pPr marL="285750" indent="-285750">
+              <a:buFont typeface="Arial" panose="020B0604020202020204" pitchFamily="34" charset="0"/>
+              <a:buChar char="•"/>
+            </a:pPr>
+            <a:r>
+              <a:rPr lang="en-US" sz="1600" dirty="0">
+                <a:ea typeface="Arial"/>
+                <a:cs typeface="Arial"/>
+              </a:rPr>
+              <a:t>Submit conference ppt</a:t>
+            </a:r>
+          </a:p>
+          <a:p>
+            <a:pPr marL="285750" indent="-285750">
+              <a:buFont typeface="Arial" panose="020B0604020202020204" pitchFamily="34" charset="0"/>
+              <a:buChar char="•"/>
+            </a:pPr>
+            <a:r>
+              <a:rPr lang="en-US" sz="1600" dirty="0">
+                <a:ea typeface="Arial"/>
+                <a:cs typeface="Arial"/>
+              </a:rPr>
+              <a:t>Poster prepare + carry-on?</a:t>
+            </a:r>
+          </a:p>
+          <a:p>
+            <a:pPr marL="285750" indent="-285750">
+              <a:buFont typeface="Arial" panose="020B0604020202020204" pitchFamily="34" charset="0"/>
+              <a:buChar char="•"/>
+            </a:pPr>
+            <a:endParaRPr lang="en-US" sz="1600" b="1" dirty="0">
+              <a:solidFill>
+                <a:schemeClr val="tx1"/>
+              </a:solidFill>
+              <a:latin typeface="Arial"/>
+              <a:ea typeface="Arial"/>
+              <a:cs typeface="Arial"/>
+            </a:endParaRPr>
+          </a:p>
+        </p:txBody>
+      </p:sp>
     </p:spTree>
     <p:extLst>
       <p:ext uri="{BB962C8B-B14F-4D97-AF65-F5344CB8AC3E}">
@@ -9059,6 +8625,9 @@
       </p:ext>
     </p:extLst>
   </p:cSld>
+  <p:clrMapOvr>
+    <a:masterClrMapping/>
+  </p:clrMapOvr>
 </p:sld>
 </file>
 
@@ -9344,5 +8913,294 @@
       </a:bgFillStyleLst>
     </a:fmtScheme>
   </a:themeElements>
+  <a:objectDefaults/>
+  <a:extraClrSchemeLst/>
+</a:theme>
+</file>
+
+<file path=ppt/theme/theme2.xml><?xml version="1.0" encoding="utf-8"?>
+<a:theme xmlns:a="http://schemas.openxmlformats.org/drawingml/2006/main" name="Weekly Update">
+  <a:themeElements>
+    <a:clrScheme name="Weekly Update">
+      <a:dk1>
+        <a:srgbClr val="000000"/>
+      </a:dk1>
+      <a:lt1>
+        <a:srgbClr val="FFFFFF"/>
+      </a:lt1>
+      <a:dk2>
+        <a:srgbClr val="333333"/>
+      </a:dk2>
+      <a:lt2>
+        <a:srgbClr val="EDEDED"/>
+      </a:lt2>
+      <a:accent1>
+        <a:srgbClr val="FFFF00"/>
+      </a:accent1>
+      <a:accent2>
+        <a:srgbClr val="2E7D32"/>
+      </a:accent2>
+      <a:accent3>
+        <a:srgbClr val="E65100"/>
+      </a:accent3>
+      <a:accent4>
+        <a:srgbClr val="C62828"/>
+      </a:accent4>
+      <a:accent5>
+        <a:srgbClr val="1565C0"/>
+      </a:accent5>
+      <a:accent6>
+        <a:srgbClr val="666666"/>
+      </a:accent6>
+      <a:hlink>
+        <a:srgbClr val="1565C0"/>
+      </a:hlink>
+      <a:folHlink>
+        <a:srgbClr val="666666"/>
+      </a:folHlink>
+    </a:clrScheme>
+    <a:fontScheme name="Weekly Update">
+      <a:majorFont>
+        <a:latin typeface="Arial"/>
+        <a:ea typeface=""/>
+        <a:cs typeface=""/>
+        <a:font script="Jpan" typeface="游ゴシック Light"/>
+        <a:font script="Hang" typeface="맑은 고딕"/>
+        <a:font script="Hans" typeface="等线 Light"/>
+        <a:font script="Hant" typeface="新細明體"/>
+        <a:font script="Arab" typeface="Times New Roman"/>
+        <a:font script="Hebr" typeface="Times New Roman"/>
+        <a:font script="Thai" typeface="Angsana New"/>
+        <a:font script="Ethi" typeface="Nyala"/>
+        <a:font script="Beng" typeface="Vrinda"/>
+        <a:font script="Gujr" typeface="Shruti"/>
+        <a:font script="Khmr" typeface="MoolBoran"/>
+        <a:font script="Knda" typeface="Tunga"/>
+        <a:font script="Guru" typeface="Raavi"/>
+        <a:font script="Cans" typeface="Euphemia"/>
+        <a:font script="Cher" typeface="Plantagenet Cherokee"/>
+        <a:font script="Yiii" typeface="Microsoft Yi Baiti"/>
+        <a:font script="Tibt" typeface="Microsoft Himalaya"/>
+        <a:font script="Thaa" typeface="MV Boli"/>
+        <a:font script="Deva" typeface="Mangal"/>
+        <a:font script="Telu" typeface="Gautami"/>
+        <a:font script="Taml" typeface="Latha"/>
+        <a:font script="Syrc" typeface="Estrangelo Edessa"/>
+        <a:font script="Orya" typeface="Kalinga"/>
+        <a:font script="Mlym" typeface="Kartika"/>
+        <a:font script="Laoo" typeface="DokChampa"/>
+        <a:font script="Sinh" typeface="Iskoola Pota"/>
+        <a:font script="Mong" typeface="Mongolian Baiti"/>
+        <a:font script="Viet" typeface="Times New Roman"/>
+        <a:font script="Uigh" typeface="Microsoft Uighur"/>
+        <a:font script="Geor" typeface="Sylfaen"/>
+        <a:font script="Armn" typeface="Arial"/>
+        <a:font script="Bugi" typeface="Leelawadee UI"/>
+        <a:font script="Bopo" typeface="Microsoft JhengHei"/>
+        <a:font script="Java" typeface="Javanese Text"/>
+        <a:font script="Lisu" typeface="Segoe UI"/>
+        <a:font script="Mymr" typeface="Myanmar Text"/>
+        <a:font script="Nkoo" typeface="Ebrima"/>
+        <a:font script="Olck" typeface="Nirmala UI"/>
+        <a:font script="Osma" typeface="Ebrima"/>
+        <a:font script="Phag" typeface="Phagspa"/>
+        <a:font script="Syrn" typeface="Estrangelo Edessa"/>
+        <a:font script="Syrj" typeface="Estrangelo Edessa"/>
+        <a:font script="Syre" typeface="Estrangelo Edessa"/>
+        <a:font script="Sora" typeface="Nirmala UI"/>
+        <a:font script="Tale" typeface="Microsoft Tai Le"/>
+        <a:font script="Talu" typeface="Microsoft New Tai Lue"/>
+        <a:font script="Tfng" typeface="Ebrima"/>
+      </a:majorFont>
+      <a:minorFont>
+        <a:latin typeface="Arial"/>
+        <a:ea typeface=""/>
+        <a:cs typeface=""/>
+        <a:font script="Jpan" typeface="游ゴシック"/>
+        <a:font script="Hang" typeface="맑은 고딕"/>
+        <a:font script="Hans" typeface="等线"/>
+        <a:font script="Hant" typeface="新細明體"/>
+        <a:font script="Arab" typeface="Arial"/>
+        <a:font script="Hebr" typeface="Arial"/>
+        <a:font script="Thai" typeface="Cordia New"/>
+        <a:font script="Ethi" typeface="Nyala"/>
+        <a:font script="Beng" typeface="Vrinda"/>
+        <a:font script="Gujr" typeface="Shruti"/>
+        <a:font script="Khmr" typeface="DaunPenh"/>
+        <a:font script="Knda" typeface="Tunga"/>
+        <a:font script="Guru" typeface="Raavi"/>
+        <a:font script="Cans" typeface="Euphemia"/>
+        <a:font script="Cher" typeface="Plantagenet Cherokee"/>
+        <a:font script="Yiii" typeface="Microsoft Yi Baiti"/>
+        <a:font script="Tibt" typeface="Microsoft Himalaya"/>
+        <a:font script="Thaa" typeface="MV Boli"/>
+        <a:font script="Deva" typeface="Mangal"/>
+        <a:font script="Telu" typeface="Gautami"/>
+        <a:font script="Taml" typeface="Latha"/>
+        <a:font script="Syrc" typeface="Estrangelo Edessa"/>
+        <a:font script="Orya" typeface="Kalinga"/>
+        <a:font script="Mlym" typeface="Kartika"/>
+        <a:font script="Laoo" typeface="DokChampa"/>
+        <a:font script="Sinh" typeface="Iskoola Pota"/>
+        <a:font script="Mong" typeface="Mongolian Baiti"/>
+        <a:font script="Viet" typeface="Arial"/>
+        <a:font script="Uigh" typeface="Microsoft Uighur"/>
+        <a:font script="Geor" typeface="Sylfaen"/>
+        <a:font script="Armn" typeface="Arial"/>
+        <a:font script="Bugi" typeface="Leelawadee UI"/>
+        <a:font script="Bopo" typeface="Microsoft JhengHei"/>
+        <a:font script="Java" typeface="Javanese Text"/>
+        <a:font script="Lisu" typeface="Segoe UI"/>
+        <a:font script="Mymr" typeface="Myanmar Text"/>
+        <a:font script="Nkoo" typeface="Ebrima"/>
+        <a:font script="Olck" typeface="Nirmala UI"/>
+        <a:font script="Osma" typeface="Ebrima"/>
+        <a:font script="Phag" typeface="Phagspa"/>
+        <a:font script="Syrn" typeface="Estrangelo Edessa"/>
+        <a:font script="Syrj" typeface="Estrangelo Edessa"/>
+        <a:font script="Syre" typeface="Estrangelo Edessa"/>
+        <a:font script="Sora" typeface="Nirmala UI"/>
+        <a:font script="Tale" typeface="Microsoft Tai Le"/>
+        <a:font script="Talu" typeface="Microsoft New Tai Lue"/>
+        <a:font script="Tfng" typeface="Ebrima"/>
+      </a:minorFont>
+    </a:fontScheme>
+    <a:fmtScheme name="Weekly Update">
+      <a:fillStyleLst>
+        <a:solidFill>
+          <a:schemeClr val="phClr"/>
+        </a:solidFill>
+        <a:gradFill rotWithShape="1">
+          <a:gsLst>
+            <a:gs pos="0">
+              <a:schemeClr val="phClr">
+                <a:tint val="67000"/>
+                <a:lumMod val="110000"/>
+                <a:satMod val="105000"/>
+              </a:schemeClr>
+            </a:gs>
+            <a:gs pos="50000">
+              <a:schemeClr val="phClr">
+                <a:tint val="73000"/>
+                <a:lumMod val="105000"/>
+                <a:satMod val="103000"/>
+              </a:schemeClr>
+            </a:gs>
+            <a:gs pos="100000">
+              <a:schemeClr val="phClr">
+                <a:tint val="81000"/>
+                <a:lumMod val="105000"/>
+                <a:satMod val="109000"/>
+              </a:schemeClr>
+            </a:gs>
+          </a:gsLst>
+          <a:lin ang="5400000" scaled="0"/>
+        </a:gradFill>
+        <a:gradFill rotWithShape="1">
+          <a:gsLst>
+            <a:gs pos="0">
+              <a:schemeClr val="phClr">
+                <a:tint val="94000"/>
+                <a:lumMod val="102000"/>
+                <a:satMod val="103000"/>
+              </a:schemeClr>
+            </a:gs>
+            <a:gs pos="50000">
+              <a:schemeClr val="phClr">
+                <a:shade val="100000"/>
+                <a:lumMod val="100000"/>
+                <a:satMod val="110000"/>
+              </a:schemeClr>
+            </a:gs>
+            <a:gs pos="100000">
+              <a:schemeClr val="phClr">
+                <a:shade val="78000"/>
+                <a:lumMod val="99000"/>
+                <a:satMod val="120000"/>
+              </a:schemeClr>
+            </a:gs>
+          </a:gsLst>
+          <a:lin ang="5400000" scaled="0"/>
+        </a:gradFill>
+      </a:fillStyleLst>
+      <a:lnStyleLst>
+        <a:ln w="6350">
+          <a:solidFill>
+            <a:schemeClr val="phClr"/>
+          </a:solidFill>
+          <a:prstDash val="solid"/>
+        </a:ln>
+        <a:ln w="12700">
+          <a:solidFill>
+            <a:schemeClr val="phClr"/>
+          </a:solidFill>
+          <a:prstDash val="solid"/>
+        </a:ln>
+        <a:ln w="19050">
+          <a:solidFill>
+            <a:schemeClr val="phClr"/>
+          </a:solidFill>
+          <a:prstDash val="solid"/>
+        </a:ln>
+      </a:lnStyleLst>
+      <a:effectStyleLst>
+        <a:effectStyle>
+          <a:effectLst/>
+        </a:effectStyle>
+        <a:effectStyle>
+          <a:effectLst/>
+        </a:effectStyle>
+        <a:effectStyle>
+          <a:effectLst>
+            <a:outerShdw blurRad="57150" dist="19050" dir="5400000" algn="ctr" rotWithShape="0">
+              <a:srgbClr val="000000">
+                <a:alpha val="63000"/>
+              </a:srgbClr>
+            </a:outerShdw>
+          </a:effectLst>
+        </a:effectStyle>
+      </a:effectStyleLst>
+      <a:bgFillStyleLst>
+        <a:solidFill>
+          <a:schemeClr val="phClr"/>
+        </a:solidFill>
+        <a:solidFill>
+          <a:schemeClr val="phClr">
+            <a:tint val="95000"/>
+            <a:satMod val="170000"/>
+          </a:schemeClr>
+        </a:solidFill>
+        <a:gradFill rotWithShape="1">
+          <a:gsLst>
+            <a:gs pos="0">
+              <a:schemeClr val="phClr">
+                <a:tint val="93000"/>
+                <a:shade val="98000"/>
+                <a:lumMod val="102000"/>
+                <a:satMod val="150000"/>
+              </a:schemeClr>
+            </a:gs>
+            <a:gs pos="50000">
+              <a:schemeClr val="phClr">
+                <a:tint val="98000"/>
+                <a:shade val="90000"/>
+                <a:lumMod val="103000"/>
+                <a:satMod val="130000"/>
+              </a:schemeClr>
+            </a:gs>
+            <a:gs pos="100000">
+              <a:schemeClr val="phClr">
+                <a:shade val="63000"/>
+                <a:satMod val="120000"/>
+              </a:schemeClr>
+            </a:gs>
+          </a:gsLst>
+          <a:lin ang="5400000" scaled="0"/>
+        </a:gradFill>
+      </a:bgFillStyleLst>
+    </a:fmtScheme>
+  </a:themeElements>
+  <a:objectDefaults/>
+  <a:extraClrSchemeLst/>
 </a:theme>
 </file>